--- a/Cauã Reck Mello 1DS.pptx
+++ b/Cauã Reck Mello 1DS.pptx
@@ -134,7 +134,7 @@
           <p:cNvPr id="14" name="Imagem 13">
             <a:extLst>
               <a:ext uri="{FF2B5EF4-FFF2-40B4-BE49-F238E27FC236}">
-                <a16:creationId xmlns:a16="http://schemas.microsoft.com/office/drawing/2014/main" xmlns="" id="{EC4CDF7D-CE14-F324-E21A-E4D1B1D3EA7C}"/>
+                <a16:creationId xmlns="" xmlns:a16="http://schemas.microsoft.com/office/drawing/2014/main" id="{EC4CDF7D-CE14-F324-E21A-E4D1B1D3EA7C}"/>
               </a:ext>
             </a:extLst>
           </p:cNvPr>
@@ -164,7 +164,7 @@
           <p:cNvPr id="16" name="Imagem 15">
             <a:extLst>
               <a:ext uri="{FF2B5EF4-FFF2-40B4-BE49-F238E27FC236}">
-                <a16:creationId xmlns:a16="http://schemas.microsoft.com/office/drawing/2014/main" xmlns="" id="{BEA03A5B-0605-9422-3F3E-E3FCB5D478C9}"/>
+                <a16:creationId xmlns="" xmlns:a16="http://schemas.microsoft.com/office/drawing/2014/main" id="{BEA03A5B-0605-9422-3F3E-E3FCB5D478C9}"/>
               </a:ext>
             </a:extLst>
           </p:cNvPr>
@@ -192,7 +192,7 @@
     </p:spTree>
     <p:extLst>
       <p:ext uri="{BB962C8B-B14F-4D97-AF65-F5344CB8AC3E}">
-        <p14:creationId xmlns:p14="http://schemas.microsoft.com/office/powerpoint/2010/main" xmlns="" val="1452606405"/>
+        <p14:creationId xmlns="" xmlns:p14="http://schemas.microsoft.com/office/powerpoint/2010/main" val="1452606405"/>
       </p:ext>
     </p:extLst>
   </p:cSld>
@@ -232,7 +232,7 @@
           <p:cNvPr id="9" name="Imagem 8">
             <a:extLst>
               <a:ext uri="{FF2B5EF4-FFF2-40B4-BE49-F238E27FC236}">
-                <a16:creationId xmlns:a16="http://schemas.microsoft.com/office/drawing/2014/main" xmlns="" id="{709CC232-D3EB-DEAC-D4F6-281456733994}"/>
+                <a16:creationId xmlns="" xmlns:a16="http://schemas.microsoft.com/office/drawing/2014/main" id="{709CC232-D3EB-DEAC-D4F6-281456733994}"/>
               </a:ext>
             </a:extLst>
           </p:cNvPr>
@@ -262,7 +262,7 @@
           <p:cNvPr id="4" name="Imagem 3">
             <a:extLst>
               <a:ext uri="{FF2B5EF4-FFF2-40B4-BE49-F238E27FC236}">
-                <a16:creationId xmlns:a16="http://schemas.microsoft.com/office/drawing/2014/main" xmlns="" id="{2B7AE131-185A-030B-C14D-5CF5052BF563}"/>
+                <a16:creationId xmlns="" xmlns:a16="http://schemas.microsoft.com/office/drawing/2014/main" id="{2B7AE131-185A-030B-C14D-5CF5052BF563}"/>
               </a:ext>
             </a:extLst>
           </p:cNvPr>
@@ -292,7 +292,7 @@
           <p:cNvPr id="6" name="Imagem 5">
             <a:extLst>
               <a:ext uri="{FF2B5EF4-FFF2-40B4-BE49-F238E27FC236}">
-                <a16:creationId xmlns:a16="http://schemas.microsoft.com/office/drawing/2014/main" xmlns="" id="{25C437E4-EF22-216D-8064-91BED8FE712F}"/>
+                <a16:creationId xmlns="" xmlns:a16="http://schemas.microsoft.com/office/drawing/2014/main" id="{25C437E4-EF22-216D-8064-91BED8FE712F}"/>
               </a:ext>
             </a:extLst>
           </p:cNvPr>
@@ -322,7 +322,7 @@
           <p:cNvPr id="10" name="Imagem 9">
             <a:extLst>
               <a:ext uri="{FF2B5EF4-FFF2-40B4-BE49-F238E27FC236}">
-                <a16:creationId xmlns:a16="http://schemas.microsoft.com/office/drawing/2014/main" xmlns="" id="{FAB54B22-B4C7-0C49-DC75-62B597EF4A53}"/>
+                <a16:creationId xmlns="" xmlns:a16="http://schemas.microsoft.com/office/drawing/2014/main" id="{FAB54B22-B4C7-0C49-DC75-62B597EF4A53}"/>
               </a:ext>
             </a:extLst>
           </p:cNvPr>
@@ -350,7 +350,7 @@
     </p:spTree>
     <p:extLst>
       <p:ext uri="{BB962C8B-B14F-4D97-AF65-F5344CB8AC3E}">
-        <p14:creationId xmlns:p14="http://schemas.microsoft.com/office/powerpoint/2010/main" xmlns="" val="3227819321"/>
+        <p14:creationId xmlns="" xmlns:p14="http://schemas.microsoft.com/office/powerpoint/2010/main" val="3227819321"/>
       </p:ext>
     </p:extLst>
   </p:cSld>
@@ -390,7 +390,7 @@
           <p:cNvPr id="11" name="Imagem 10">
             <a:extLst>
               <a:ext uri="{FF2B5EF4-FFF2-40B4-BE49-F238E27FC236}">
-                <a16:creationId xmlns:a16="http://schemas.microsoft.com/office/drawing/2014/main" xmlns="" id="{97E04D0E-1DE7-52B5-4BE5-15B5AA82B038}"/>
+                <a16:creationId xmlns="" xmlns:a16="http://schemas.microsoft.com/office/drawing/2014/main" id="{97E04D0E-1DE7-52B5-4BE5-15B5AA82B038}"/>
               </a:ext>
             </a:extLst>
           </p:cNvPr>
@@ -420,7 +420,7 @@
           <p:cNvPr id="12" name="Imagem 11">
             <a:extLst>
               <a:ext uri="{FF2B5EF4-FFF2-40B4-BE49-F238E27FC236}">
-                <a16:creationId xmlns:a16="http://schemas.microsoft.com/office/drawing/2014/main" xmlns="" id="{ECAD9FBC-7448-E582-3020-FF62976BEC93}"/>
+                <a16:creationId xmlns="" xmlns:a16="http://schemas.microsoft.com/office/drawing/2014/main" id="{ECAD9FBC-7448-E582-3020-FF62976BEC93}"/>
               </a:ext>
             </a:extLst>
           </p:cNvPr>
@@ -448,7 +448,7 @@
     </p:spTree>
     <p:extLst>
       <p:ext uri="{BB962C8B-B14F-4D97-AF65-F5344CB8AC3E}">
-        <p14:creationId xmlns:p14="http://schemas.microsoft.com/office/powerpoint/2010/main" xmlns="" val="4153823153"/>
+        <p14:creationId xmlns="" xmlns:p14="http://schemas.microsoft.com/office/powerpoint/2010/main" val="4153823153"/>
       </p:ext>
     </p:extLst>
   </p:cSld>
@@ -483,7 +483,7 @@
     </p:spTree>
     <p:extLst>
       <p:ext uri="{BB962C8B-B14F-4D97-AF65-F5344CB8AC3E}">
-        <p14:creationId xmlns:p14="http://schemas.microsoft.com/office/powerpoint/2010/main" xmlns="" val="564066529"/>
+        <p14:creationId xmlns="" xmlns:p14="http://schemas.microsoft.com/office/powerpoint/2010/main" val="564066529"/>
       </p:ext>
     </p:extLst>
   </p:cSld>
@@ -798,7 +798,7 @@
           <p:cNvPr id="16" name="Título 1">
             <a:extLst>
               <a:ext uri="{FF2B5EF4-FFF2-40B4-BE49-F238E27FC236}">
-                <a16:creationId xmlns:a16="http://schemas.microsoft.com/office/drawing/2014/main" xmlns="" id="{B8D3994E-2F48-AC7A-CB89-89DE77EB8EAA}"/>
+                <a16:creationId xmlns="" xmlns:a16="http://schemas.microsoft.com/office/drawing/2014/main" id="{B8D3994E-2F48-AC7A-CB89-89DE77EB8EAA}"/>
               </a:ext>
             </a:extLst>
           </p:cNvPr>
@@ -876,18 +876,7 @@
                 <a:ea typeface="Verdana" pitchFamily="34" charset="0"/>
                 <a:cs typeface="Verdana" pitchFamily="34" charset="0"/>
               </a:rPr>
-              <a:t>PowerPoint</a:t>
-            </a:r>
-            <a:r>
-              <a:rPr lang="pt-BR" sz="1600" b="1" dirty="0" smtClean="0">
-                <a:solidFill>
-                  <a:schemeClr val="bg1"/>
-                </a:solidFill>
-                <a:latin typeface="Verdana" pitchFamily="34" charset="0"/>
-                <a:ea typeface="Verdana" pitchFamily="34" charset="0"/>
-                <a:cs typeface="Verdana" pitchFamily="34" charset="0"/>
-              </a:rPr>
-              <a:t> </a:t>
+              <a:t>PowerPoint </a:t>
             </a:r>
             <a:endParaRPr lang="pt-BR" sz="1600" dirty="0">
               <a:solidFill>
@@ -913,18 +902,7 @@
                 <a:ea typeface="Verdana" pitchFamily="34" charset="0"/>
                 <a:cs typeface="Verdana" pitchFamily="34" charset="0"/>
               </a:rPr>
-              <a:t>Desenvolvimento De Sistemas </a:t>
-            </a:r>
-            <a:r>
-              <a:rPr lang="pt-BR" sz="1600" dirty="0" smtClean="0">
-                <a:solidFill>
-                  <a:schemeClr val="bg1"/>
-                </a:solidFill>
-                <a:latin typeface="Verdana" pitchFamily="34" charset="0"/>
-                <a:ea typeface="Verdana" pitchFamily="34" charset="0"/>
-                <a:cs typeface="Verdana" pitchFamily="34" charset="0"/>
-              </a:rPr>
-              <a:t>Primeiro Ano</a:t>
+              <a:t>Desenvolvimento De Sistemas Primeiro Ano</a:t>
             </a:r>
           </a:p>
           <a:p>
@@ -977,10 +955,34 @@
           </a:p>
         </p:txBody>
       </p:sp>
+      <p:pic>
+        <p:nvPicPr>
+          <p:cNvPr id="3" name="Imagem 2" descr="cps-removebg-preview.png"/>
+          <p:cNvPicPr>
+            <a:picLocks noChangeAspect="1"/>
+          </p:cNvPicPr>
+          <p:nvPr/>
+        </p:nvPicPr>
+        <p:blipFill>
+          <a:blip r:embed="rId2"/>
+          <a:stretch>
+            <a:fillRect/>
+          </a:stretch>
+        </p:blipFill>
+        <p:spPr>
+          <a:xfrm>
+            <a:off x="0" y="4585649"/>
+            <a:ext cx="1676614" cy="1676614"/>
+          </a:xfrm>
+          <a:prstGeom prst="rect">
+            <a:avLst/>
+          </a:prstGeom>
+        </p:spPr>
+      </p:pic>
     </p:spTree>
     <p:extLst>
       <p:ext uri="{BB962C8B-B14F-4D97-AF65-F5344CB8AC3E}">
-        <p14:creationId xmlns:p14="http://schemas.microsoft.com/office/powerpoint/2010/main" xmlns="" val="3541278742"/>
+        <p14:creationId xmlns="" xmlns:p14="http://schemas.microsoft.com/office/powerpoint/2010/main" val="3541278742"/>
       </p:ext>
     </p:extLst>
   </p:cSld>
@@ -1022,8 +1024,8 @@
         </p:nvSpPr>
         <p:spPr>
           <a:xfrm>
-            <a:off x="4669167" y="286603"/>
-            <a:ext cx="2853666" cy="769441"/>
+            <a:off x="4411084" y="286603"/>
+            <a:ext cx="3369833" cy="830997"/>
           </a:xfrm>
           <a:prstGeom prst="rect">
             <a:avLst/>
@@ -1038,7 +1040,7 @@
           <a:p>
             <a:pPr algn="ctr"/>
             <a:r>
-              <a:rPr lang="pt-BR" sz="4400" dirty="0" smtClean="0">
+              <a:rPr lang="pt-BR" sz="4800" b="1" dirty="0" smtClean="0">
                 <a:solidFill>
                   <a:schemeClr val="bg1"/>
                 </a:solidFill>
@@ -1047,7 +1049,7 @@
               </a:rPr>
               <a:t>Introdução</a:t>
             </a:r>
-            <a:endParaRPr lang="pt-BR" sz="4400" dirty="0">
+            <a:endParaRPr lang="pt-BR" sz="4400" b="1" dirty="0">
               <a:solidFill>
                 <a:schemeClr val="bg1"/>
               </a:solidFill>
@@ -1081,7 +1083,7 @@
           <a:p>
             <a:pPr algn="ctr"/>
             <a:r>
-              <a:rPr lang="pt-BR" sz="3600" dirty="0" smtClean="0">
+              <a:rPr lang="pt-BR" sz="3600" b="1" i="1" dirty="0" smtClean="0">
                 <a:solidFill>
                   <a:schemeClr val="bg1"/>
                 </a:solidFill>
@@ -1091,7 +1093,7 @@
               <a:t>Os atalhos do PowerPoint são combinações de teclas que ajudam a realizar tarefas de forma mais rápida e eficiente. Em vez de usar o mouse para tudo, é possível economizar tempo utilizando comandos simples no teclado. Esses atalhos são muito úteis principalmente para estudantes e profissionais que precisam criar apresentações com </a:t>
             </a:r>
             <a:r>
-              <a:rPr lang="pt-BR" sz="3600" dirty="0" err="1" smtClean="0">
+              <a:rPr lang="pt-BR" sz="3600" b="1" i="1" dirty="0" err="1" smtClean="0">
                 <a:solidFill>
                   <a:schemeClr val="bg1"/>
                 </a:solidFill>
@@ -1101,7 +1103,7 @@
               <a:t>frequência</a:t>
             </a:r>
             <a:r>
-              <a:rPr lang="pt-BR" sz="3600" dirty="0" smtClean="0">
+              <a:rPr lang="pt-BR" sz="3600" b="1" i="1" dirty="0" smtClean="0">
                 <a:solidFill>
                   <a:schemeClr val="bg1"/>
                 </a:solidFill>
@@ -1110,20 +1112,37 @@
               </a:rPr>
               <a:t>. Além disso, aprender esses comandos facilita a organização do trabalho e melhora a produtividade, tornando o uso do PowerPoint mais prático no dia a dia.</a:t>
             </a:r>
-            <a:endParaRPr lang="pt-BR" sz="3600" b="1" dirty="0" smtClean="0">
-              <a:solidFill>
-                <a:schemeClr val="bg1"/>
-              </a:solidFill>
-              <a:latin typeface="Times New Roman" pitchFamily="18" charset="0"/>
-              <a:cs typeface="Times New Roman" pitchFamily="18" charset="0"/>
-            </a:endParaRPr>
           </a:p>
         </p:txBody>
       </p:sp>
+      <p:pic>
+        <p:nvPicPr>
+          <p:cNvPr id="4" name="Imagem 3" descr="cps-removebg-preview.png"/>
+          <p:cNvPicPr>
+            <a:picLocks noChangeAspect="1"/>
+          </p:cNvPicPr>
+          <p:nvPr/>
+        </p:nvPicPr>
+        <p:blipFill>
+          <a:blip r:embed="rId2"/>
+          <a:stretch>
+            <a:fillRect/>
+          </a:stretch>
+        </p:blipFill>
+        <p:spPr>
+          <a:xfrm>
+            <a:off x="9268890" y="-163773"/>
+            <a:ext cx="2143125" cy="2143125"/>
+          </a:xfrm>
+          <a:prstGeom prst="rect">
+            <a:avLst/>
+          </a:prstGeom>
+        </p:spPr>
+      </p:pic>
     </p:spTree>
     <p:extLst>
       <p:ext uri="{BB962C8B-B14F-4D97-AF65-F5344CB8AC3E}">
-        <p14:creationId xmlns:p14="http://schemas.microsoft.com/office/powerpoint/2010/main" xmlns="" val="2347594821"/>
+        <p14:creationId xmlns="" xmlns:p14="http://schemas.microsoft.com/office/powerpoint/2010/main" val="2347594821"/>
       </p:ext>
     </p:extLst>
   </p:cSld>
@@ -1165,8 +1184,8 @@
         </p:nvSpPr>
         <p:spPr>
           <a:xfrm>
-            <a:off x="3838812" y="286603"/>
-            <a:ext cx="4514376" cy="769441"/>
+            <a:off x="3451686" y="286603"/>
+            <a:ext cx="5288628" cy="830997"/>
           </a:xfrm>
           <a:prstGeom prst="rect">
             <a:avLst/>
@@ -1181,7 +1200,7 @@
           <a:p>
             <a:pPr algn="ctr"/>
             <a:r>
-              <a:rPr lang="pt-BR" sz="4400" dirty="0" smtClean="0">
+              <a:rPr lang="pt-BR" sz="4800" b="1" dirty="0" smtClean="0">
                 <a:solidFill>
                   <a:schemeClr val="bg1"/>
                 </a:solidFill>
@@ -1190,7 +1209,7 @@
               </a:rPr>
               <a:t>Desenvolvimento</a:t>
             </a:r>
-            <a:endParaRPr lang="pt-BR" sz="4400" dirty="0">
+            <a:endParaRPr lang="pt-BR" sz="4400" b="1" dirty="0">
               <a:solidFill>
                 <a:schemeClr val="bg1"/>
               </a:solidFill>
@@ -1224,7 +1243,7 @@
           <a:p>
             <a:pPr algn="ctr"/>
             <a:r>
-              <a:rPr lang="pt-BR" sz="3600" b="1" dirty="0" smtClean="0">
+              <a:rPr lang="pt-BR" sz="3600" b="1" i="1" dirty="0" smtClean="0">
                 <a:solidFill>
                   <a:schemeClr val="bg1"/>
                 </a:solidFill>
@@ -1234,7 +1253,7 @@
               <a:t>Existem vários atalhos básicos que ajudam na criação de apresentações. Por exemplo, o comando </a:t>
             </a:r>
             <a:r>
-              <a:rPr lang="pt-BR" sz="3600" b="1" dirty="0" err="1" smtClean="0">
+              <a:rPr lang="pt-BR" sz="3600" b="1" i="1" dirty="0" err="1" smtClean="0">
                 <a:solidFill>
                   <a:schemeClr val="bg1"/>
                 </a:solidFill>
@@ -1244,7 +1263,7 @@
               <a:t>Ctrl</a:t>
             </a:r>
             <a:r>
-              <a:rPr lang="pt-BR" sz="3600" b="1" dirty="0" smtClean="0">
+              <a:rPr lang="pt-BR" sz="3600" b="1" i="1" dirty="0" smtClean="0">
                 <a:solidFill>
                   <a:schemeClr val="bg1"/>
                 </a:solidFill>
@@ -1254,7 +1273,7 @@
               <a:t> + N cria uma nova apresentação, enquanto </a:t>
             </a:r>
             <a:r>
-              <a:rPr lang="pt-BR" sz="3600" b="1" dirty="0" err="1" smtClean="0">
+              <a:rPr lang="pt-BR" sz="3600" b="1" i="1" dirty="0" err="1" smtClean="0">
                 <a:solidFill>
                   <a:schemeClr val="bg1"/>
                 </a:solidFill>
@@ -1264,7 +1283,7 @@
               <a:t>Ctrl</a:t>
             </a:r>
             <a:r>
-              <a:rPr lang="pt-BR" sz="3600" b="1" dirty="0" smtClean="0">
+              <a:rPr lang="pt-BR" sz="3600" b="1" i="1" dirty="0" smtClean="0">
                 <a:solidFill>
                   <a:schemeClr val="bg1"/>
                 </a:solidFill>
@@ -1274,7 +1293,7 @@
               <a:t> + O abre um arquivo já existente. Para salvar rapidamente, usamos </a:t>
             </a:r>
             <a:r>
-              <a:rPr lang="pt-BR" sz="3600" b="1" dirty="0" err="1" smtClean="0">
+              <a:rPr lang="pt-BR" sz="3600" b="1" i="1" dirty="0" err="1" smtClean="0">
                 <a:solidFill>
                   <a:schemeClr val="bg1"/>
                 </a:solidFill>
@@ -1284,7 +1303,7 @@
               <a:t>Ctrl</a:t>
             </a:r>
             <a:r>
-              <a:rPr lang="pt-BR" sz="3600" b="1" dirty="0" smtClean="0">
+              <a:rPr lang="pt-BR" sz="3600" b="1" i="1" dirty="0" smtClean="0">
                 <a:solidFill>
                   <a:schemeClr val="bg1"/>
                 </a:solidFill>
@@ -1294,7 +1313,7 @@
               <a:t> + S, que é um dos mais importantes para evitar a perda de trabalho. Outro atalho comum é o </a:t>
             </a:r>
             <a:r>
-              <a:rPr lang="pt-BR" sz="3600" b="1" dirty="0" err="1" smtClean="0">
+              <a:rPr lang="pt-BR" sz="3600" b="1" i="1" dirty="0" err="1" smtClean="0">
                 <a:solidFill>
                   <a:schemeClr val="bg1"/>
                 </a:solidFill>
@@ -1304,7 +1323,7 @@
               <a:t>Ctrl</a:t>
             </a:r>
             <a:r>
-              <a:rPr lang="pt-BR" sz="3600" b="1" dirty="0" smtClean="0">
+              <a:rPr lang="pt-BR" sz="3600" b="1" i="1" dirty="0" smtClean="0">
                 <a:solidFill>
                   <a:schemeClr val="bg1"/>
                 </a:solidFill>
@@ -1316,10 +1335,34 @@
           </a:p>
         </p:txBody>
       </p:sp>
+      <p:pic>
+        <p:nvPicPr>
+          <p:cNvPr id="4" name="Imagem 3" descr="cps-removebg-preview.png"/>
+          <p:cNvPicPr>
+            <a:picLocks noChangeAspect="1"/>
+          </p:cNvPicPr>
+          <p:nvPr/>
+        </p:nvPicPr>
+        <p:blipFill>
+          <a:blip r:embed="rId2"/>
+          <a:stretch>
+            <a:fillRect/>
+          </a:stretch>
+        </p:blipFill>
+        <p:spPr>
+          <a:xfrm>
+            <a:off x="9214300" y="-204716"/>
+            <a:ext cx="2143125" cy="2143125"/>
+          </a:xfrm>
+          <a:prstGeom prst="rect">
+            <a:avLst/>
+          </a:prstGeom>
+        </p:spPr>
+      </p:pic>
     </p:spTree>
     <p:extLst>
       <p:ext uri="{BB962C8B-B14F-4D97-AF65-F5344CB8AC3E}">
-        <p14:creationId xmlns:p14="http://schemas.microsoft.com/office/powerpoint/2010/main" xmlns="" val="2347594821"/>
+        <p14:creationId xmlns="" xmlns:p14="http://schemas.microsoft.com/office/powerpoint/2010/main" val="2347594821"/>
       </p:ext>
     </p:extLst>
   </p:cSld>
@@ -1361,8 +1404,8 @@
         </p:nvSpPr>
         <p:spPr>
           <a:xfrm>
-            <a:off x="3838812" y="286603"/>
-            <a:ext cx="4514376" cy="769441"/>
+            <a:off x="3451686" y="286603"/>
+            <a:ext cx="5288628" cy="830997"/>
           </a:xfrm>
           <a:prstGeom prst="rect">
             <a:avLst/>
@@ -1377,7 +1420,7 @@
           <a:p>
             <a:pPr algn="ctr"/>
             <a:r>
-              <a:rPr lang="pt-BR" sz="4400" dirty="0" smtClean="0">
+              <a:rPr lang="pt-BR" sz="4800" b="1" dirty="0" smtClean="0">
                 <a:solidFill>
                   <a:schemeClr val="bg1"/>
                 </a:solidFill>
@@ -1386,7 +1429,7 @@
               </a:rPr>
               <a:t>Desenvolvimento</a:t>
             </a:r>
-            <a:endParaRPr lang="pt-BR" sz="4400" dirty="0">
+            <a:endParaRPr lang="pt-BR" sz="4400" b="1" dirty="0">
               <a:solidFill>
                 <a:schemeClr val="bg1"/>
               </a:solidFill>
@@ -1420,104 +1463,34 @@
           <a:p>
             <a:pPr algn="ctr"/>
             <a:r>
-              <a:rPr lang="pt-BR" sz="3600" dirty="0" smtClean="0">
+              <a:rPr lang="pt-BR" sz="3600" b="1" i="1" dirty="0" smtClean="0">
                 <a:solidFill>
                   <a:schemeClr val="bg1"/>
                 </a:solidFill>
                 <a:latin typeface="Times New Roman" pitchFamily="18" charset="0"/>
                 <a:cs typeface="Times New Roman" pitchFamily="18" charset="0"/>
               </a:rPr>
-              <a:t>Além dos atalhos básicos, existem também atalhos que ajudam durante a apresentação. Por exemplo, pressionar </a:t>
-            </a:r>
-            <a:r>
-              <a:rPr lang="pt-BR" sz="3600" b="1" dirty="0" smtClean="0">
+              <a:t>Além dos atalhos básicos, existem também atalhos que ajudam durante a apresentação. Por exemplo, pressionar F5 inicia a apresentação desde o começo, enquanto </a:t>
+            </a:r>
+            <a:r>
+              <a:rPr lang="pt-BR" sz="3600" b="1" i="1" dirty="0" err="1" smtClean="0">
                 <a:solidFill>
                   <a:schemeClr val="bg1"/>
                 </a:solidFill>
                 <a:latin typeface="Times New Roman" pitchFamily="18" charset="0"/>
                 <a:cs typeface="Times New Roman" pitchFamily="18" charset="0"/>
               </a:rPr>
-              <a:t>F5</a:t>
-            </a:r>
-            <a:r>
-              <a:rPr lang="pt-BR" sz="3600" dirty="0" smtClean="0">
+              <a:t>Shift</a:t>
+            </a:r>
+            <a:r>
+              <a:rPr lang="pt-BR" sz="3600" b="1" i="1" dirty="0" smtClean="0">
                 <a:solidFill>
                   <a:schemeClr val="bg1"/>
                 </a:solidFill>
                 <a:latin typeface="Times New Roman" pitchFamily="18" charset="0"/>
                 <a:cs typeface="Times New Roman" pitchFamily="18" charset="0"/>
               </a:rPr>
-              <a:t> inicia a apresentação desde o começo, enquanto </a:t>
-            </a:r>
-            <a:r>
-              <a:rPr lang="pt-BR" sz="3600" b="1" dirty="0" err="1" smtClean="0">
-                <a:solidFill>
-                  <a:schemeClr val="bg1"/>
-                </a:solidFill>
-                <a:latin typeface="Times New Roman" pitchFamily="18" charset="0"/>
-                <a:cs typeface="Times New Roman" pitchFamily="18" charset="0"/>
-              </a:rPr>
-              <a:t>Shift</a:t>
-            </a:r>
-            <a:r>
-              <a:rPr lang="pt-BR" sz="3600" b="1" dirty="0" smtClean="0">
-                <a:solidFill>
-                  <a:schemeClr val="bg1"/>
-                </a:solidFill>
-                <a:latin typeface="Times New Roman" pitchFamily="18" charset="0"/>
-                <a:cs typeface="Times New Roman" pitchFamily="18" charset="0"/>
-              </a:rPr>
-              <a:t> + F5</a:t>
-            </a:r>
-            <a:r>
-              <a:rPr lang="pt-BR" sz="3600" dirty="0" smtClean="0">
-                <a:solidFill>
-                  <a:schemeClr val="bg1"/>
-                </a:solidFill>
-                <a:latin typeface="Times New Roman" pitchFamily="18" charset="0"/>
-                <a:cs typeface="Times New Roman" pitchFamily="18" charset="0"/>
-              </a:rPr>
-              <a:t> inicia do slide atual. Durante a apresentação, a tecla </a:t>
-            </a:r>
-            <a:r>
-              <a:rPr lang="pt-BR" sz="3600" b="1" dirty="0" smtClean="0">
-                <a:solidFill>
-                  <a:schemeClr val="bg1"/>
-                </a:solidFill>
-                <a:latin typeface="Times New Roman" pitchFamily="18" charset="0"/>
-                <a:cs typeface="Times New Roman" pitchFamily="18" charset="0"/>
-              </a:rPr>
-              <a:t>B</a:t>
-            </a:r>
-            <a:r>
-              <a:rPr lang="pt-BR" sz="3600" dirty="0" smtClean="0">
-                <a:solidFill>
-                  <a:schemeClr val="bg1"/>
-                </a:solidFill>
-                <a:latin typeface="Times New Roman" pitchFamily="18" charset="0"/>
-                <a:cs typeface="Times New Roman" pitchFamily="18" charset="0"/>
-              </a:rPr>
-              <a:t> deixa a tela preta e a tecla </a:t>
-            </a:r>
-            <a:r>
-              <a:rPr lang="pt-BR" sz="3600" b="1" dirty="0" smtClean="0">
-                <a:solidFill>
-                  <a:schemeClr val="bg1"/>
-                </a:solidFill>
-                <a:latin typeface="Times New Roman" pitchFamily="18" charset="0"/>
-                <a:cs typeface="Times New Roman" pitchFamily="18" charset="0"/>
-              </a:rPr>
-              <a:t>W</a:t>
-            </a:r>
-            <a:r>
-              <a:rPr lang="pt-BR" sz="3600" dirty="0" smtClean="0">
-                <a:solidFill>
-                  <a:schemeClr val="bg1"/>
-                </a:solidFill>
-                <a:latin typeface="Times New Roman" pitchFamily="18" charset="0"/>
-                <a:cs typeface="Times New Roman" pitchFamily="18" charset="0"/>
-              </a:rPr>
-              <a:t> deixa a tela branca, o que pode ser útil para focar a atenção do público. Também é possível usar as setas do teclado para avançar ou voltar os slides. Esses atalhos ajudam a tornar a apresentação mais profissional e organizada.</a:t>
+              <a:t> + F5 inicia do slide atual. Durante a apresentação, a tecla B deixa a tela preta e a tecla W deixa a tela branca, o que pode ser útil para focar a atenção do público. Também é possível usar as setas do teclado para avançar ou voltar os slides. Esses atalhos ajudam a tornar a apresentação mais profissional e organizada.</a:t>
             </a:r>
           </a:p>
           <a:p>
@@ -1532,10 +1505,34 @@
           </a:p>
         </p:txBody>
       </p:sp>
+      <p:pic>
+        <p:nvPicPr>
+          <p:cNvPr id="4" name="Imagem 3" descr="cps-removebg-preview.png"/>
+          <p:cNvPicPr>
+            <a:picLocks noChangeAspect="1"/>
+          </p:cNvPicPr>
+          <p:nvPr/>
+        </p:nvPicPr>
+        <p:blipFill>
+          <a:blip r:embed="rId2"/>
+          <a:stretch>
+            <a:fillRect/>
+          </a:stretch>
+        </p:blipFill>
+        <p:spPr>
+          <a:xfrm>
+            <a:off x="9255243" y="-232012"/>
+            <a:ext cx="2143125" cy="2143125"/>
+          </a:xfrm>
+          <a:prstGeom prst="rect">
+            <a:avLst/>
+          </a:prstGeom>
+        </p:spPr>
+      </p:pic>
     </p:spTree>
     <p:extLst>
       <p:ext uri="{BB962C8B-B14F-4D97-AF65-F5344CB8AC3E}">
-        <p14:creationId xmlns:p14="http://schemas.microsoft.com/office/powerpoint/2010/main" xmlns="" val="2347594821"/>
+        <p14:creationId xmlns="" xmlns:p14="http://schemas.microsoft.com/office/powerpoint/2010/main" val="2347594821"/>
       </p:ext>
     </p:extLst>
   </p:cSld>
@@ -1577,8 +1574,8 @@
         </p:nvSpPr>
         <p:spPr>
           <a:xfrm>
-            <a:off x="4669969" y="286603"/>
-            <a:ext cx="2852063" cy="769441"/>
+            <a:off x="4427915" y="286603"/>
+            <a:ext cx="3336170" cy="830997"/>
           </a:xfrm>
           <a:prstGeom prst="rect">
             <a:avLst/>
@@ -1593,7 +1590,7 @@
           <a:p>
             <a:pPr algn="ctr"/>
             <a:r>
-              <a:rPr lang="pt-BR" sz="4400" dirty="0" smtClean="0">
+              <a:rPr lang="pt-BR" sz="4800" b="1" dirty="0" smtClean="0">
                 <a:solidFill>
                   <a:schemeClr val="bg1"/>
                 </a:solidFill>
@@ -1602,7 +1599,7 @@
               </a:rPr>
               <a:t>Conclusão</a:t>
             </a:r>
-            <a:endParaRPr lang="pt-BR" sz="4400" dirty="0">
+            <a:endParaRPr lang="pt-BR" sz="4800" b="1" dirty="0">
               <a:solidFill>
                 <a:schemeClr val="bg1"/>
               </a:solidFill>
@@ -1636,7 +1633,7 @@
           <a:p>
             <a:pPr algn="ctr"/>
             <a:r>
-              <a:rPr lang="pt-BR" sz="4000" dirty="0" smtClean="0">
+              <a:rPr lang="pt-BR" sz="4000" b="1" i="1" dirty="0" smtClean="0">
                 <a:solidFill>
                   <a:schemeClr val="bg1"/>
                 </a:solidFill>
@@ -1658,10 +1655,34 @@
           </a:p>
         </p:txBody>
       </p:sp>
+      <p:pic>
+        <p:nvPicPr>
+          <p:cNvPr id="4" name="Imagem 3" descr="cps-removebg-preview.png"/>
+          <p:cNvPicPr>
+            <a:picLocks noChangeAspect="1"/>
+          </p:cNvPicPr>
+          <p:nvPr/>
+        </p:nvPicPr>
+        <p:blipFill>
+          <a:blip r:embed="rId2"/>
+          <a:stretch>
+            <a:fillRect/>
+          </a:stretch>
+        </p:blipFill>
+        <p:spPr>
+          <a:xfrm>
+            <a:off x="9241595" y="-286603"/>
+            <a:ext cx="2143125" cy="2143125"/>
+          </a:xfrm>
+          <a:prstGeom prst="rect">
+            <a:avLst/>
+          </a:prstGeom>
+        </p:spPr>
+      </p:pic>
     </p:spTree>
     <p:extLst>
       <p:ext uri="{BB962C8B-B14F-4D97-AF65-F5344CB8AC3E}">
-        <p14:creationId xmlns:p14="http://schemas.microsoft.com/office/powerpoint/2010/main" xmlns="" val="2347594821"/>
+        <p14:creationId xmlns="" xmlns:p14="http://schemas.microsoft.com/office/powerpoint/2010/main" val="2347594821"/>
       </p:ext>
     </p:extLst>
   </p:cSld>
@@ -1700,7 +1721,7 @@
           <p:cNvPr id="8" name="Título 1">
             <a:extLst>
               <a:ext uri="{FF2B5EF4-FFF2-40B4-BE49-F238E27FC236}">
-                <a16:creationId xmlns:a16="http://schemas.microsoft.com/office/drawing/2014/main" xmlns="" id="{2048CA6E-79FE-BF7D-AF35-0F458ED105B9}"/>
+                <a16:creationId xmlns="" xmlns:a16="http://schemas.microsoft.com/office/drawing/2014/main" id="{2048CA6E-79FE-BF7D-AF35-0F458ED105B9}"/>
               </a:ext>
             </a:extLst>
           </p:cNvPr>
@@ -1711,8 +1732,8 @@
         </p:nvSpPr>
         <p:spPr>
           <a:xfrm>
-            <a:off x="4574087" y="4794337"/>
-            <a:ext cx="3043825" cy="275573"/>
+            <a:off x="3558560" y="4804012"/>
+            <a:ext cx="5074880" cy="279546"/>
           </a:xfrm>
           <a:prstGeom prst="rect">
             <a:avLst/>
@@ -1720,7 +1741,7 @@
         </p:spPr>
         <p:txBody>
           <a:bodyPr anchor="ctr">
-            <a:normAutofit fontScale="90000" lnSpcReduction="20000"/>
+            <a:noAutofit/>
           </a:bodyPr>
           <a:lstStyle>
             <a:lvl1pPr algn="l" defTabSz="914400" rtl="0" eaLnBrk="1" latinLnBrk="0" hangingPunct="1">
@@ -1744,23 +1765,47 @@
           <a:p>
             <a:pPr algn="ctr"/>
             <a:r>
-              <a:rPr lang="pt-BR" sz="1800" b="1" dirty="0">
-                <a:solidFill>
-                  <a:schemeClr val="bg1"/>
-                </a:solidFill>
-                <a:latin typeface="Verdana" panose="020B0604030504040204" pitchFamily="34" charset="0"/>
+              <a:rPr lang="pt-BR" sz="4800" b="1" i="1" dirty="0">
+                <a:solidFill>
+                  <a:schemeClr val="bg1"/>
+                </a:solidFill>
+                <a:latin typeface="Arial" pitchFamily="34" charset="0"/>
                 <a:ea typeface="Verdana" panose="020B0604030504040204" pitchFamily="34" charset="0"/>
-                <a:cs typeface="Verdana" panose="020B0604030504040204" pitchFamily="34" charset="0"/>
+                <a:cs typeface="Arial" pitchFamily="34" charset="0"/>
               </a:rPr>
               <a:t>OBRIGADO</a:t>
             </a:r>
           </a:p>
         </p:txBody>
       </p:sp>
+      <p:pic>
+        <p:nvPicPr>
+          <p:cNvPr id="3" name="Imagem 2" descr="cps-removebg-preview.png"/>
+          <p:cNvPicPr>
+            <a:picLocks noChangeAspect="1"/>
+          </p:cNvPicPr>
+          <p:nvPr/>
+        </p:nvPicPr>
+        <p:blipFill>
+          <a:blip r:embed="rId2"/>
+          <a:stretch>
+            <a:fillRect/>
+          </a:stretch>
+        </p:blipFill>
+        <p:spPr>
+          <a:xfrm>
+            <a:off x="5024438" y="436729"/>
+            <a:ext cx="2143125" cy="2143125"/>
+          </a:xfrm>
+          <a:prstGeom prst="rect">
+            <a:avLst/>
+          </a:prstGeom>
+        </p:spPr>
+      </p:pic>
     </p:spTree>
     <p:extLst>
       <p:ext uri="{BB962C8B-B14F-4D97-AF65-F5344CB8AC3E}">
-        <p14:creationId xmlns:p14="http://schemas.microsoft.com/office/powerpoint/2010/main" xmlns="" val="2611822716"/>
+        <p14:creationId xmlns="" xmlns:p14="http://schemas.microsoft.com/office/powerpoint/2010/main" val="2611822716"/>
       </p:ext>
     </p:extLst>
   </p:cSld>
@@ -2066,7 +2111,7 @@
   <a:extraClrSchemeLst/>
   <a:extLst>
     <a:ext uri="{05A4C25C-085E-4340-85A3-A5531E510DB2}">
-      <thm15:themeFamily xmlns:thm15="http://schemas.microsoft.com/office/thememl/2012/main" xmlns="" name="Office Theme" id="{62F939B6-93AF-4DB8-9C6B-D6C7DFDC589F}" vid="{4A3C46E8-61CC-4603-A589-7422A47A8E4A}"/>
+      <thm15:themeFamily xmlns="" xmlns:thm15="http://schemas.microsoft.com/office/thememl/2012/main" name="Office Theme" id="{62F939B6-93AF-4DB8-9C6B-D6C7DFDC589F}" vid="{4A3C46E8-61CC-4603-A589-7422A47A8E4A}"/>
     </a:ext>
   </a:extLst>
 </a:theme>

--- a/Cauã Reck Mello 1DS.pptx
+++ b/Cauã Reck Mello 1DS.pptx
@@ -7,10 +7,12 @@
   <p:sldIdLst>
     <p:sldId id="256" r:id="rId2"/>
     <p:sldId id="262" r:id="rId3"/>
-    <p:sldId id="257" r:id="rId4"/>
-    <p:sldId id="263" r:id="rId5"/>
-    <p:sldId id="264" r:id="rId6"/>
-    <p:sldId id="258" r:id="rId7"/>
+    <p:sldId id="266" r:id="rId4"/>
+    <p:sldId id="267" r:id="rId5"/>
+    <p:sldId id="268" r:id="rId6"/>
+    <p:sldId id="269" r:id="rId7"/>
+    <p:sldId id="270" r:id="rId8"/>
+    <p:sldId id="258" r:id="rId9"/>
   </p:sldIdLst>
   <p:sldSz cx="12192000" cy="6858000"/>
   <p:notesSz cx="6858000" cy="9144000"/>
@@ -109,6 +111,22 @@
       </a:defRPr>
     </a:lvl9pPr>
   </p:defaultTextStyle>
+  <p:extLst>
+    <p:ext uri="{EFAFB233-063F-42B5-8137-9DF3F51BA10A}">
+      <p15:sldGuideLst xmlns:p15="http://schemas.microsoft.com/office/powerpoint/2012/main">
+        <p15:guide id="1" orient="horz" pos="2160">
+          <p15:clr>
+            <a:srgbClr val="A4A3A4"/>
+          </p15:clr>
+        </p15:guide>
+        <p15:guide id="2" pos="3840">
+          <p15:clr>
+            <a:srgbClr val="A4A3A4"/>
+          </p15:clr>
+        </p15:guide>
+      </p15:sldGuideLst>
+    </p:ext>
+  </p:extLst>
 </p:presentation>
 </file>
 
@@ -134,7 +152,7 @@
           <p:cNvPr id="14" name="Imagem 13">
             <a:extLst>
               <a:ext uri="{FF2B5EF4-FFF2-40B4-BE49-F238E27FC236}">
-                <a16:creationId xmlns="" xmlns:a16="http://schemas.microsoft.com/office/drawing/2014/main" id="{EC4CDF7D-CE14-F324-E21A-E4D1B1D3EA7C}"/>
+                <a16:creationId xmlns:a16="http://schemas.microsoft.com/office/drawing/2014/main" id="{EC4CDF7D-CE14-F324-E21A-E4D1B1D3EA7C}"/>
               </a:ext>
             </a:extLst>
           </p:cNvPr>
@@ -164,7 +182,7 @@
           <p:cNvPr id="16" name="Imagem 15">
             <a:extLst>
               <a:ext uri="{FF2B5EF4-FFF2-40B4-BE49-F238E27FC236}">
-                <a16:creationId xmlns="" xmlns:a16="http://schemas.microsoft.com/office/drawing/2014/main" id="{BEA03A5B-0605-9422-3F3E-E3FCB5D478C9}"/>
+                <a16:creationId xmlns:a16="http://schemas.microsoft.com/office/drawing/2014/main" id="{BEA03A5B-0605-9422-3F3E-E3FCB5D478C9}"/>
               </a:ext>
             </a:extLst>
           </p:cNvPr>
@@ -192,7 +210,7 @@
     </p:spTree>
     <p:extLst>
       <p:ext uri="{BB962C8B-B14F-4D97-AF65-F5344CB8AC3E}">
-        <p14:creationId xmlns="" xmlns:p14="http://schemas.microsoft.com/office/powerpoint/2010/main" val="1452606405"/>
+        <p14:creationId xmlns:p14="http://schemas.microsoft.com/office/powerpoint/2010/main" val="1452606405"/>
       </p:ext>
     </p:extLst>
   </p:cSld>
@@ -232,7 +250,7 @@
           <p:cNvPr id="9" name="Imagem 8">
             <a:extLst>
               <a:ext uri="{FF2B5EF4-FFF2-40B4-BE49-F238E27FC236}">
-                <a16:creationId xmlns="" xmlns:a16="http://schemas.microsoft.com/office/drawing/2014/main" id="{709CC232-D3EB-DEAC-D4F6-281456733994}"/>
+                <a16:creationId xmlns:a16="http://schemas.microsoft.com/office/drawing/2014/main" id="{709CC232-D3EB-DEAC-D4F6-281456733994}"/>
               </a:ext>
             </a:extLst>
           </p:cNvPr>
@@ -262,7 +280,7 @@
           <p:cNvPr id="4" name="Imagem 3">
             <a:extLst>
               <a:ext uri="{FF2B5EF4-FFF2-40B4-BE49-F238E27FC236}">
-                <a16:creationId xmlns="" xmlns:a16="http://schemas.microsoft.com/office/drawing/2014/main" id="{2B7AE131-185A-030B-C14D-5CF5052BF563}"/>
+                <a16:creationId xmlns:a16="http://schemas.microsoft.com/office/drawing/2014/main" id="{2B7AE131-185A-030B-C14D-5CF5052BF563}"/>
               </a:ext>
             </a:extLst>
           </p:cNvPr>
@@ -292,7 +310,7 @@
           <p:cNvPr id="6" name="Imagem 5">
             <a:extLst>
               <a:ext uri="{FF2B5EF4-FFF2-40B4-BE49-F238E27FC236}">
-                <a16:creationId xmlns="" xmlns:a16="http://schemas.microsoft.com/office/drawing/2014/main" id="{25C437E4-EF22-216D-8064-91BED8FE712F}"/>
+                <a16:creationId xmlns:a16="http://schemas.microsoft.com/office/drawing/2014/main" id="{25C437E4-EF22-216D-8064-91BED8FE712F}"/>
               </a:ext>
             </a:extLst>
           </p:cNvPr>
@@ -322,7 +340,7 @@
           <p:cNvPr id="10" name="Imagem 9">
             <a:extLst>
               <a:ext uri="{FF2B5EF4-FFF2-40B4-BE49-F238E27FC236}">
-                <a16:creationId xmlns="" xmlns:a16="http://schemas.microsoft.com/office/drawing/2014/main" id="{FAB54B22-B4C7-0C49-DC75-62B597EF4A53}"/>
+                <a16:creationId xmlns:a16="http://schemas.microsoft.com/office/drawing/2014/main" id="{FAB54B22-B4C7-0C49-DC75-62B597EF4A53}"/>
               </a:ext>
             </a:extLst>
           </p:cNvPr>
@@ -350,7 +368,7 @@
     </p:spTree>
     <p:extLst>
       <p:ext uri="{BB962C8B-B14F-4D97-AF65-F5344CB8AC3E}">
-        <p14:creationId xmlns="" xmlns:p14="http://schemas.microsoft.com/office/powerpoint/2010/main" val="3227819321"/>
+        <p14:creationId xmlns:p14="http://schemas.microsoft.com/office/powerpoint/2010/main" val="3227819321"/>
       </p:ext>
     </p:extLst>
   </p:cSld>
@@ -390,7 +408,7 @@
           <p:cNvPr id="11" name="Imagem 10">
             <a:extLst>
               <a:ext uri="{FF2B5EF4-FFF2-40B4-BE49-F238E27FC236}">
-                <a16:creationId xmlns="" xmlns:a16="http://schemas.microsoft.com/office/drawing/2014/main" id="{97E04D0E-1DE7-52B5-4BE5-15B5AA82B038}"/>
+                <a16:creationId xmlns:a16="http://schemas.microsoft.com/office/drawing/2014/main" id="{97E04D0E-1DE7-52B5-4BE5-15B5AA82B038}"/>
               </a:ext>
             </a:extLst>
           </p:cNvPr>
@@ -420,7 +438,7 @@
           <p:cNvPr id="12" name="Imagem 11">
             <a:extLst>
               <a:ext uri="{FF2B5EF4-FFF2-40B4-BE49-F238E27FC236}">
-                <a16:creationId xmlns="" xmlns:a16="http://schemas.microsoft.com/office/drawing/2014/main" id="{ECAD9FBC-7448-E582-3020-FF62976BEC93}"/>
+                <a16:creationId xmlns:a16="http://schemas.microsoft.com/office/drawing/2014/main" id="{ECAD9FBC-7448-E582-3020-FF62976BEC93}"/>
               </a:ext>
             </a:extLst>
           </p:cNvPr>
@@ -448,7 +466,7 @@
     </p:spTree>
     <p:extLst>
       <p:ext uri="{BB962C8B-B14F-4D97-AF65-F5344CB8AC3E}">
-        <p14:creationId xmlns="" xmlns:p14="http://schemas.microsoft.com/office/powerpoint/2010/main" val="4153823153"/>
+        <p14:creationId xmlns:p14="http://schemas.microsoft.com/office/powerpoint/2010/main" val="4153823153"/>
       </p:ext>
     </p:extLst>
   </p:cSld>
@@ -483,7 +501,7 @@
     </p:spTree>
     <p:extLst>
       <p:ext uri="{BB962C8B-B14F-4D97-AF65-F5344CB8AC3E}">
-        <p14:creationId xmlns="" xmlns:p14="http://schemas.microsoft.com/office/powerpoint/2010/main" val="564066529"/>
+        <p14:creationId xmlns:p14="http://schemas.microsoft.com/office/powerpoint/2010/main" val="564066529"/>
       </p:ext>
     </p:extLst>
   </p:cSld>
@@ -798,7 +816,7 @@
           <p:cNvPr id="16" name="Título 1">
             <a:extLst>
               <a:ext uri="{FF2B5EF4-FFF2-40B4-BE49-F238E27FC236}">
-                <a16:creationId xmlns="" xmlns:a16="http://schemas.microsoft.com/office/drawing/2014/main" id="{B8D3994E-2F48-AC7A-CB89-89DE77EB8EAA}"/>
+                <a16:creationId xmlns:a16="http://schemas.microsoft.com/office/drawing/2014/main" id="{B8D3994E-2F48-AC7A-CB89-89DE77EB8EAA}"/>
               </a:ext>
             </a:extLst>
           </p:cNvPr>
@@ -846,7 +864,7 @@
               </a:lnSpc>
             </a:pPr>
             <a:r>
-              <a:rPr lang="pt-BR" sz="1600" b="1" dirty="0" smtClean="0">
+              <a:rPr lang="pt-BR" sz="1600" b="1" dirty="0">
                 <a:solidFill>
                   <a:schemeClr val="bg1"/>
                 </a:solidFill>
@@ -854,29 +872,18 @@
                 <a:ea typeface="Verdana" panose="020B0604030504040204" pitchFamily="34" charset="0"/>
                 <a:cs typeface="Verdana" panose="020B0604030504040204" pitchFamily="34" charset="0"/>
               </a:rPr>
-              <a:t>Atalhos do</a:t>
-            </a:r>
-            <a:r>
-              <a:rPr lang="pt-BR" sz="1600" dirty="0" smtClean="0">
-                <a:solidFill>
-                  <a:schemeClr val="bg1"/>
-                </a:solidFill>
-                <a:latin typeface="Verdana" pitchFamily="34" charset="0"/>
-                <a:ea typeface="Verdana" pitchFamily="34" charset="0"/>
-                <a:cs typeface="Verdana" pitchFamily="34" charset="0"/>
-              </a:rPr>
-              <a:t> </a:t>
-            </a:r>
-            <a:r>
-              <a:rPr lang="pt-BR" sz="1600" b="1" dirty="0" smtClean="0">
-                <a:solidFill>
-                  <a:schemeClr val="bg1"/>
-                </a:solidFill>
-                <a:latin typeface="Verdana" pitchFamily="34" charset="0"/>
-                <a:ea typeface="Verdana" pitchFamily="34" charset="0"/>
-                <a:cs typeface="Verdana" pitchFamily="34" charset="0"/>
-              </a:rPr>
-              <a:t>PowerPoint </a:t>
+              <a:t>Atalhos do sistema </a:t>
+            </a:r>
+            <a:r>
+              <a:rPr lang="pt-BR" sz="1600" b="1" dirty="0" err="1">
+                <a:solidFill>
+                  <a:schemeClr val="bg1"/>
+                </a:solidFill>
+                <a:latin typeface="Verdana" panose="020B0604030504040204" pitchFamily="34" charset="0"/>
+                <a:ea typeface="Verdana" panose="020B0604030504040204" pitchFamily="34" charset="0"/>
+                <a:cs typeface="Verdana" panose="020B0604030504040204" pitchFamily="34" charset="0"/>
+              </a:rPr>
+              <a:t>windows</a:t>
             </a:r>
             <a:endParaRPr lang="pt-BR" sz="1600" dirty="0">
               <a:solidFill>
@@ -894,7 +901,7 @@
               </a:lnSpc>
             </a:pPr>
             <a:r>
-              <a:rPr lang="pt-BR" sz="1600" dirty="0" smtClean="0">
+              <a:rPr lang="pt-BR" sz="1600" dirty="0">
                 <a:solidFill>
                   <a:schemeClr val="bg1"/>
                 </a:solidFill>
@@ -912,7 +919,7 @@
               </a:lnSpc>
             </a:pPr>
             <a:r>
-              <a:rPr lang="pt-BR" sz="2000" dirty="0" smtClean="0">
+              <a:rPr lang="pt-BR" sz="2000" dirty="0">
                 <a:solidFill>
                   <a:schemeClr val="bg1"/>
                 </a:solidFill>
@@ -923,7 +930,7 @@
               <a:t>Cauã </a:t>
             </a:r>
             <a:r>
-              <a:rPr lang="pt-BR" sz="2000" dirty="0" err="1" smtClean="0">
+              <a:rPr lang="pt-BR" sz="2000" dirty="0" err="1">
                 <a:solidFill>
                   <a:schemeClr val="bg1"/>
                 </a:solidFill>
@@ -934,7 +941,7 @@
               <a:t>Reck</a:t>
             </a:r>
             <a:r>
-              <a:rPr lang="pt-BR" sz="2000" dirty="0" smtClean="0">
+              <a:rPr lang="pt-BR" sz="2000" dirty="0">
                 <a:solidFill>
                   <a:schemeClr val="bg1"/>
                 </a:solidFill>
@@ -944,14 +951,6 @@
               </a:rPr>
               <a:t> Mello</a:t>
             </a:r>
-            <a:endParaRPr lang="pt-BR" sz="2000" dirty="0">
-              <a:solidFill>
-                <a:schemeClr val="bg1"/>
-              </a:solidFill>
-              <a:latin typeface="Verdana" pitchFamily="34" charset="0"/>
-              <a:ea typeface="Verdana" pitchFamily="34" charset="0"/>
-              <a:cs typeface="Verdana" pitchFamily="34" charset="0"/>
-            </a:endParaRPr>
           </a:p>
         </p:txBody>
       </p:sp>
@@ -982,20 +981,13 @@
     </p:spTree>
     <p:extLst>
       <p:ext uri="{BB962C8B-B14F-4D97-AF65-F5344CB8AC3E}">
-        <p14:creationId xmlns="" xmlns:p14="http://schemas.microsoft.com/office/powerpoint/2010/main" val="3541278742"/>
+        <p14:creationId xmlns:p14="http://schemas.microsoft.com/office/powerpoint/2010/main" val="3541278742"/>
       </p:ext>
     </p:extLst>
   </p:cSld>
   <p:clrMapOvr>
     <a:masterClrMapping/>
   </p:clrMapOvr>
-  <p:timing>
-    <p:tnLst>
-      <p:par>
-        <p:cTn id="1" dur="indefinite" restart="never" nodeType="tmRoot"/>
-      </p:par>
-    </p:tnLst>
-  </p:timing>
 </p:sld>
 </file>
 
@@ -1024,8 +1016,8 @@
         </p:nvSpPr>
         <p:spPr>
           <a:xfrm>
-            <a:off x="4411084" y="286603"/>
-            <a:ext cx="3369833" cy="830997"/>
+            <a:off x="4076858" y="286603"/>
+            <a:ext cx="4038285" cy="830997"/>
           </a:xfrm>
           <a:prstGeom prst="rect">
             <a:avLst/>
@@ -1040,11 +1032,12 @@
           <a:p>
             <a:pPr algn="ctr"/>
             <a:r>
-              <a:rPr lang="pt-BR" sz="4800" b="1" dirty="0" smtClean="0">
-                <a:solidFill>
-                  <a:schemeClr val="bg1"/>
-                </a:solidFill>
-                <a:latin typeface="Arial" pitchFamily="34" charset="0"/>
+              <a:rPr lang="pt-BR" sz="4800" b="1" dirty="0">
+                <a:solidFill>
+                  <a:schemeClr val="bg1"/>
+                </a:solidFill>
+                <a:latin typeface="Verdana" panose="020B0604030504040204" pitchFamily="34" charset="0"/>
+                <a:ea typeface="Verdana" panose="020B0604030504040204" pitchFamily="34" charset="0"/>
                 <a:cs typeface="Arial" pitchFamily="34" charset="0"/>
               </a:rPr>
               <a:t>Introdução</a:t>
@@ -1053,7 +1046,8 @@
               <a:solidFill>
                 <a:schemeClr val="bg1"/>
               </a:solidFill>
-              <a:latin typeface="Arial" pitchFamily="34" charset="0"/>
+              <a:latin typeface="Verdana" panose="020B0604030504040204" pitchFamily="34" charset="0"/>
+              <a:ea typeface="Verdana" panose="020B0604030504040204" pitchFamily="34" charset="0"/>
               <a:cs typeface="Arial" pitchFamily="34" charset="0"/>
             </a:endParaRPr>
           </a:p>
@@ -1067,8 +1061,8 @@
         </p:nvSpPr>
         <p:spPr>
           <a:xfrm>
-            <a:off x="0" y="1779687"/>
-            <a:ext cx="12191999" cy="5078313"/>
+            <a:off x="0" y="1585417"/>
+            <a:ext cx="12191999" cy="4985980"/>
           </a:xfrm>
           <a:prstGeom prst="rect">
             <a:avLst/>
@@ -1081,37 +1075,121 @@
           </a:bodyPr>
           <a:lstStyle/>
           <a:p>
-            <a:pPr algn="ctr"/>
-            <a:r>
-              <a:rPr lang="pt-BR" sz="3600" b="1" i="1" dirty="0" smtClean="0">
-                <a:solidFill>
-                  <a:schemeClr val="bg1"/>
-                </a:solidFill>
-                <a:latin typeface="Times New Roman" pitchFamily="18" charset="0"/>
-                <a:cs typeface="Times New Roman" pitchFamily="18" charset="0"/>
-              </a:rPr>
-              <a:t>Os atalhos do PowerPoint são combinações de teclas que ajudam a realizar tarefas de forma mais rápida e eficiente. Em vez de usar o mouse para tudo, é possível economizar tempo utilizando comandos simples no teclado. Esses atalhos são muito úteis principalmente para estudantes e profissionais que precisam criar apresentações com </a:t>
-            </a:r>
-            <a:r>
-              <a:rPr lang="pt-BR" sz="3600" b="1" i="1" dirty="0" err="1" smtClean="0">
-                <a:solidFill>
-                  <a:schemeClr val="bg1"/>
-                </a:solidFill>
-                <a:latin typeface="Times New Roman" pitchFamily="18" charset="0"/>
-                <a:cs typeface="Times New Roman" pitchFamily="18" charset="0"/>
-              </a:rPr>
-              <a:t>frequência</a:t>
-            </a:r>
-            <a:r>
-              <a:rPr lang="pt-BR" sz="3600" b="1" i="1" dirty="0" smtClean="0">
-                <a:solidFill>
-                  <a:schemeClr val="bg1"/>
-                </a:solidFill>
-                <a:latin typeface="Times New Roman" pitchFamily="18" charset="0"/>
-                <a:cs typeface="Times New Roman" pitchFamily="18" charset="0"/>
-              </a:rPr>
-              <a:t>. Além disso, aprender esses comandos facilita a organização do trabalho e melhora a produtividade, tornando o uso do PowerPoint mais prático no dia a dia.</a:t>
-            </a:r>
+            <a:pPr algn="ctr">
+              <a:buFont typeface="Arial" panose="020B0604020202020204" pitchFamily="34" charset="0"/>
+              <a:buChar char="•"/>
+            </a:pPr>
+            <a:r>
+              <a:rPr lang="pt-BR" sz="3200" b="1" i="0" dirty="0">
+                <a:solidFill>
+                  <a:srgbClr val="E6E8F0"/>
+                </a:solidFill>
+                <a:effectLst/>
+                <a:latin typeface="Verdana" panose="020B0604030504040204" pitchFamily="34" charset="0"/>
+                <a:ea typeface="Verdana" panose="020B0604030504040204" pitchFamily="34" charset="0"/>
+              </a:rPr>
+              <a:t>Abordagem:</a:t>
+            </a:r>
+            <a:r>
+              <a:rPr lang="pt-BR" sz="3200" b="0" i="0" dirty="0">
+                <a:solidFill>
+                  <a:srgbClr val="E6E8F0"/>
+                </a:solidFill>
+                <a:effectLst/>
+                <a:latin typeface="Verdana" panose="020B0604030504040204" pitchFamily="34" charset="0"/>
+                <a:ea typeface="Verdana" panose="020B0604030504040204" pitchFamily="34" charset="0"/>
+              </a:rPr>
+              <a:t> Análise técnica sobre a redução de latência operacional através do mapeamento de inputs via teclado.</a:t>
+            </a:r>
+          </a:p>
+          <a:p>
+            <a:pPr algn="ctr"/>
+            <a:endParaRPr lang="pt-BR" sz="3200" b="0" i="0" dirty="0">
+              <a:solidFill>
+                <a:srgbClr val="E6E8F0"/>
+              </a:solidFill>
+              <a:effectLst/>
+              <a:latin typeface="Verdana" panose="020B0604030504040204" pitchFamily="34" charset="0"/>
+              <a:ea typeface="Verdana" panose="020B0604030504040204" pitchFamily="34" charset="0"/>
+            </a:endParaRPr>
+          </a:p>
+          <a:p>
+            <a:pPr algn="ctr">
+              <a:buFont typeface="Arial" panose="020B0604020202020204" pitchFamily="34" charset="0"/>
+              <a:buChar char="•"/>
+            </a:pPr>
+            <a:r>
+              <a:rPr lang="pt-BR" sz="3200" b="1" i="0" dirty="0">
+                <a:solidFill>
+                  <a:srgbClr val="E6E8F0"/>
+                </a:solidFill>
+                <a:effectLst/>
+                <a:latin typeface="Verdana" panose="020B0604030504040204" pitchFamily="34" charset="0"/>
+                <a:ea typeface="Verdana" panose="020B0604030504040204" pitchFamily="34" charset="0"/>
+              </a:rPr>
+              <a:t>Conceito:</a:t>
+            </a:r>
+            <a:r>
+              <a:rPr lang="pt-BR" sz="3200" b="0" i="0" dirty="0">
+                <a:solidFill>
+                  <a:srgbClr val="E6E8F0"/>
+                </a:solidFill>
+                <a:effectLst/>
+                <a:latin typeface="Verdana" panose="020B0604030504040204" pitchFamily="34" charset="0"/>
+                <a:ea typeface="Verdana" panose="020B0604030504040204" pitchFamily="34" charset="0"/>
+              </a:rPr>
+              <a:t> Transição da interface gráfica (GUI) para comandos de atalho, visando a otimização de ciclos de trabalho e ergonomia cognitiva.</a:t>
+            </a:r>
+          </a:p>
+          <a:p>
+            <a:pPr algn="ctr"/>
+            <a:endParaRPr lang="pt-BR" sz="3200" b="0" i="0" dirty="0">
+              <a:solidFill>
+                <a:srgbClr val="E6E8F0"/>
+              </a:solidFill>
+              <a:effectLst/>
+              <a:latin typeface="Verdana" panose="020B0604030504040204" pitchFamily="34" charset="0"/>
+              <a:ea typeface="Verdana" panose="020B0604030504040204" pitchFamily="34" charset="0"/>
+            </a:endParaRPr>
+          </a:p>
+          <a:p>
+            <a:pPr algn="ctr">
+              <a:buFont typeface="Arial" panose="020B0604020202020204" pitchFamily="34" charset="0"/>
+              <a:buChar char="•"/>
+            </a:pPr>
+            <a:r>
+              <a:rPr lang="pt-BR" sz="3200" b="1" i="0" dirty="0">
+                <a:solidFill>
+                  <a:srgbClr val="E6E8F0"/>
+                </a:solidFill>
+                <a:effectLst/>
+                <a:latin typeface="Verdana" panose="020B0604030504040204" pitchFamily="34" charset="0"/>
+                <a:ea typeface="Verdana" panose="020B0604030504040204" pitchFamily="34" charset="0"/>
+              </a:rPr>
+              <a:t>Foco:</a:t>
+            </a:r>
+            <a:r>
+              <a:rPr lang="pt-BR" sz="3200" b="0" i="0" dirty="0">
+                <a:solidFill>
+                  <a:srgbClr val="E6E8F0"/>
+                </a:solidFill>
+                <a:effectLst/>
+                <a:latin typeface="Verdana" panose="020B0604030504040204" pitchFamily="34" charset="0"/>
+                <a:ea typeface="Verdana" panose="020B0604030504040204" pitchFamily="34" charset="0"/>
+              </a:rPr>
+              <a:t> Interoperabilidade entre as suítes de produtividade e o núcleo do sistema operacional.</a:t>
+            </a:r>
+          </a:p>
+          <a:p>
+            <a:pPr algn="ctr"/>
+            <a:endParaRPr lang="pt-BR" sz="3000" b="1" i="1" dirty="0">
+              <a:solidFill>
+                <a:schemeClr val="bg1"/>
+              </a:solidFill>
+              <a:latin typeface="Verdana" panose="020B0604030504040204" pitchFamily="34" charset="0"/>
+              <a:ea typeface="Verdana" panose="020B0604030504040204" pitchFamily="34" charset="0"/>
+              <a:cs typeface="Times New Roman" pitchFamily="18" charset="0"/>
+            </a:endParaRPr>
           </a:p>
         </p:txBody>
       </p:sp>
@@ -1131,8 +1209,38 @@
         </p:blipFill>
         <p:spPr>
           <a:xfrm>
-            <a:off x="9268890" y="-163773"/>
+            <a:off x="10048875" y="-163773"/>
             <a:ext cx="2143125" cy="2143125"/>
+          </a:xfrm>
+          <a:prstGeom prst="rect">
+            <a:avLst/>
+          </a:prstGeom>
+        </p:spPr>
+      </p:pic>
+      <p:pic>
+        <p:nvPicPr>
+          <p:cNvPr id="6" name="Imagem 5" descr="Logotipo">
+            <a:extLst>
+              <a:ext uri="{FF2B5EF4-FFF2-40B4-BE49-F238E27FC236}">
+                <a16:creationId xmlns:a16="http://schemas.microsoft.com/office/drawing/2014/main" id="{88607375-1DAE-F280-F0D0-CD90B4073342}"/>
+              </a:ext>
+            </a:extLst>
+          </p:cNvPr>
+          <p:cNvPicPr>
+            <a:picLocks noChangeAspect="1"/>
+          </p:cNvPicPr>
+          <p:nvPr/>
+        </p:nvPicPr>
+        <p:blipFill>
+          <a:blip r:embed="rId3"/>
+          <a:stretch>
+            <a:fillRect/>
+          </a:stretch>
+        </p:blipFill>
+        <p:spPr>
+          <a:xfrm>
+            <a:off x="0" y="53427"/>
+            <a:ext cx="2905125" cy="1571625"/>
           </a:xfrm>
           <a:prstGeom prst="rect">
             <a:avLst/>
@@ -1142,20 +1250,13 @@
     </p:spTree>
     <p:extLst>
       <p:ext uri="{BB962C8B-B14F-4D97-AF65-F5344CB8AC3E}">
-        <p14:creationId xmlns="" xmlns:p14="http://schemas.microsoft.com/office/powerpoint/2010/main" val="2347594821"/>
+        <p14:creationId xmlns:p14="http://schemas.microsoft.com/office/powerpoint/2010/main" val="2347594821"/>
       </p:ext>
     </p:extLst>
   </p:cSld>
   <p:clrMapOvr>
     <a:masterClrMapping/>
   </p:clrMapOvr>
-  <p:timing>
-    <p:tnLst>
-      <p:par>
-        <p:cTn id="1" dur="indefinite" restart="never" nodeType="tmRoot"/>
-      </p:par>
-    </p:tnLst>
-  </p:timing>
 </p:sld>
 </file>
 
@@ -1184,8 +1285,8 @@
         </p:nvSpPr>
         <p:spPr>
           <a:xfrm>
-            <a:off x="3451686" y="286603"/>
-            <a:ext cx="5288628" cy="830997"/>
+            <a:off x="5076329" y="286603"/>
+            <a:ext cx="2039341" cy="830997"/>
           </a:xfrm>
           <a:prstGeom prst="rect">
             <a:avLst/>
@@ -1200,20 +1301,22 @@
           <a:p>
             <a:pPr algn="ctr"/>
             <a:r>
-              <a:rPr lang="pt-BR" sz="4800" b="1" dirty="0" smtClean="0">
-                <a:solidFill>
-                  <a:schemeClr val="bg1"/>
-                </a:solidFill>
-                <a:latin typeface="Arial" pitchFamily="34" charset="0"/>
+              <a:rPr lang="pt-BR" sz="4800" b="1" dirty="0">
+                <a:solidFill>
+                  <a:schemeClr val="bg1"/>
+                </a:solidFill>
+                <a:latin typeface="Verdana" panose="020B0604030504040204" pitchFamily="34" charset="0"/>
+                <a:ea typeface="Verdana" panose="020B0604030504040204" pitchFamily="34" charset="0"/>
                 <a:cs typeface="Arial" pitchFamily="34" charset="0"/>
               </a:rPr>
-              <a:t>Desenvolvimento</a:t>
+              <a:t>Word</a:t>
             </a:r>
             <a:endParaRPr lang="pt-BR" sz="4400" b="1" dirty="0">
               <a:solidFill>
                 <a:schemeClr val="bg1"/>
               </a:solidFill>
-              <a:latin typeface="Arial" pitchFamily="34" charset="0"/>
+              <a:latin typeface="Verdana" panose="020B0604030504040204" pitchFamily="34" charset="0"/>
+              <a:ea typeface="Verdana" panose="020B0604030504040204" pitchFamily="34" charset="0"/>
               <a:cs typeface="Arial" pitchFamily="34" charset="0"/>
             </a:endParaRPr>
           </a:p>
@@ -1227,8 +1330,8 @@
         </p:nvSpPr>
         <p:spPr>
           <a:xfrm>
-            <a:off x="1" y="1935372"/>
-            <a:ext cx="12191999" cy="4524315"/>
+            <a:off x="-1" y="1288798"/>
+            <a:ext cx="12191999" cy="5970865"/>
           </a:xfrm>
           <a:prstGeom prst="rect">
             <a:avLst/>
@@ -1241,97 +1344,160 @@
           </a:bodyPr>
           <a:lstStyle/>
           <a:p>
-            <a:pPr algn="ctr"/>
-            <a:r>
-              <a:rPr lang="pt-BR" sz="3600" b="1" i="1" dirty="0" smtClean="0">
-                <a:solidFill>
-                  <a:schemeClr val="bg1"/>
-                </a:solidFill>
-                <a:latin typeface="Times New Roman" pitchFamily="18" charset="0"/>
-                <a:cs typeface="Times New Roman" pitchFamily="18" charset="0"/>
-              </a:rPr>
-              <a:t>Existem vários atalhos básicos que ajudam na criação de apresentações. Por exemplo, o comando </a:t>
-            </a:r>
-            <a:r>
-              <a:rPr lang="pt-BR" sz="3600" b="1" i="1" dirty="0" err="1" smtClean="0">
-                <a:solidFill>
-                  <a:schemeClr val="bg1"/>
-                </a:solidFill>
-                <a:latin typeface="Times New Roman" pitchFamily="18" charset="0"/>
-                <a:cs typeface="Times New Roman" pitchFamily="18" charset="0"/>
-              </a:rPr>
-              <a:t>Ctrl</a:t>
-            </a:r>
-            <a:r>
-              <a:rPr lang="pt-BR" sz="3600" b="1" i="1" dirty="0" smtClean="0">
-                <a:solidFill>
-                  <a:schemeClr val="bg1"/>
-                </a:solidFill>
-                <a:latin typeface="Times New Roman" pitchFamily="18" charset="0"/>
-                <a:cs typeface="Times New Roman" pitchFamily="18" charset="0"/>
-              </a:rPr>
-              <a:t> + N cria uma nova apresentação, enquanto </a:t>
-            </a:r>
-            <a:r>
-              <a:rPr lang="pt-BR" sz="3600" b="1" i="1" dirty="0" err="1" smtClean="0">
-                <a:solidFill>
-                  <a:schemeClr val="bg1"/>
-                </a:solidFill>
-                <a:latin typeface="Times New Roman" pitchFamily="18" charset="0"/>
-                <a:cs typeface="Times New Roman" pitchFamily="18" charset="0"/>
-              </a:rPr>
-              <a:t>Ctrl</a:t>
-            </a:r>
-            <a:r>
-              <a:rPr lang="pt-BR" sz="3600" b="1" i="1" dirty="0" smtClean="0">
-                <a:solidFill>
-                  <a:schemeClr val="bg1"/>
-                </a:solidFill>
-                <a:latin typeface="Times New Roman" pitchFamily="18" charset="0"/>
-                <a:cs typeface="Times New Roman" pitchFamily="18" charset="0"/>
-              </a:rPr>
-              <a:t> + O abre um arquivo já existente. Para salvar rapidamente, usamos </a:t>
-            </a:r>
-            <a:r>
-              <a:rPr lang="pt-BR" sz="3600" b="1" i="1" dirty="0" err="1" smtClean="0">
-                <a:solidFill>
-                  <a:schemeClr val="bg1"/>
-                </a:solidFill>
-                <a:latin typeface="Times New Roman" pitchFamily="18" charset="0"/>
-                <a:cs typeface="Times New Roman" pitchFamily="18" charset="0"/>
-              </a:rPr>
-              <a:t>Ctrl</a:t>
-            </a:r>
-            <a:r>
-              <a:rPr lang="pt-BR" sz="3600" b="1" i="1" dirty="0" smtClean="0">
-                <a:solidFill>
-                  <a:schemeClr val="bg1"/>
-                </a:solidFill>
-                <a:latin typeface="Times New Roman" pitchFamily="18" charset="0"/>
-                <a:cs typeface="Times New Roman" pitchFamily="18" charset="0"/>
-              </a:rPr>
-              <a:t> + S, que é um dos mais importantes para evitar a perda de trabalho. Outro atalho comum é o </a:t>
-            </a:r>
-            <a:r>
-              <a:rPr lang="pt-BR" sz="3600" b="1" i="1" dirty="0" err="1" smtClean="0">
-                <a:solidFill>
-                  <a:schemeClr val="bg1"/>
-                </a:solidFill>
-                <a:latin typeface="Times New Roman" pitchFamily="18" charset="0"/>
-                <a:cs typeface="Times New Roman" pitchFamily="18" charset="0"/>
-              </a:rPr>
-              <a:t>Ctrl</a:t>
-            </a:r>
-            <a:r>
-              <a:rPr lang="pt-BR" sz="3600" b="1" i="1" dirty="0" smtClean="0">
-                <a:solidFill>
-                  <a:schemeClr val="bg1"/>
-                </a:solidFill>
-                <a:latin typeface="Times New Roman" pitchFamily="18" charset="0"/>
-                <a:cs typeface="Times New Roman" pitchFamily="18" charset="0"/>
-              </a:rPr>
-              <a:t> + M, que adiciona um novo slide. Esses comandos são essenciais para quem está começando, pois facilitam bastante o uso do programa</a:t>
-            </a:r>
+            <a:pPr algn="ctr">
+              <a:buFont typeface="Arial" panose="020B0604020202020204" pitchFamily="34" charset="0"/>
+              <a:buChar char="•"/>
+            </a:pPr>
+            <a:r>
+              <a:rPr lang="pt-BR" sz="3200" b="1" i="0" dirty="0">
+                <a:solidFill>
+                  <a:srgbClr val="E6E8F0"/>
+                </a:solidFill>
+                <a:effectLst/>
+                <a:latin typeface="Verdana" panose="020B0604030504040204" pitchFamily="34" charset="0"/>
+                <a:ea typeface="Verdana" panose="020B0604030504040204" pitchFamily="34" charset="0"/>
+              </a:rPr>
+              <a:t>Ctrl + Shift + S:</a:t>
+            </a:r>
+            <a:r>
+              <a:rPr lang="pt-BR" sz="3200" b="0" i="0" dirty="0">
+                <a:solidFill>
+                  <a:srgbClr val="E6E8F0"/>
+                </a:solidFill>
+                <a:effectLst/>
+                <a:latin typeface="Verdana" panose="020B0604030504040204" pitchFamily="34" charset="0"/>
+                <a:ea typeface="Verdana" panose="020B0604030504040204" pitchFamily="34" charset="0"/>
+              </a:rPr>
+              <a:t> Gestão de painel de estilos para padronização de documentos complexos.</a:t>
+            </a:r>
+          </a:p>
+          <a:p>
+            <a:pPr algn="ctr"/>
+            <a:endParaRPr lang="pt-BR" sz="3200" b="0" i="0" dirty="0">
+              <a:solidFill>
+                <a:srgbClr val="E6E8F0"/>
+              </a:solidFill>
+              <a:effectLst/>
+              <a:latin typeface="Verdana" panose="020B0604030504040204" pitchFamily="34" charset="0"/>
+              <a:ea typeface="Verdana" panose="020B0604030504040204" pitchFamily="34" charset="0"/>
+            </a:endParaRPr>
+          </a:p>
+          <a:p>
+            <a:pPr algn="ctr">
+              <a:buFont typeface="Arial" panose="020B0604020202020204" pitchFamily="34" charset="0"/>
+              <a:buChar char="•"/>
+            </a:pPr>
+            <a:r>
+              <a:rPr lang="pt-BR" sz="3200" b="1" i="0" dirty="0">
+                <a:solidFill>
+                  <a:srgbClr val="E6E8F0"/>
+                </a:solidFill>
+                <a:effectLst/>
+                <a:latin typeface="Verdana" panose="020B0604030504040204" pitchFamily="34" charset="0"/>
+                <a:ea typeface="Verdana" panose="020B0604030504040204" pitchFamily="34" charset="0"/>
+              </a:rPr>
+              <a:t>Ctrl + K:</a:t>
+            </a:r>
+            <a:r>
+              <a:rPr lang="pt-BR" sz="3200" b="0" i="0" dirty="0">
+                <a:solidFill>
+                  <a:srgbClr val="E6E8F0"/>
+                </a:solidFill>
+                <a:effectLst/>
+                <a:latin typeface="Verdana" panose="020B0604030504040204" pitchFamily="34" charset="0"/>
+                <a:ea typeface="Verdana" panose="020B0604030504040204" pitchFamily="34" charset="0"/>
+              </a:rPr>
+              <a:t> Indexação de hiperlinks e referenciamento cruzado.</a:t>
+            </a:r>
+          </a:p>
+          <a:p>
+            <a:pPr algn="ctr"/>
+            <a:endParaRPr lang="pt-BR" sz="3200" b="0" i="0" dirty="0">
+              <a:solidFill>
+                <a:srgbClr val="E6E8F0"/>
+              </a:solidFill>
+              <a:effectLst/>
+              <a:latin typeface="Verdana" panose="020B0604030504040204" pitchFamily="34" charset="0"/>
+              <a:ea typeface="Verdana" panose="020B0604030504040204" pitchFamily="34" charset="0"/>
+            </a:endParaRPr>
+          </a:p>
+          <a:p>
+            <a:pPr algn="ctr">
+              <a:buFont typeface="Arial" panose="020B0604020202020204" pitchFamily="34" charset="0"/>
+              <a:buChar char="•"/>
+            </a:pPr>
+            <a:r>
+              <a:rPr lang="pt-BR" sz="3200" b="1" i="0" dirty="0">
+                <a:solidFill>
+                  <a:srgbClr val="E6E8F0"/>
+                </a:solidFill>
+                <a:effectLst/>
+                <a:latin typeface="Verdana" panose="020B0604030504040204" pitchFamily="34" charset="0"/>
+                <a:ea typeface="Verdana" panose="020B0604030504040204" pitchFamily="34" charset="0"/>
+              </a:rPr>
+              <a:t>Ctrl + Alt + M:</a:t>
+            </a:r>
+            <a:r>
+              <a:rPr lang="pt-BR" sz="3200" b="0" i="0" dirty="0">
+                <a:solidFill>
+                  <a:srgbClr val="E6E8F0"/>
+                </a:solidFill>
+                <a:effectLst/>
+                <a:latin typeface="Verdana" panose="020B0604030504040204" pitchFamily="34" charset="0"/>
+                <a:ea typeface="Verdana" panose="020B0604030504040204" pitchFamily="34" charset="0"/>
+              </a:rPr>
+              <a:t> Inserção de metadados e comentários para revisão técnica.</a:t>
+            </a:r>
+          </a:p>
+          <a:p>
+            <a:pPr algn="ctr"/>
+            <a:endParaRPr lang="pt-BR" sz="3200" b="0" i="0" dirty="0">
+              <a:solidFill>
+                <a:srgbClr val="E6E8F0"/>
+              </a:solidFill>
+              <a:effectLst/>
+              <a:latin typeface="Verdana" panose="020B0604030504040204" pitchFamily="34" charset="0"/>
+              <a:ea typeface="Verdana" panose="020B0604030504040204" pitchFamily="34" charset="0"/>
+            </a:endParaRPr>
+          </a:p>
+          <a:p>
+            <a:pPr algn="ctr">
+              <a:buFont typeface="Arial" panose="020B0604020202020204" pitchFamily="34" charset="0"/>
+              <a:buChar char="•"/>
+            </a:pPr>
+            <a:r>
+              <a:rPr lang="pt-BR" sz="3200" b="1" i="0" dirty="0">
+                <a:solidFill>
+                  <a:srgbClr val="E6E8F0"/>
+                </a:solidFill>
+                <a:effectLst/>
+                <a:latin typeface="Verdana" panose="020B0604030504040204" pitchFamily="34" charset="0"/>
+                <a:ea typeface="Verdana" panose="020B0604030504040204" pitchFamily="34" charset="0"/>
+              </a:rPr>
+              <a:t>Alt + Shift + Setas:</a:t>
+            </a:r>
+            <a:r>
+              <a:rPr lang="pt-BR" sz="3200" b="0" i="0" dirty="0">
+                <a:solidFill>
+                  <a:srgbClr val="E6E8F0"/>
+                </a:solidFill>
+                <a:effectLst/>
+                <a:latin typeface="Verdana" panose="020B0604030504040204" pitchFamily="34" charset="0"/>
+                <a:ea typeface="Verdana" panose="020B0604030504040204" pitchFamily="34" charset="0"/>
+              </a:rPr>
+              <a:t> Reordenamento de estruturas hierárquicas em listas e tópicos</a:t>
+            </a:r>
+          </a:p>
+          <a:p>
+            <a:pPr algn="ctr"/>
+            <a:endParaRPr lang="pt-BR" sz="3000" b="1" i="1" dirty="0">
+              <a:solidFill>
+                <a:schemeClr val="bg1"/>
+              </a:solidFill>
+              <a:latin typeface="Verdana" panose="020B0604030504040204" pitchFamily="34" charset="0"/>
+              <a:ea typeface="Verdana" panose="020B0604030504040204" pitchFamily="34" charset="0"/>
+              <a:cs typeface="Times New Roman" pitchFamily="18" charset="0"/>
+            </a:endParaRPr>
           </a:p>
         </p:txBody>
       </p:sp>
@@ -1351,8 +1517,38 @@
         </p:blipFill>
         <p:spPr>
           <a:xfrm>
-            <a:off x="9214300" y="-204716"/>
+            <a:off x="10062912" y="-232324"/>
             <a:ext cx="2143125" cy="2143125"/>
+          </a:xfrm>
+          <a:prstGeom prst="rect">
+            <a:avLst/>
+          </a:prstGeom>
+        </p:spPr>
+      </p:pic>
+      <p:pic>
+        <p:nvPicPr>
+          <p:cNvPr id="6" name="Imagem 5" descr="Logotipo">
+            <a:extLst>
+              <a:ext uri="{FF2B5EF4-FFF2-40B4-BE49-F238E27FC236}">
+                <a16:creationId xmlns:a16="http://schemas.microsoft.com/office/drawing/2014/main" id="{88607375-1DAE-F280-F0D0-CD90B4073342}"/>
+              </a:ext>
+            </a:extLst>
+          </p:cNvPr>
+          <p:cNvPicPr>
+            <a:picLocks noChangeAspect="1"/>
+          </p:cNvPicPr>
+          <p:nvPr/>
+        </p:nvPicPr>
+        <p:blipFill>
+          <a:blip r:embed="rId3"/>
+          <a:stretch>
+            <a:fillRect/>
+          </a:stretch>
+        </p:blipFill>
+        <p:spPr>
+          <a:xfrm>
+            <a:off x="0" y="53427"/>
+            <a:ext cx="2905125" cy="1571625"/>
           </a:xfrm>
           <a:prstGeom prst="rect">
             <a:avLst/>
@@ -1362,20 +1558,13 @@
     </p:spTree>
     <p:extLst>
       <p:ext uri="{BB962C8B-B14F-4D97-AF65-F5344CB8AC3E}">
-        <p14:creationId xmlns="" xmlns:p14="http://schemas.microsoft.com/office/powerpoint/2010/main" val="2347594821"/>
+        <p14:creationId xmlns:p14="http://schemas.microsoft.com/office/powerpoint/2010/main" val="3129509697"/>
       </p:ext>
     </p:extLst>
   </p:cSld>
   <p:clrMapOvr>
     <a:masterClrMapping/>
   </p:clrMapOvr>
-  <p:timing>
-    <p:tnLst>
-      <p:par>
-        <p:cTn id="1" dur="indefinite" restart="never" nodeType="tmRoot"/>
-      </p:par>
-    </p:tnLst>
-  </p:timing>
 </p:sld>
 </file>
 
@@ -1404,8 +1593,8 @@
         </p:nvSpPr>
         <p:spPr>
           <a:xfrm>
-            <a:off x="3451686" y="286603"/>
-            <a:ext cx="5288628" cy="830997"/>
+            <a:off x="5097169" y="286603"/>
+            <a:ext cx="1997663" cy="830997"/>
           </a:xfrm>
           <a:prstGeom prst="rect">
             <a:avLst/>
@@ -1420,20 +1609,22 @@
           <a:p>
             <a:pPr algn="ctr"/>
             <a:r>
-              <a:rPr lang="pt-BR" sz="4800" b="1" dirty="0" smtClean="0">
-                <a:solidFill>
-                  <a:schemeClr val="bg1"/>
-                </a:solidFill>
-                <a:latin typeface="Arial" pitchFamily="34" charset="0"/>
+              <a:rPr lang="pt-BR" sz="4800" b="1" dirty="0">
+                <a:solidFill>
+                  <a:schemeClr val="bg1"/>
+                </a:solidFill>
+                <a:latin typeface="Verdana" panose="020B0604030504040204" pitchFamily="34" charset="0"/>
+                <a:ea typeface="Verdana" panose="020B0604030504040204" pitchFamily="34" charset="0"/>
                 <a:cs typeface="Arial" pitchFamily="34" charset="0"/>
               </a:rPr>
-              <a:t>Desenvolvimento</a:t>
+              <a:t>Excel</a:t>
             </a:r>
             <a:endParaRPr lang="pt-BR" sz="4400" b="1" dirty="0">
               <a:solidFill>
                 <a:schemeClr val="bg1"/>
               </a:solidFill>
-              <a:latin typeface="Arial" pitchFamily="34" charset="0"/>
+              <a:latin typeface="Verdana" panose="020B0604030504040204" pitchFamily="34" charset="0"/>
+              <a:ea typeface="Verdana" panose="020B0604030504040204" pitchFamily="34" charset="0"/>
               <a:cs typeface="Arial" pitchFamily="34" charset="0"/>
             </a:endParaRPr>
           </a:p>
@@ -1447,8 +1638,8 @@
         </p:nvSpPr>
         <p:spPr>
           <a:xfrm>
-            <a:off x="0" y="1525939"/>
-            <a:ext cx="12191999" cy="5078313"/>
+            <a:off x="1" y="1288798"/>
+            <a:ext cx="12191999" cy="5509200"/>
           </a:xfrm>
           <a:prstGeom prst="rect">
             <a:avLst/>
@@ -1463,45 +1654,113 @@
           <a:p>
             <a:pPr algn="ctr"/>
             <a:r>
-              <a:rPr lang="pt-BR" sz="3600" b="1" i="1" dirty="0" smtClean="0">
-                <a:solidFill>
-                  <a:schemeClr val="bg1"/>
-                </a:solidFill>
-                <a:latin typeface="Times New Roman" pitchFamily="18" charset="0"/>
+              <a:rPr lang="pt-BR" sz="3200" b="1" i="1" dirty="0">
+                <a:solidFill>
+                  <a:schemeClr val="bg1"/>
+                </a:solidFill>
+                <a:latin typeface="Verdana" panose="020B0604030504040204" pitchFamily="34" charset="0"/>
+                <a:ea typeface="Verdana" panose="020B0604030504040204" pitchFamily="34" charset="0"/>
                 <a:cs typeface="Times New Roman" pitchFamily="18" charset="0"/>
               </a:rPr>
-              <a:t>Além dos atalhos básicos, existem também atalhos que ajudam durante a apresentação. Por exemplo, pressionar F5 inicia a apresentação desde o começo, enquanto </a:t>
-            </a:r>
-            <a:r>
-              <a:rPr lang="pt-BR" sz="3600" b="1" i="1" dirty="0" err="1" smtClean="0">
-                <a:solidFill>
-                  <a:schemeClr val="bg1"/>
-                </a:solidFill>
-                <a:latin typeface="Times New Roman" pitchFamily="18" charset="0"/>
+              <a:t>F4: Ciclo de alternância entre referências absolutas, relativas e mistas em </a:t>
+            </a:r>
+            <a:r>
+              <a:rPr lang="pt-BR" sz="3200" b="1" i="1" dirty="0" err="1">
+                <a:solidFill>
+                  <a:schemeClr val="bg1"/>
+                </a:solidFill>
+                <a:latin typeface="Verdana" panose="020B0604030504040204" pitchFamily="34" charset="0"/>
+                <a:ea typeface="Verdana" panose="020B0604030504040204" pitchFamily="34" charset="0"/>
                 <a:cs typeface="Times New Roman" pitchFamily="18" charset="0"/>
               </a:rPr>
-              <a:t>Shift</a:t>
-            </a:r>
-            <a:r>
-              <a:rPr lang="pt-BR" sz="3600" b="1" i="1" dirty="0" smtClean="0">
-                <a:solidFill>
-                  <a:schemeClr val="bg1"/>
-                </a:solidFill>
-                <a:latin typeface="Times New Roman" pitchFamily="18" charset="0"/>
+              <a:t>strings</a:t>
+            </a:r>
+            <a:r>
+              <a:rPr lang="pt-BR" sz="3200" b="1" i="1" dirty="0">
+                <a:solidFill>
+                  <a:schemeClr val="bg1"/>
+                </a:solidFill>
+                <a:latin typeface="Verdana" panose="020B0604030504040204" pitchFamily="34" charset="0"/>
+                <a:ea typeface="Verdana" panose="020B0604030504040204" pitchFamily="34" charset="0"/>
                 <a:cs typeface="Times New Roman" pitchFamily="18" charset="0"/>
               </a:rPr>
-              <a:t> + F5 inicia do slide atual. Durante a apresentação, a tecla B deixa a tela preta e a tecla W deixa a tela branca, o que pode ser útil para focar a atenção do público. Também é possível usar as setas do teclado para avançar ou voltar os slides. Esses atalhos ajudam a tornar a apresentação mais profissional e organizada.</a:t>
-            </a:r>
-          </a:p>
-          <a:p>
-            <a:pPr algn="ctr"/>
-            <a:endParaRPr lang="pt-BR" sz="3600" b="1" dirty="0" smtClean="0">
+              <a:t> de fórmulas.</a:t>
+            </a:r>
+          </a:p>
+          <a:p>
+            <a:pPr algn="ctr"/>
+            <a:endParaRPr lang="pt-BR" sz="3200" b="1" i="1" dirty="0">
               <a:solidFill>
                 <a:schemeClr val="bg1"/>
               </a:solidFill>
-              <a:latin typeface="Times New Roman" pitchFamily="18" charset="0"/>
+              <a:latin typeface="Verdana" panose="020B0604030504040204" pitchFamily="34" charset="0"/>
+              <a:ea typeface="Verdana" panose="020B0604030504040204" pitchFamily="34" charset="0"/>
               <a:cs typeface="Times New Roman" pitchFamily="18" charset="0"/>
             </a:endParaRPr>
+          </a:p>
+          <a:p>
+            <a:pPr algn="ctr"/>
+            <a:r>
+              <a:rPr lang="pt-BR" sz="3200" b="1" i="1" dirty="0">
+                <a:solidFill>
+                  <a:schemeClr val="bg1"/>
+                </a:solidFill>
+                <a:latin typeface="Verdana" panose="020B0604030504040204" pitchFamily="34" charset="0"/>
+                <a:ea typeface="Verdana" panose="020B0604030504040204" pitchFamily="34" charset="0"/>
+                <a:cs typeface="Times New Roman" pitchFamily="18" charset="0"/>
+              </a:rPr>
+              <a:t>Ctrl + Shift + L: Instanciação de filtros em vetores de dados.</a:t>
+            </a:r>
+          </a:p>
+          <a:p>
+            <a:pPr algn="ctr"/>
+            <a:endParaRPr lang="pt-BR" sz="3200" b="1" i="1" dirty="0">
+              <a:solidFill>
+                <a:schemeClr val="bg1"/>
+              </a:solidFill>
+              <a:latin typeface="Verdana" panose="020B0604030504040204" pitchFamily="34" charset="0"/>
+              <a:ea typeface="Verdana" panose="020B0604030504040204" pitchFamily="34" charset="0"/>
+              <a:cs typeface="Times New Roman" pitchFamily="18" charset="0"/>
+            </a:endParaRPr>
+          </a:p>
+          <a:p>
+            <a:pPr algn="ctr"/>
+            <a:r>
+              <a:rPr lang="pt-BR" sz="3200" b="1" i="1" dirty="0">
+                <a:solidFill>
+                  <a:schemeClr val="bg1"/>
+                </a:solidFill>
+                <a:latin typeface="Verdana" panose="020B0604030504040204" pitchFamily="34" charset="0"/>
+                <a:ea typeface="Verdana" panose="020B0604030504040204" pitchFamily="34" charset="0"/>
+                <a:cs typeface="Times New Roman" pitchFamily="18" charset="0"/>
+              </a:rPr>
+              <a:t>Ctrl + Shift + $ / %: Formatação rápida de tipos de dados (Moeda e Porcentagem).</a:t>
+            </a:r>
+          </a:p>
+          <a:p>
+            <a:pPr algn="ctr"/>
+            <a:endParaRPr lang="pt-BR" sz="3200" b="1" i="1" dirty="0">
+              <a:solidFill>
+                <a:schemeClr val="bg1"/>
+              </a:solidFill>
+              <a:latin typeface="Verdana" panose="020B0604030504040204" pitchFamily="34" charset="0"/>
+              <a:ea typeface="Verdana" panose="020B0604030504040204" pitchFamily="34" charset="0"/>
+              <a:cs typeface="Times New Roman" pitchFamily="18" charset="0"/>
+            </a:endParaRPr>
+          </a:p>
+          <a:p>
+            <a:pPr algn="ctr"/>
+            <a:r>
+              <a:rPr lang="pt-BR" sz="3200" b="1" i="1" dirty="0">
+                <a:solidFill>
+                  <a:schemeClr val="bg1"/>
+                </a:solidFill>
+                <a:latin typeface="Verdana" panose="020B0604030504040204" pitchFamily="34" charset="0"/>
+                <a:ea typeface="Verdana" panose="020B0604030504040204" pitchFamily="34" charset="0"/>
+                <a:cs typeface="Times New Roman" pitchFamily="18" charset="0"/>
+              </a:rPr>
+              <a:t>Alt + =: Execução da função AUTOSOMA baseada na detecção de adjacência de células numéricas.</a:t>
+            </a:r>
           </a:p>
         </p:txBody>
       </p:sp>
@@ -1521,8 +1780,38 @@
         </p:blipFill>
         <p:spPr>
           <a:xfrm>
-            <a:off x="9255243" y="-232012"/>
+            <a:off x="10048875" y="-232324"/>
             <a:ext cx="2143125" cy="2143125"/>
+          </a:xfrm>
+          <a:prstGeom prst="rect">
+            <a:avLst/>
+          </a:prstGeom>
+        </p:spPr>
+      </p:pic>
+      <p:pic>
+        <p:nvPicPr>
+          <p:cNvPr id="6" name="Imagem 5" descr="Logotipo">
+            <a:extLst>
+              <a:ext uri="{FF2B5EF4-FFF2-40B4-BE49-F238E27FC236}">
+                <a16:creationId xmlns:a16="http://schemas.microsoft.com/office/drawing/2014/main" id="{88607375-1DAE-F280-F0D0-CD90B4073342}"/>
+              </a:ext>
+            </a:extLst>
+          </p:cNvPr>
+          <p:cNvPicPr>
+            <a:picLocks noChangeAspect="1"/>
+          </p:cNvPicPr>
+          <p:nvPr/>
+        </p:nvPicPr>
+        <p:blipFill>
+          <a:blip r:embed="rId3"/>
+          <a:stretch>
+            <a:fillRect/>
+          </a:stretch>
+        </p:blipFill>
+        <p:spPr>
+          <a:xfrm>
+            <a:off x="0" y="53427"/>
+            <a:ext cx="2905125" cy="1571625"/>
           </a:xfrm>
           <a:prstGeom prst="rect">
             <a:avLst/>
@@ -1532,20 +1821,13 @@
     </p:spTree>
     <p:extLst>
       <p:ext uri="{BB962C8B-B14F-4D97-AF65-F5344CB8AC3E}">
-        <p14:creationId xmlns="" xmlns:p14="http://schemas.microsoft.com/office/powerpoint/2010/main" val="2347594821"/>
+        <p14:creationId xmlns:p14="http://schemas.microsoft.com/office/powerpoint/2010/main" val="2058574568"/>
       </p:ext>
     </p:extLst>
   </p:cSld>
   <p:clrMapOvr>
     <a:masterClrMapping/>
   </p:clrMapOvr>
-  <p:timing>
-    <p:tnLst>
-      <p:par>
-        <p:cTn id="1" dur="indefinite" restart="never" nodeType="tmRoot"/>
-      </p:par>
-    </p:tnLst>
-  </p:timing>
 </p:sld>
 </file>
 
@@ -1574,8 +1856,8 @@
         </p:nvSpPr>
         <p:spPr>
           <a:xfrm>
-            <a:off x="4427915" y="286603"/>
-            <a:ext cx="3336170" cy="830997"/>
+            <a:off x="4006328" y="286603"/>
+            <a:ext cx="4179349" cy="830997"/>
           </a:xfrm>
           <a:prstGeom prst="rect">
             <a:avLst/>
@@ -1590,20 +1872,22 @@
           <a:p>
             <a:pPr algn="ctr"/>
             <a:r>
-              <a:rPr lang="pt-BR" sz="4800" b="1" dirty="0" smtClean="0">
-                <a:solidFill>
-                  <a:schemeClr val="bg1"/>
-                </a:solidFill>
-                <a:latin typeface="Arial" pitchFamily="34" charset="0"/>
+              <a:rPr lang="pt-BR" sz="4800" b="1" dirty="0">
+                <a:solidFill>
+                  <a:schemeClr val="bg1"/>
+                </a:solidFill>
+                <a:latin typeface="Verdana" panose="020B0604030504040204" pitchFamily="34" charset="0"/>
+                <a:ea typeface="Verdana" panose="020B0604030504040204" pitchFamily="34" charset="0"/>
                 <a:cs typeface="Arial" pitchFamily="34" charset="0"/>
               </a:rPr>
-              <a:t>Conclusão</a:t>
-            </a:r>
-            <a:endParaRPr lang="pt-BR" sz="4800" b="1" dirty="0">
+              <a:t>PowerPoint</a:t>
+            </a:r>
+            <a:endParaRPr lang="pt-BR" sz="4400" b="1" dirty="0">
               <a:solidFill>
                 <a:schemeClr val="bg1"/>
               </a:solidFill>
-              <a:latin typeface="Arial" pitchFamily="34" charset="0"/>
+              <a:latin typeface="Verdana" panose="020B0604030504040204" pitchFamily="34" charset="0"/>
+              <a:ea typeface="Verdana" panose="020B0604030504040204" pitchFamily="34" charset="0"/>
               <a:cs typeface="Arial" pitchFamily="34" charset="0"/>
             </a:endParaRPr>
           </a:p>
@@ -1617,8 +1901,8 @@
         </p:nvSpPr>
         <p:spPr>
           <a:xfrm>
-            <a:off x="1" y="1539587"/>
-            <a:ext cx="12191999" cy="5570756"/>
+            <a:off x="-1" y="1288798"/>
+            <a:ext cx="12191999" cy="5509200"/>
           </a:xfrm>
           <a:prstGeom prst="rect">
             <a:avLst/>
@@ -1633,25 +1917,113 @@
           <a:p>
             <a:pPr algn="ctr"/>
             <a:r>
-              <a:rPr lang="pt-BR" sz="4000" b="1" i="1" dirty="0" smtClean="0">
-                <a:solidFill>
-                  <a:schemeClr val="bg1"/>
-                </a:solidFill>
-                <a:latin typeface="Times New Roman" pitchFamily="18" charset="0"/>
+              <a:rPr lang="pt-BR" sz="3200" b="1" i="1" dirty="0">
+                <a:solidFill>
+                  <a:schemeClr val="bg1"/>
+                </a:solidFill>
+                <a:latin typeface="Verdana" panose="020B0604030504040204" pitchFamily="34" charset="0"/>
+                <a:ea typeface="Verdana" panose="020B0604030504040204" pitchFamily="34" charset="0"/>
                 <a:cs typeface="Times New Roman" pitchFamily="18" charset="0"/>
               </a:rPr>
-              <a:t>Em resumo, os atalhos do PowerPoint são ferramentas importantes que ajudam a economizar tempo e aumentar a eficiência na criação e apresentação de slides. Ao aprender e praticar esses comandos, o usuário consegue trabalhar de forma mais rápida e organizada. Por isso, é fundamental conhecer pelo menos os atalhos principais, pois eles fazem muita diferença no dia a dia, principalmente em ambientes escolares e profissionais.</a:t>
-            </a:r>
-          </a:p>
-          <a:p>
-            <a:pPr algn="ctr"/>
-            <a:endParaRPr lang="pt-BR" sz="3600" b="1" dirty="0" smtClean="0">
+              <a:t>Ctrl + D: Clonagem de objetos com preservação de deslocamento vetorial.</a:t>
+            </a:r>
+          </a:p>
+          <a:p>
+            <a:pPr algn="ctr"/>
+            <a:endParaRPr lang="pt-BR" sz="3200" b="1" i="1" dirty="0">
               <a:solidFill>
                 <a:schemeClr val="bg1"/>
               </a:solidFill>
-              <a:latin typeface="Times New Roman" pitchFamily="18" charset="0"/>
+              <a:latin typeface="Verdana" panose="020B0604030504040204" pitchFamily="34" charset="0"/>
+              <a:ea typeface="Verdana" panose="020B0604030504040204" pitchFamily="34" charset="0"/>
               <a:cs typeface="Times New Roman" pitchFamily="18" charset="0"/>
             </a:endParaRPr>
+          </a:p>
+          <a:p>
+            <a:pPr algn="ctr"/>
+            <a:r>
+              <a:rPr lang="pt-BR" sz="3200" b="1" i="1" dirty="0">
+                <a:solidFill>
+                  <a:schemeClr val="bg1"/>
+                </a:solidFill>
+                <a:latin typeface="Verdana" panose="020B0604030504040204" pitchFamily="34" charset="0"/>
+                <a:ea typeface="Verdana" panose="020B0604030504040204" pitchFamily="34" charset="0"/>
+                <a:cs typeface="Times New Roman" pitchFamily="18" charset="0"/>
+              </a:rPr>
+              <a:t>Shift + F5: Execução de </a:t>
+            </a:r>
+            <a:r>
+              <a:rPr lang="pt-BR" sz="3200" b="1" i="1" dirty="0" err="1">
+                <a:solidFill>
+                  <a:schemeClr val="bg1"/>
+                </a:solidFill>
+                <a:latin typeface="Verdana" panose="020B0604030504040204" pitchFamily="34" charset="0"/>
+                <a:ea typeface="Verdana" panose="020B0604030504040204" pitchFamily="34" charset="0"/>
+                <a:cs typeface="Times New Roman" pitchFamily="18" charset="0"/>
+              </a:rPr>
+              <a:t>runtime</a:t>
+            </a:r>
+            <a:r>
+              <a:rPr lang="pt-BR" sz="3200" b="1" i="1" dirty="0">
+                <a:solidFill>
+                  <a:schemeClr val="bg1"/>
+                </a:solidFill>
+                <a:latin typeface="Verdana" panose="020B0604030504040204" pitchFamily="34" charset="0"/>
+                <a:ea typeface="Verdana" panose="020B0604030504040204" pitchFamily="34" charset="0"/>
+                <a:cs typeface="Times New Roman" pitchFamily="18" charset="0"/>
+              </a:rPr>
+              <a:t> a partir da posição atual do deck.</a:t>
+            </a:r>
+          </a:p>
+          <a:p>
+            <a:pPr algn="ctr"/>
+            <a:endParaRPr lang="pt-BR" sz="3200" b="1" i="1" dirty="0">
+              <a:solidFill>
+                <a:schemeClr val="bg1"/>
+              </a:solidFill>
+              <a:latin typeface="Verdana" panose="020B0604030504040204" pitchFamily="34" charset="0"/>
+              <a:ea typeface="Verdana" panose="020B0604030504040204" pitchFamily="34" charset="0"/>
+              <a:cs typeface="Times New Roman" pitchFamily="18" charset="0"/>
+            </a:endParaRPr>
+          </a:p>
+          <a:p>
+            <a:pPr algn="ctr"/>
+            <a:r>
+              <a:rPr lang="pt-BR" sz="3200" b="1" i="1" dirty="0">
+                <a:solidFill>
+                  <a:schemeClr val="bg1"/>
+                </a:solidFill>
+                <a:latin typeface="Verdana" panose="020B0604030504040204" pitchFamily="34" charset="0"/>
+                <a:ea typeface="Verdana" panose="020B0604030504040204" pitchFamily="34" charset="0"/>
+                <a:cs typeface="Times New Roman" pitchFamily="18" charset="0"/>
+              </a:rPr>
+              <a:t>Ctrl + G: Consolidação de elementos em grupos lógicos para manipulação em lote.</a:t>
+            </a:r>
+          </a:p>
+          <a:p>
+            <a:pPr algn="ctr"/>
+            <a:endParaRPr lang="pt-BR" sz="3200" b="1" i="1" dirty="0">
+              <a:solidFill>
+                <a:schemeClr val="bg1"/>
+              </a:solidFill>
+              <a:latin typeface="Verdana" panose="020B0604030504040204" pitchFamily="34" charset="0"/>
+              <a:ea typeface="Verdana" panose="020B0604030504040204" pitchFamily="34" charset="0"/>
+              <a:cs typeface="Times New Roman" pitchFamily="18" charset="0"/>
+            </a:endParaRPr>
+          </a:p>
+          <a:p>
+            <a:pPr algn="ctr"/>
+            <a:r>
+              <a:rPr lang="pt-BR" sz="3200" b="1" i="1" dirty="0">
+                <a:solidFill>
+                  <a:schemeClr val="bg1"/>
+                </a:solidFill>
+                <a:latin typeface="Verdana" panose="020B0604030504040204" pitchFamily="34" charset="0"/>
+                <a:ea typeface="Verdana" panose="020B0604030504040204" pitchFamily="34" charset="0"/>
+                <a:cs typeface="Times New Roman" pitchFamily="18" charset="0"/>
+              </a:rPr>
+              <a:t>Alt + F10: Abertura do painel de seleção para gestão de camadas e visibilidade de objetos.</a:t>
+            </a:r>
           </a:p>
         </p:txBody>
       </p:sp>
@@ -1671,8 +2043,38 @@
         </p:blipFill>
         <p:spPr>
           <a:xfrm>
-            <a:off x="9241595" y="-286603"/>
+            <a:off x="9962246" y="-232324"/>
             <a:ext cx="2143125" cy="2143125"/>
+          </a:xfrm>
+          <a:prstGeom prst="rect">
+            <a:avLst/>
+          </a:prstGeom>
+        </p:spPr>
+      </p:pic>
+      <p:pic>
+        <p:nvPicPr>
+          <p:cNvPr id="6" name="Imagem 5" descr="Logotipo">
+            <a:extLst>
+              <a:ext uri="{FF2B5EF4-FFF2-40B4-BE49-F238E27FC236}">
+                <a16:creationId xmlns:a16="http://schemas.microsoft.com/office/drawing/2014/main" id="{88607375-1DAE-F280-F0D0-CD90B4073342}"/>
+              </a:ext>
+            </a:extLst>
+          </p:cNvPr>
+          <p:cNvPicPr>
+            <a:picLocks noChangeAspect="1"/>
+          </p:cNvPicPr>
+          <p:nvPr/>
+        </p:nvPicPr>
+        <p:blipFill>
+          <a:blip r:embed="rId3"/>
+          <a:stretch>
+            <a:fillRect/>
+          </a:stretch>
+        </p:blipFill>
+        <p:spPr>
+          <a:xfrm>
+            <a:off x="0" y="53427"/>
+            <a:ext cx="2905125" cy="1571625"/>
           </a:xfrm>
           <a:prstGeom prst="rect">
             <a:avLst/>
@@ -1682,20 +2084,13 @@
     </p:spTree>
     <p:extLst>
       <p:ext uri="{BB962C8B-B14F-4D97-AF65-F5344CB8AC3E}">
-        <p14:creationId xmlns="" xmlns:p14="http://schemas.microsoft.com/office/powerpoint/2010/main" val="2347594821"/>
+        <p14:creationId xmlns:p14="http://schemas.microsoft.com/office/powerpoint/2010/main" val="1385276306"/>
       </p:ext>
     </p:extLst>
   </p:cSld>
   <p:clrMapOvr>
     <a:masterClrMapping/>
   </p:clrMapOvr>
-  <p:timing>
-    <p:tnLst>
-      <p:par>
-        <p:cTn id="1" dur="indefinite" restart="never" nodeType="tmRoot"/>
-      </p:par>
-    </p:tnLst>
-  </p:timing>
 </p:sld>
 </file>
 
@@ -1718,10 +2113,619 @@
       </p:grpSpPr>
       <p:sp>
         <p:nvSpPr>
+          <p:cNvPr id="3" name="CaixaDeTexto 2"/>
+          <p:cNvSpPr txBox="1"/>
+          <p:nvPr/>
+        </p:nvSpPr>
+        <p:spPr>
+          <a:xfrm>
+            <a:off x="4420701" y="286603"/>
+            <a:ext cx="3350597" cy="830997"/>
+          </a:xfrm>
+          <a:prstGeom prst="rect">
+            <a:avLst/>
+          </a:prstGeom>
+          <a:noFill/>
+        </p:spPr>
+        <p:txBody>
+          <a:bodyPr wrap="none" rtlCol="0">
+            <a:spAutoFit/>
+          </a:bodyPr>
+          <a:lstStyle/>
+          <a:p>
+            <a:pPr algn="ctr"/>
+            <a:r>
+              <a:rPr lang="pt-BR" sz="4800" b="1" dirty="0">
+                <a:solidFill>
+                  <a:schemeClr val="bg1"/>
+                </a:solidFill>
+                <a:latin typeface="Verdana" panose="020B0604030504040204" pitchFamily="34" charset="0"/>
+                <a:ea typeface="Verdana" panose="020B0604030504040204" pitchFamily="34" charset="0"/>
+                <a:cs typeface="Arial" pitchFamily="34" charset="0"/>
+              </a:rPr>
+              <a:t>Windows</a:t>
+            </a:r>
+            <a:endParaRPr lang="pt-BR" sz="4400" b="1" dirty="0">
+              <a:solidFill>
+                <a:schemeClr val="bg1"/>
+              </a:solidFill>
+              <a:latin typeface="Verdana" panose="020B0604030504040204" pitchFamily="34" charset="0"/>
+              <a:ea typeface="Verdana" panose="020B0604030504040204" pitchFamily="34" charset="0"/>
+              <a:cs typeface="Arial" pitchFamily="34" charset="0"/>
+            </a:endParaRPr>
+          </a:p>
+        </p:txBody>
+      </p:sp>
+      <p:sp>
+        <p:nvSpPr>
+          <p:cNvPr id="5" name="CaixaDeTexto 4"/>
+          <p:cNvSpPr txBox="1"/>
+          <p:nvPr/>
+        </p:nvSpPr>
+        <p:spPr>
+          <a:xfrm>
+            <a:off x="-1" y="1288798"/>
+            <a:ext cx="12191999" cy="5509200"/>
+          </a:xfrm>
+          <a:prstGeom prst="rect">
+            <a:avLst/>
+          </a:prstGeom>
+          <a:noFill/>
+        </p:spPr>
+        <p:txBody>
+          <a:bodyPr wrap="square" rtlCol="0">
+            <a:spAutoFit/>
+          </a:bodyPr>
+          <a:lstStyle/>
+          <a:p>
+            <a:pPr algn="ctr"/>
+            <a:r>
+              <a:rPr lang="pt-BR" sz="3200" b="1" i="1" dirty="0" err="1">
+                <a:solidFill>
+                  <a:schemeClr val="bg1"/>
+                </a:solidFill>
+                <a:latin typeface="Verdana" panose="020B0604030504040204" pitchFamily="34" charset="0"/>
+                <a:ea typeface="Verdana" panose="020B0604030504040204" pitchFamily="34" charset="0"/>
+                <a:cs typeface="Times New Roman" pitchFamily="18" charset="0"/>
+              </a:rPr>
+              <a:t>Win</a:t>
+            </a:r>
+            <a:r>
+              <a:rPr lang="pt-BR" sz="3200" b="1" i="1" dirty="0">
+                <a:solidFill>
+                  <a:schemeClr val="bg1"/>
+                </a:solidFill>
+                <a:latin typeface="Verdana" panose="020B0604030504040204" pitchFamily="34" charset="0"/>
+                <a:ea typeface="Verdana" panose="020B0604030504040204" pitchFamily="34" charset="0"/>
+                <a:cs typeface="Times New Roman" pitchFamily="18" charset="0"/>
+              </a:rPr>
+              <a:t> + V: Gestão de cache da área de transferência (histórico de múltiplos itens).</a:t>
+            </a:r>
+          </a:p>
+          <a:p>
+            <a:pPr algn="ctr"/>
+            <a:endParaRPr lang="pt-BR" sz="3200" b="1" i="1" dirty="0">
+              <a:solidFill>
+                <a:schemeClr val="bg1"/>
+              </a:solidFill>
+              <a:latin typeface="Verdana" panose="020B0604030504040204" pitchFamily="34" charset="0"/>
+              <a:ea typeface="Verdana" panose="020B0604030504040204" pitchFamily="34" charset="0"/>
+              <a:cs typeface="Times New Roman" pitchFamily="18" charset="0"/>
+            </a:endParaRPr>
+          </a:p>
+          <a:p>
+            <a:pPr algn="ctr"/>
+            <a:r>
+              <a:rPr lang="pt-BR" sz="3200" b="1" i="1" dirty="0" err="1">
+                <a:solidFill>
+                  <a:schemeClr val="bg1"/>
+                </a:solidFill>
+                <a:latin typeface="Verdana" panose="020B0604030504040204" pitchFamily="34" charset="0"/>
+                <a:ea typeface="Verdana" panose="020B0604030504040204" pitchFamily="34" charset="0"/>
+                <a:cs typeface="Times New Roman" pitchFamily="18" charset="0"/>
+              </a:rPr>
+              <a:t>Win</a:t>
+            </a:r>
+            <a:r>
+              <a:rPr lang="pt-BR" sz="3200" b="1" i="1" dirty="0">
+                <a:solidFill>
+                  <a:schemeClr val="bg1"/>
+                </a:solidFill>
+                <a:latin typeface="Verdana" panose="020B0604030504040204" pitchFamily="34" charset="0"/>
+                <a:ea typeface="Verdana" panose="020B0604030504040204" pitchFamily="34" charset="0"/>
+                <a:cs typeface="Times New Roman" pitchFamily="18" charset="0"/>
+              </a:rPr>
+              <a:t> + </a:t>
+            </a:r>
+            <a:r>
+              <a:rPr lang="pt-BR" sz="3200" b="1" i="1" dirty="0" err="1">
+                <a:solidFill>
+                  <a:schemeClr val="bg1"/>
+                </a:solidFill>
+                <a:latin typeface="Verdana" panose="020B0604030504040204" pitchFamily="34" charset="0"/>
+                <a:ea typeface="Verdana" panose="020B0604030504040204" pitchFamily="34" charset="0"/>
+                <a:cs typeface="Times New Roman" pitchFamily="18" charset="0"/>
+              </a:rPr>
+              <a:t>Tab</a:t>
+            </a:r>
+            <a:r>
+              <a:rPr lang="pt-BR" sz="3200" b="1" i="1" dirty="0">
+                <a:solidFill>
+                  <a:schemeClr val="bg1"/>
+                </a:solidFill>
+                <a:latin typeface="Verdana" panose="020B0604030504040204" pitchFamily="34" charset="0"/>
+                <a:ea typeface="Verdana" panose="020B0604030504040204" pitchFamily="34" charset="0"/>
+                <a:cs typeface="Times New Roman" pitchFamily="18" charset="0"/>
+              </a:rPr>
+              <a:t>: Visualização de instâncias ativas e alternância entre áreas de trabalho virtuais.</a:t>
+            </a:r>
+          </a:p>
+          <a:p>
+            <a:pPr algn="ctr"/>
+            <a:endParaRPr lang="pt-BR" sz="3200" b="1" i="1" dirty="0">
+              <a:solidFill>
+                <a:schemeClr val="bg1"/>
+              </a:solidFill>
+              <a:latin typeface="Verdana" panose="020B0604030504040204" pitchFamily="34" charset="0"/>
+              <a:ea typeface="Verdana" panose="020B0604030504040204" pitchFamily="34" charset="0"/>
+              <a:cs typeface="Times New Roman" pitchFamily="18" charset="0"/>
+            </a:endParaRPr>
+          </a:p>
+          <a:p>
+            <a:pPr algn="ctr"/>
+            <a:r>
+              <a:rPr lang="pt-BR" sz="3200" b="1" i="1" dirty="0" err="1">
+                <a:solidFill>
+                  <a:schemeClr val="bg1"/>
+                </a:solidFill>
+                <a:latin typeface="Verdana" panose="020B0604030504040204" pitchFamily="34" charset="0"/>
+                <a:ea typeface="Verdana" panose="020B0604030504040204" pitchFamily="34" charset="0"/>
+                <a:cs typeface="Times New Roman" pitchFamily="18" charset="0"/>
+              </a:rPr>
+              <a:t>Win</a:t>
+            </a:r>
+            <a:r>
+              <a:rPr lang="pt-BR" sz="3200" b="1" i="1" dirty="0">
+                <a:solidFill>
+                  <a:schemeClr val="bg1"/>
+                </a:solidFill>
+                <a:latin typeface="Verdana" panose="020B0604030504040204" pitchFamily="34" charset="0"/>
+                <a:ea typeface="Verdana" panose="020B0604030504040204" pitchFamily="34" charset="0"/>
+                <a:cs typeface="Times New Roman" pitchFamily="18" charset="0"/>
+              </a:rPr>
+              <a:t> + Shift + S: </a:t>
+            </a:r>
+            <a:r>
+              <a:rPr lang="pt-BR" sz="3200" b="1" i="1" dirty="0" err="1">
+                <a:solidFill>
+                  <a:schemeClr val="bg1"/>
+                </a:solidFill>
+                <a:latin typeface="Verdana" panose="020B0604030504040204" pitchFamily="34" charset="0"/>
+                <a:ea typeface="Verdana" panose="020B0604030504040204" pitchFamily="34" charset="0"/>
+                <a:cs typeface="Times New Roman" pitchFamily="18" charset="0"/>
+              </a:rPr>
+              <a:t>Snipping</a:t>
+            </a:r>
+            <a:r>
+              <a:rPr lang="pt-BR" sz="3200" b="1" i="1" dirty="0">
+                <a:solidFill>
+                  <a:schemeClr val="bg1"/>
+                </a:solidFill>
+                <a:latin typeface="Verdana" panose="020B0604030504040204" pitchFamily="34" charset="0"/>
+                <a:ea typeface="Verdana" panose="020B0604030504040204" pitchFamily="34" charset="0"/>
+                <a:cs typeface="Times New Roman" pitchFamily="18" charset="0"/>
+              </a:rPr>
+              <a:t> Tool para captura e processamento imediato de imagens.</a:t>
+            </a:r>
+          </a:p>
+          <a:p>
+            <a:pPr algn="ctr"/>
+            <a:endParaRPr lang="pt-BR" sz="3200" b="1" i="1" dirty="0">
+              <a:solidFill>
+                <a:schemeClr val="bg1"/>
+              </a:solidFill>
+              <a:latin typeface="Verdana" panose="020B0604030504040204" pitchFamily="34" charset="0"/>
+              <a:ea typeface="Verdana" panose="020B0604030504040204" pitchFamily="34" charset="0"/>
+              <a:cs typeface="Times New Roman" pitchFamily="18" charset="0"/>
+            </a:endParaRPr>
+          </a:p>
+          <a:p>
+            <a:pPr algn="ctr"/>
+            <a:r>
+              <a:rPr lang="pt-BR" sz="3200" b="1" i="1" dirty="0" err="1">
+                <a:solidFill>
+                  <a:schemeClr val="bg1"/>
+                </a:solidFill>
+                <a:latin typeface="Verdana" panose="020B0604030504040204" pitchFamily="34" charset="0"/>
+                <a:ea typeface="Verdana" panose="020B0604030504040204" pitchFamily="34" charset="0"/>
+                <a:cs typeface="Times New Roman" pitchFamily="18" charset="0"/>
+              </a:rPr>
+              <a:t>Win</a:t>
+            </a:r>
+            <a:r>
+              <a:rPr lang="pt-BR" sz="3200" b="1" i="1" dirty="0">
+                <a:solidFill>
+                  <a:schemeClr val="bg1"/>
+                </a:solidFill>
+                <a:latin typeface="Verdana" panose="020B0604030504040204" pitchFamily="34" charset="0"/>
+                <a:ea typeface="Verdana" panose="020B0604030504040204" pitchFamily="34" charset="0"/>
+                <a:cs typeface="Times New Roman" pitchFamily="18" charset="0"/>
+              </a:rPr>
+              <a:t> + X: Acesso ao menu de contexto avançado para administração do sistema (Power </a:t>
+            </a:r>
+            <a:r>
+              <a:rPr lang="pt-BR" sz="3200" b="1" i="1" dirty="0" err="1">
+                <a:solidFill>
+                  <a:schemeClr val="bg1"/>
+                </a:solidFill>
+                <a:latin typeface="Verdana" panose="020B0604030504040204" pitchFamily="34" charset="0"/>
+                <a:ea typeface="Verdana" panose="020B0604030504040204" pitchFamily="34" charset="0"/>
+                <a:cs typeface="Times New Roman" pitchFamily="18" charset="0"/>
+              </a:rPr>
+              <a:t>User</a:t>
+            </a:r>
+            <a:r>
+              <a:rPr lang="pt-BR" sz="3200" b="1" i="1" dirty="0">
+                <a:solidFill>
+                  <a:schemeClr val="bg1"/>
+                </a:solidFill>
+                <a:latin typeface="Verdana" panose="020B0604030504040204" pitchFamily="34" charset="0"/>
+                <a:ea typeface="Verdana" panose="020B0604030504040204" pitchFamily="34" charset="0"/>
+                <a:cs typeface="Times New Roman" pitchFamily="18" charset="0"/>
+              </a:rPr>
+              <a:t> Menu)</a:t>
+            </a:r>
+          </a:p>
+        </p:txBody>
+      </p:sp>
+      <p:pic>
+        <p:nvPicPr>
+          <p:cNvPr id="4" name="Imagem 3" descr="cps-removebg-preview.png"/>
+          <p:cNvPicPr>
+            <a:picLocks noChangeAspect="1"/>
+          </p:cNvPicPr>
+          <p:nvPr/>
+        </p:nvPicPr>
+        <p:blipFill>
+          <a:blip r:embed="rId2"/>
+          <a:stretch>
+            <a:fillRect/>
+          </a:stretch>
+        </p:blipFill>
+        <p:spPr>
+          <a:xfrm>
+            <a:off x="9962246" y="-232324"/>
+            <a:ext cx="2143125" cy="2143125"/>
+          </a:xfrm>
+          <a:prstGeom prst="rect">
+            <a:avLst/>
+          </a:prstGeom>
+        </p:spPr>
+      </p:pic>
+      <p:pic>
+        <p:nvPicPr>
+          <p:cNvPr id="6" name="Imagem 5" descr="Logotipo">
+            <a:extLst>
+              <a:ext uri="{FF2B5EF4-FFF2-40B4-BE49-F238E27FC236}">
+                <a16:creationId xmlns:a16="http://schemas.microsoft.com/office/drawing/2014/main" id="{88607375-1DAE-F280-F0D0-CD90B4073342}"/>
+              </a:ext>
+            </a:extLst>
+          </p:cNvPr>
+          <p:cNvPicPr>
+            <a:picLocks noChangeAspect="1"/>
+          </p:cNvPicPr>
+          <p:nvPr/>
+        </p:nvPicPr>
+        <p:blipFill>
+          <a:blip r:embed="rId3"/>
+          <a:stretch>
+            <a:fillRect/>
+          </a:stretch>
+        </p:blipFill>
+        <p:spPr>
+          <a:xfrm>
+            <a:off x="0" y="53427"/>
+            <a:ext cx="2905125" cy="1571625"/>
+          </a:xfrm>
+          <a:prstGeom prst="rect">
+            <a:avLst/>
+          </a:prstGeom>
+        </p:spPr>
+      </p:pic>
+    </p:spTree>
+    <p:extLst>
+      <p:ext uri="{BB962C8B-B14F-4D97-AF65-F5344CB8AC3E}">
+        <p14:creationId xmlns:p14="http://schemas.microsoft.com/office/powerpoint/2010/main" val="442703944"/>
+      </p:ext>
+    </p:extLst>
+  </p:cSld>
+  <p:clrMapOvr>
+    <a:masterClrMapping/>
+  </p:clrMapOvr>
+</p:sld>
+</file>
+
+<file path=ppt/slides/slide7.xml><?xml version="1.0" encoding="utf-8"?>
+<p:sld xmlns:a="http://schemas.openxmlformats.org/drawingml/2006/main" xmlns:r="http://schemas.openxmlformats.org/officeDocument/2006/relationships" xmlns:p="http://schemas.openxmlformats.org/presentationml/2006/main">
+  <p:cSld>
+    <p:spTree>
+      <p:nvGrpSpPr>
+        <p:cNvPr id="1" name=""/>
+        <p:cNvGrpSpPr/>
+        <p:nvPr/>
+      </p:nvGrpSpPr>
+      <p:grpSpPr>
+        <a:xfrm>
+          <a:off x="0" y="0"/>
+          <a:ext cx="0" cy="0"/>
+          <a:chOff x="0" y="0"/>
+          <a:chExt cx="0" cy="0"/>
+        </a:xfrm>
+      </p:grpSpPr>
+      <p:sp>
+        <p:nvSpPr>
+          <p:cNvPr id="3" name="CaixaDeTexto 2"/>
+          <p:cNvSpPr txBox="1"/>
+          <p:nvPr/>
+        </p:nvSpPr>
+        <p:spPr>
+          <a:xfrm>
+            <a:off x="4243570" y="286603"/>
+            <a:ext cx="3704860" cy="830997"/>
+          </a:xfrm>
+          <a:prstGeom prst="rect">
+            <a:avLst/>
+          </a:prstGeom>
+          <a:noFill/>
+        </p:spPr>
+        <p:txBody>
+          <a:bodyPr wrap="none" rtlCol="0">
+            <a:spAutoFit/>
+          </a:bodyPr>
+          <a:lstStyle/>
+          <a:p>
+            <a:pPr algn="ctr"/>
+            <a:r>
+              <a:rPr lang="pt-BR" sz="4800" b="1" dirty="0">
+                <a:solidFill>
+                  <a:schemeClr val="bg1"/>
+                </a:solidFill>
+                <a:latin typeface="Verdana" panose="020B0604030504040204" pitchFamily="34" charset="0"/>
+                <a:ea typeface="Verdana" panose="020B0604030504040204" pitchFamily="34" charset="0"/>
+                <a:cs typeface="Arial" pitchFamily="34" charset="0"/>
+              </a:rPr>
+              <a:t>Conclusão</a:t>
+            </a:r>
+            <a:endParaRPr lang="pt-BR" sz="4400" b="1" dirty="0">
+              <a:solidFill>
+                <a:schemeClr val="bg1"/>
+              </a:solidFill>
+              <a:latin typeface="Verdana" panose="020B0604030504040204" pitchFamily="34" charset="0"/>
+              <a:ea typeface="Verdana" panose="020B0604030504040204" pitchFamily="34" charset="0"/>
+              <a:cs typeface="Arial" pitchFamily="34" charset="0"/>
+            </a:endParaRPr>
+          </a:p>
+        </p:txBody>
+      </p:sp>
+      <p:sp>
+        <p:nvSpPr>
+          <p:cNvPr id="5" name="CaixaDeTexto 4"/>
+          <p:cNvSpPr txBox="1"/>
+          <p:nvPr/>
+        </p:nvSpPr>
+        <p:spPr>
+          <a:xfrm>
+            <a:off x="0" y="1585417"/>
+            <a:ext cx="12191999" cy="5478423"/>
+          </a:xfrm>
+          <a:prstGeom prst="rect">
+            <a:avLst/>
+          </a:prstGeom>
+          <a:noFill/>
+        </p:spPr>
+        <p:txBody>
+          <a:bodyPr wrap="square" rtlCol="0">
+            <a:spAutoFit/>
+          </a:bodyPr>
+          <a:lstStyle/>
+          <a:p>
+            <a:pPr algn="l">
+              <a:buFont typeface="Arial" panose="020B0604020202020204" pitchFamily="34" charset="0"/>
+              <a:buChar char="•"/>
+            </a:pPr>
+            <a:r>
+              <a:rPr lang="pt-BR" sz="3200" b="1" i="1" dirty="0">
+                <a:solidFill>
+                  <a:srgbClr val="E6E8F0"/>
+                </a:solidFill>
+                <a:effectLst/>
+                <a:latin typeface="Verdana" panose="020B0604030504040204" pitchFamily="34" charset="0"/>
+                <a:ea typeface="Verdana" panose="020B0604030504040204" pitchFamily="34" charset="0"/>
+              </a:rPr>
+              <a:t>Síntese: A proficiência em </a:t>
+            </a:r>
+            <a:r>
+              <a:rPr lang="pt-BR" sz="3200" b="1" i="1" dirty="0" err="1">
+                <a:solidFill>
+                  <a:srgbClr val="E6E8F0"/>
+                </a:solidFill>
+                <a:effectLst/>
+                <a:latin typeface="Verdana" panose="020B0604030504040204" pitchFamily="34" charset="0"/>
+                <a:ea typeface="Verdana" panose="020B0604030504040204" pitchFamily="34" charset="0"/>
+              </a:rPr>
+              <a:t>shortcuts</a:t>
+            </a:r>
+            <a:r>
+              <a:rPr lang="pt-BR" sz="3200" b="1" i="1" dirty="0">
+                <a:solidFill>
+                  <a:srgbClr val="E6E8F0"/>
+                </a:solidFill>
+                <a:effectLst/>
+                <a:latin typeface="Verdana" panose="020B0604030504040204" pitchFamily="34" charset="0"/>
+                <a:ea typeface="Verdana" panose="020B0604030504040204" pitchFamily="34" charset="0"/>
+              </a:rPr>
+              <a:t> é um pré-requisito para a alta performance em suporte técnico e desenvolvimento.</a:t>
+            </a:r>
+          </a:p>
+          <a:p>
+            <a:pPr algn="l"/>
+            <a:endParaRPr lang="pt-BR" sz="3200" b="1" i="1" dirty="0">
+              <a:solidFill>
+                <a:srgbClr val="E6E8F0"/>
+              </a:solidFill>
+              <a:effectLst/>
+              <a:latin typeface="Verdana" panose="020B0604030504040204" pitchFamily="34" charset="0"/>
+              <a:ea typeface="Verdana" panose="020B0604030504040204" pitchFamily="34" charset="0"/>
+            </a:endParaRPr>
+          </a:p>
+          <a:p>
+            <a:pPr algn="l">
+              <a:buFont typeface="Arial" panose="020B0604020202020204" pitchFamily="34" charset="0"/>
+              <a:buChar char="•"/>
+            </a:pPr>
+            <a:r>
+              <a:rPr lang="pt-BR" sz="3200" b="1" i="1" dirty="0">
+                <a:solidFill>
+                  <a:srgbClr val="E6E8F0"/>
+                </a:solidFill>
+                <a:effectLst/>
+                <a:latin typeface="Verdana" panose="020B0604030504040204" pitchFamily="34" charset="0"/>
+                <a:ea typeface="Verdana" panose="020B0604030504040204" pitchFamily="34" charset="0"/>
+              </a:rPr>
+              <a:t>Métrica: Redução estimada de 20% no tempo de execução de tarefas repetitivas.</a:t>
+            </a:r>
+          </a:p>
+          <a:p>
+            <a:pPr algn="l"/>
+            <a:endParaRPr lang="pt-BR" sz="3200" b="1" i="1" dirty="0">
+              <a:solidFill>
+                <a:srgbClr val="E6E8F0"/>
+              </a:solidFill>
+              <a:effectLst/>
+              <a:latin typeface="Verdana" panose="020B0604030504040204" pitchFamily="34" charset="0"/>
+              <a:ea typeface="Verdana" panose="020B0604030504040204" pitchFamily="34" charset="0"/>
+            </a:endParaRPr>
+          </a:p>
+          <a:p>
+            <a:pPr algn="l">
+              <a:buFont typeface="Arial" panose="020B0604020202020204" pitchFamily="34" charset="0"/>
+              <a:buChar char="•"/>
+            </a:pPr>
+            <a:r>
+              <a:rPr lang="pt-BR" sz="3200" b="1" i="1" dirty="0">
+                <a:solidFill>
+                  <a:srgbClr val="E6E8F0"/>
+                </a:solidFill>
+                <a:effectLst/>
+                <a:latin typeface="Verdana" panose="020B0604030504040204" pitchFamily="34" charset="0"/>
+                <a:ea typeface="Verdana" panose="020B0604030504040204" pitchFamily="34" charset="0"/>
+              </a:rPr>
+              <a:t>Evolução: Recomenda-se a transição para scripts de automação conforme a complexidade das rotinas aumente.</a:t>
+            </a:r>
+          </a:p>
+          <a:p>
+            <a:pPr algn="ctr"/>
+            <a:endParaRPr lang="pt-BR" sz="3000" b="1" i="1" dirty="0">
+              <a:solidFill>
+                <a:schemeClr val="bg1"/>
+              </a:solidFill>
+              <a:latin typeface="Verdana" panose="020B0604030504040204" pitchFamily="34" charset="0"/>
+              <a:ea typeface="Verdana" panose="020B0604030504040204" pitchFamily="34" charset="0"/>
+              <a:cs typeface="Times New Roman" pitchFamily="18" charset="0"/>
+            </a:endParaRPr>
+          </a:p>
+        </p:txBody>
+      </p:sp>
+      <p:pic>
+        <p:nvPicPr>
+          <p:cNvPr id="4" name="Imagem 3" descr="cps-removebg-preview.png"/>
+          <p:cNvPicPr>
+            <a:picLocks noChangeAspect="1"/>
+          </p:cNvPicPr>
+          <p:nvPr/>
+        </p:nvPicPr>
+        <p:blipFill>
+          <a:blip r:embed="rId2"/>
+          <a:stretch>
+            <a:fillRect/>
+          </a:stretch>
+        </p:blipFill>
+        <p:spPr>
+          <a:xfrm>
+            <a:off x="10048875" y="-163773"/>
+            <a:ext cx="2143125" cy="2143125"/>
+          </a:xfrm>
+          <a:prstGeom prst="rect">
+            <a:avLst/>
+          </a:prstGeom>
+        </p:spPr>
+      </p:pic>
+      <p:pic>
+        <p:nvPicPr>
+          <p:cNvPr id="6" name="Imagem 5" descr="Logotipo">
+            <a:extLst>
+              <a:ext uri="{FF2B5EF4-FFF2-40B4-BE49-F238E27FC236}">
+                <a16:creationId xmlns:a16="http://schemas.microsoft.com/office/drawing/2014/main" id="{88607375-1DAE-F280-F0D0-CD90B4073342}"/>
+              </a:ext>
+            </a:extLst>
+          </p:cNvPr>
+          <p:cNvPicPr>
+            <a:picLocks noChangeAspect="1"/>
+          </p:cNvPicPr>
+          <p:nvPr/>
+        </p:nvPicPr>
+        <p:blipFill>
+          <a:blip r:embed="rId3"/>
+          <a:stretch>
+            <a:fillRect/>
+          </a:stretch>
+        </p:blipFill>
+        <p:spPr>
+          <a:xfrm>
+            <a:off x="0" y="53427"/>
+            <a:ext cx="2905125" cy="1571625"/>
+          </a:xfrm>
+          <a:prstGeom prst="rect">
+            <a:avLst/>
+          </a:prstGeom>
+        </p:spPr>
+      </p:pic>
+    </p:spTree>
+    <p:extLst>
+      <p:ext uri="{BB962C8B-B14F-4D97-AF65-F5344CB8AC3E}">
+        <p14:creationId xmlns:p14="http://schemas.microsoft.com/office/powerpoint/2010/main" val="3447012737"/>
+      </p:ext>
+    </p:extLst>
+  </p:cSld>
+  <p:clrMapOvr>
+    <a:masterClrMapping/>
+  </p:clrMapOvr>
+</p:sld>
+</file>
+
+<file path=ppt/slides/slide8.xml><?xml version="1.0" encoding="utf-8"?>
+<p:sld xmlns:a="http://schemas.openxmlformats.org/drawingml/2006/main" xmlns:r="http://schemas.openxmlformats.org/officeDocument/2006/relationships" xmlns:p="http://schemas.openxmlformats.org/presentationml/2006/main">
+  <p:cSld>
+    <p:spTree>
+      <p:nvGrpSpPr>
+        <p:cNvPr id="1" name=""/>
+        <p:cNvGrpSpPr/>
+        <p:nvPr/>
+      </p:nvGrpSpPr>
+      <p:grpSpPr>
+        <a:xfrm>
+          <a:off x="0" y="0"/>
+          <a:ext cx="0" cy="0"/>
+          <a:chOff x="0" y="0"/>
+          <a:chExt cx="0" cy="0"/>
+        </a:xfrm>
+      </p:grpSpPr>
+      <p:sp>
+        <p:nvSpPr>
           <p:cNvPr id="8" name="Título 1">
             <a:extLst>
               <a:ext uri="{FF2B5EF4-FFF2-40B4-BE49-F238E27FC236}">
-                <a16:creationId xmlns="" xmlns:a16="http://schemas.microsoft.com/office/drawing/2014/main" id="{2048CA6E-79FE-BF7D-AF35-0F458ED105B9}"/>
+                <a16:creationId xmlns:a16="http://schemas.microsoft.com/office/drawing/2014/main" id="{2048CA6E-79FE-BF7D-AF35-0F458ED105B9}"/>
               </a:ext>
             </a:extLst>
           </p:cNvPr>
@@ -1805,20 +2809,13 @@
     </p:spTree>
     <p:extLst>
       <p:ext uri="{BB962C8B-B14F-4D97-AF65-F5344CB8AC3E}">
-        <p14:creationId xmlns="" xmlns:p14="http://schemas.microsoft.com/office/powerpoint/2010/main" val="2611822716"/>
+        <p14:creationId xmlns:p14="http://schemas.microsoft.com/office/powerpoint/2010/main" val="2611822716"/>
       </p:ext>
     </p:extLst>
   </p:cSld>
   <p:clrMapOvr>
     <a:masterClrMapping/>
   </p:clrMapOvr>
-  <p:timing>
-    <p:tnLst>
-      <p:par>
-        <p:cTn id="1" dur="indefinite" restart="never" nodeType="tmRoot"/>
-      </p:par>
-    </p:tnLst>
-  </p:timing>
 </p:sld>
 </file>
 
@@ -2111,7 +3108,7 @@
   <a:extraClrSchemeLst/>
   <a:extLst>
     <a:ext uri="{05A4C25C-085E-4340-85A3-A5531E510DB2}">
-      <thm15:themeFamily xmlns="" xmlns:thm15="http://schemas.microsoft.com/office/thememl/2012/main" name="Office Theme" id="{62F939B6-93AF-4DB8-9C6B-D6C7DFDC589F}" vid="{4A3C46E8-61CC-4603-A589-7422A47A8E4A}"/>
+      <thm15:themeFamily xmlns:thm15="http://schemas.microsoft.com/office/thememl/2012/main" name="Office Theme" id="{62F939B6-93AF-4DB8-9C6B-D6C7DFDC589F}" vid="{4A3C46E8-61CC-4603-A589-7422A47A8E4A}"/>
     </a:ext>
   </a:extLst>
 </a:theme>

--- a/Cauã Reck Mello 1DS.pptx
+++ b/Cauã Reck Mello 1DS.pptx
@@ -3,16 +3,17 @@
 <p:presentation xmlns:a="http://schemas.openxmlformats.org/drawingml/2006/main" xmlns:r="http://schemas.openxmlformats.org/officeDocument/2006/relationships" xmlns:p="http://schemas.openxmlformats.org/presentationml/2006/main" saveSubsetFonts="1" autoCompressPictures="0">
   <p:sldMasterIdLst>
     <p:sldMasterId id="2147483648" r:id="rId1"/>
+    <p:sldMasterId id="2147483658" r:id="rId2"/>
   </p:sldMasterIdLst>
   <p:sldIdLst>
-    <p:sldId id="256" r:id="rId2"/>
-    <p:sldId id="262" r:id="rId3"/>
-    <p:sldId id="266" r:id="rId4"/>
-    <p:sldId id="267" r:id="rId5"/>
-    <p:sldId id="268" r:id="rId6"/>
-    <p:sldId id="269" r:id="rId7"/>
-    <p:sldId id="270" r:id="rId8"/>
-    <p:sldId id="258" r:id="rId9"/>
+    <p:sldId id="256" r:id="rId3"/>
+    <p:sldId id="262" r:id="rId4"/>
+    <p:sldId id="266" r:id="rId5"/>
+    <p:sldId id="267" r:id="rId6"/>
+    <p:sldId id="268" r:id="rId7"/>
+    <p:sldId id="269" r:id="rId8"/>
+    <p:sldId id="270" r:id="rId9"/>
+    <p:sldId id="258" r:id="rId10"/>
   </p:sldIdLst>
   <p:sldSz cx="12192000" cy="6858000"/>
   <p:notesSz cx="6858000" cy="9144000"/>
@@ -220,13 +221,1949 @@
 </p:sldLayout>
 </file>
 
+<file path=ppt/slideLayouts/slideLayout10.xml><?xml version="1.0" encoding="utf-8"?>
+<p:sldLayout xmlns:a="http://schemas.openxmlformats.org/drawingml/2006/main" xmlns:r="http://schemas.openxmlformats.org/officeDocument/2006/relationships" xmlns:p="http://schemas.openxmlformats.org/presentationml/2006/main" type="twoObj" preserve="1">
+  <p:cSld name="Duas Partes de Conteúdo">
+    <p:spTree>
+      <p:nvGrpSpPr>
+        <p:cNvPr id="1" name=""/>
+        <p:cNvGrpSpPr/>
+        <p:nvPr/>
+      </p:nvGrpSpPr>
+      <p:grpSpPr>
+        <a:xfrm>
+          <a:off x="0" y="0"/>
+          <a:ext cx="0" cy="0"/>
+          <a:chOff x="0" y="0"/>
+          <a:chExt cx="0" cy="0"/>
+        </a:xfrm>
+      </p:grpSpPr>
+      <p:sp>
+        <p:nvSpPr>
+          <p:cNvPr id="2" name="Título 1">
+            <a:extLst>
+              <a:ext uri="{FF2B5EF4-FFF2-40B4-BE49-F238E27FC236}">
+                <a16:creationId xmlns:a16="http://schemas.microsoft.com/office/drawing/2014/main" id="{9FA175C5-B658-FD2A-04AA-2BA5AC3C5934}"/>
+              </a:ext>
+            </a:extLst>
+          </p:cNvPr>
+          <p:cNvSpPr>
+            <a:spLocks noGrp="1"/>
+          </p:cNvSpPr>
+          <p:nvPr>
+            <p:ph type="title"/>
+          </p:nvPr>
+        </p:nvSpPr>
+        <p:spPr/>
+        <p:txBody>
+          <a:bodyPr/>
+          <a:lstStyle/>
+          <a:p>
+            <a:r>
+              <a:rPr lang="pt-BR"/>
+              <a:t>Clique para editar o título Mestre</a:t>
+            </a:r>
+          </a:p>
+        </p:txBody>
+      </p:sp>
+      <p:sp>
+        <p:nvSpPr>
+          <p:cNvPr id="3" name="Espaço Reservado para Conteúdo 2">
+            <a:extLst>
+              <a:ext uri="{FF2B5EF4-FFF2-40B4-BE49-F238E27FC236}">
+                <a16:creationId xmlns:a16="http://schemas.microsoft.com/office/drawing/2014/main" id="{3DE40D39-92FC-8C20-7461-C50906E2EEC3}"/>
+              </a:ext>
+            </a:extLst>
+          </p:cNvPr>
+          <p:cNvSpPr>
+            <a:spLocks noGrp="1"/>
+          </p:cNvSpPr>
+          <p:nvPr>
+            <p:ph sz="half" idx="1"/>
+          </p:nvPr>
+        </p:nvSpPr>
+        <p:spPr>
+          <a:xfrm>
+            <a:off x="838200" y="1825625"/>
+            <a:ext cx="5181600" cy="4351338"/>
+          </a:xfrm>
+        </p:spPr>
+        <p:txBody>
+          <a:bodyPr/>
+          <a:lstStyle/>
+          <a:p>
+            <a:pPr lvl="0"/>
+            <a:r>
+              <a:rPr lang="pt-BR"/>
+              <a:t>Clique para editar os estilos de texto Mestres</a:t>
+            </a:r>
+          </a:p>
+          <a:p>
+            <a:pPr lvl="1"/>
+            <a:r>
+              <a:rPr lang="pt-BR"/>
+              <a:t>Segundo nível</a:t>
+            </a:r>
+          </a:p>
+          <a:p>
+            <a:pPr lvl="2"/>
+            <a:r>
+              <a:rPr lang="pt-BR"/>
+              <a:t>Terceiro nível</a:t>
+            </a:r>
+          </a:p>
+          <a:p>
+            <a:pPr lvl="3"/>
+            <a:r>
+              <a:rPr lang="pt-BR"/>
+              <a:t>Quarto nível</a:t>
+            </a:r>
+          </a:p>
+          <a:p>
+            <a:pPr lvl="4"/>
+            <a:r>
+              <a:rPr lang="pt-BR"/>
+              <a:t>Quinto nível</a:t>
+            </a:r>
+          </a:p>
+        </p:txBody>
+      </p:sp>
+      <p:sp>
+        <p:nvSpPr>
+          <p:cNvPr id="4" name="Espaço Reservado para Conteúdo 3">
+            <a:extLst>
+              <a:ext uri="{FF2B5EF4-FFF2-40B4-BE49-F238E27FC236}">
+                <a16:creationId xmlns:a16="http://schemas.microsoft.com/office/drawing/2014/main" id="{C052173D-D334-BB72-1D8B-2C007CC45782}"/>
+              </a:ext>
+            </a:extLst>
+          </p:cNvPr>
+          <p:cNvSpPr>
+            <a:spLocks noGrp="1"/>
+          </p:cNvSpPr>
+          <p:nvPr>
+            <p:ph sz="half" idx="2"/>
+          </p:nvPr>
+        </p:nvSpPr>
+        <p:spPr>
+          <a:xfrm>
+            <a:off x="6172200" y="1825625"/>
+            <a:ext cx="5181600" cy="4351338"/>
+          </a:xfrm>
+        </p:spPr>
+        <p:txBody>
+          <a:bodyPr/>
+          <a:lstStyle/>
+          <a:p>
+            <a:pPr lvl="0"/>
+            <a:r>
+              <a:rPr lang="pt-BR"/>
+              <a:t>Clique para editar os estilos de texto Mestres</a:t>
+            </a:r>
+          </a:p>
+          <a:p>
+            <a:pPr lvl="1"/>
+            <a:r>
+              <a:rPr lang="pt-BR"/>
+              <a:t>Segundo nível</a:t>
+            </a:r>
+          </a:p>
+          <a:p>
+            <a:pPr lvl="2"/>
+            <a:r>
+              <a:rPr lang="pt-BR"/>
+              <a:t>Terceiro nível</a:t>
+            </a:r>
+          </a:p>
+          <a:p>
+            <a:pPr lvl="3"/>
+            <a:r>
+              <a:rPr lang="pt-BR"/>
+              <a:t>Quarto nível</a:t>
+            </a:r>
+          </a:p>
+          <a:p>
+            <a:pPr lvl="4"/>
+            <a:r>
+              <a:rPr lang="pt-BR"/>
+              <a:t>Quinto nível</a:t>
+            </a:r>
+          </a:p>
+        </p:txBody>
+      </p:sp>
+      <p:sp>
+        <p:nvSpPr>
+          <p:cNvPr id="5" name="Espaço Reservado para Data 4">
+            <a:extLst>
+              <a:ext uri="{FF2B5EF4-FFF2-40B4-BE49-F238E27FC236}">
+                <a16:creationId xmlns:a16="http://schemas.microsoft.com/office/drawing/2014/main" id="{8601A88C-5ADE-B608-C877-D1E769E60E2B}"/>
+              </a:ext>
+            </a:extLst>
+          </p:cNvPr>
+          <p:cNvSpPr>
+            <a:spLocks noGrp="1"/>
+          </p:cNvSpPr>
+          <p:nvPr>
+            <p:ph type="dt" sz="half" idx="10"/>
+          </p:nvPr>
+        </p:nvSpPr>
+        <p:spPr/>
+        <p:txBody>
+          <a:bodyPr/>
+          <a:lstStyle/>
+          <a:p>
+            <a:fld id="{D6507521-8C51-4813-BF91-ED62A8AF3277}" type="datetimeFigureOut">
+              <a:rPr lang="pt-BR" smtClean="0"/>
+              <a:t>24/04/2026</a:t>
+            </a:fld>
+            <a:endParaRPr lang="pt-BR"/>
+          </a:p>
+        </p:txBody>
+      </p:sp>
+      <p:sp>
+        <p:nvSpPr>
+          <p:cNvPr id="6" name="Espaço Reservado para Rodapé 5">
+            <a:extLst>
+              <a:ext uri="{FF2B5EF4-FFF2-40B4-BE49-F238E27FC236}">
+                <a16:creationId xmlns:a16="http://schemas.microsoft.com/office/drawing/2014/main" id="{3CA726A8-AD99-6791-72E3-3A4F4D749C85}"/>
+              </a:ext>
+            </a:extLst>
+          </p:cNvPr>
+          <p:cNvSpPr>
+            <a:spLocks noGrp="1"/>
+          </p:cNvSpPr>
+          <p:nvPr>
+            <p:ph type="ftr" sz="quarter" idx="11"/>
+          </p:nvPr>
+        </p:nvSpPr>
+        <p:spPr/>
+        <p:txBody>
+          <a:bodyPr/>
+          <a:lstStyle/>
+          <a:p>
+            <a:endParaRPr lang="pt-BR"/>
+          </a:p>
+        </p:txBody>
+      </p:sp>
+      <p:sp>
+        <p:nvSpPr>
+          <p:cNvPr id="7" name="Espaço Reservado para Número de Slide 6">
+            <a:extLst>
+              <a:ext uri="{FF2B5EF4-FFF2-40B4-BE49-F238E27FC236}">
+                <a16:creationId xmlns:a16="http://schemas.microsoft.com/office/drawing/2014/main" id="{68D34FF5-D938-D72A-B529-0D21F6AD5C21}"/>
+              </a:ext>
+            </a:extLst>
+          </p:cNvPr>
+          <p:cNvSpPr>
+            <a:spLocks noGrp="1"/>
+          </p:cNvSpPr>
+          <p:nvPr>
+            <p:ph type="sldNum" sz="quarter" idx="12"/>
+          </p:nvPr>
+        </p:nvSpPr>
+        <p:spPr/>
+        <p:txBody>
+          <a:bodyPr/>
+          <a:lstStyle/>
+          <a:p>
+            <a:fld id="{2E4A13C5-F07B-482F-913C-E6F34CF189C3}" type="slidenum">
+              <a:rPr lang="pt-BR" smtClean="0"/>
+              <a:t>‹nº›</a:t>
+            </a:fld>
+            <a:endParaRPr lang="pt-BR"/>
+          </a:p>
+        </p:txBody>
+      </p:sp>
+    </p:spTree>
+    <p:extLst>
+      <p:ext uri="{BB962C8B-B14F-4D97-AF65-F5344CB8AC3E}">
+        <p14:creationId xmlns:p14="http://schemas.microsoft.com/office/powerpoint/2010/main" val="1474491775"/>
+      </p:ext>
+    </p:extLst>
+  </p:cSld>
+  <p:clrMapOvr>
+    <a:masterClrMapping/>
+  </p:clrMapOvr>
+</p:sldLayout>
+</file>
+
+<file path=ppt/slideLayouts/slideLayout11.xml><?xml version="1.0" encoding="utf-8"?>
+<p:sldLayout xmlns:a="http://schemas.openxmlformats.org/drawingml/2006/main" xmlns:r="http://schemas.openxmlformats.org/officeDocument/2006/relationships" xmlns:p="http://schemas.openxmlformats.org/presentationml/2006/main" type="twoTxTwoObj" preserve="1">
+  <p:cSld name="Comparação">
+    <p:spTree>
+      <p:nvGrpSpPr>
+        <p:cNvPr id="1" name=""/>
+        <p:cNvGrpSpPr/>
+        <p:nvPr/>
+      </p:nvGrpSpPr>
+      <p:grpSpPr>
+        <a:xfrm>
+          <a:off x="0" y="0"/>
+          <a:ext cx="0" cy="0"/>
+          <a:chOff x="0" y="0"/>
+          <a:chExt cx="0" cy="0"/>
+        </a:xfrm>
+      </p:grpSpPr>
+      <p:sp>
+        <p:nvSpPr>
+          <p:cNvPr id="2" name="Título 1">
+            <a:extLst>
+              <a:ext uri="{FF2B5EF4-FFF2-40B4-BE49-F238E27FC236}">
+                <a16:creationId xmlns:a16="http://schemas.microsoft.com/office/drawing/2014/main" id="{86CAE894-00CD-8C77-D68E-E9DAF7E637E5}"/>
+              </a:ext>
+            </a:extLst>
+          </p:cNvPr>
+          <p:cNvSpPr>
+            <a:spLocks noGrp="1"/>
+          </p:cNvSpPr>
+          <p:nvPr>
+            <p:ph type="title"/>
+          </p:nvPr>
+        </p:nvSpPr>
+        <p:spPr>
+          <a:xfrm>
+            <a:off x="839788" y="365125"/>
+            <a:ext cx="10515600" cy="1325563"/>
+          </a:xfrm>
+        </p:spPr>
+        <p:txBody>
+          <a:bodyPr/>
+          <a:lstStyle/>
+          <a:p>
+            <a:r>
+              <a:rPr lang="pt-BR"/>
+              <a:t>Clique para editar o título Mestre</a:t>
+            </a:r>
+          </a:p>
+        </p:txBody>
+      </p:sp>
+      <p:sp>
+        <p:nvSpPr>
+          <p:cNvPr id="3" name="Espaço Reservado para Texto 2">
+            <a:extLst>
+              <a:ext uri="{FF2B5EF4-FFF2-40B4-BE49-F238E27FC236}">
+                <a16:creationId xmlns:a16="http://schemas.microsoft.com/office/drawing/2014/main" id="{0BF5326D-AADA-07DC-3DB3-CE1F0826F099}"/>
+              </a:ext>
+            </a:extLst>
+          </p:cNvPr>
+          <p:cNvSpPr>
+            <a:spLocks noGrp="1"/>
+          </p:cNvSpPr>
+          <p:nvPr>
+            <p:ph type="body" idx="1"/>
+          </p:nvPr>
+        </p:nvSpPr>
+        <p:spPr>
+          <a:xfrm>
+            <a:off x="839788" y="1681163"/>
+            <a:ext cx="5157787" cy="823912"/>
+          </a:xfrm>
+        </p:spPr>
+        <p:txBody>
+          <a:bodyPr anchor="b"/>
+          <a:lstStyle>
+            <a:lvl1pPr marL="0" indent="0">
+              <a:buNone/>
+              <a:defRPr sz="2400" b="1"/>
+            </a:lvl1pPr>
+            <a:lvl2pPr marL="457200" indent="0">
+              <a:buNone/>
+              <a:defRPr sz="2000" b="1"/>
+            </a:lvl2pPr>
+            <a:lvl3pPr marL="914400" indent="0">
+              <a:buNone/>
+              <a:defRPr sz="1800" b="1"/>
+            </a:lvl3pPr>
+            <a:lvl4pPr marL="1371600" indent="0">
+              <a:buNone/>
+              <a:defRPr sz="1600" b="1"/>
+            </a:lvl4pPr>
+            <a:lvl5pPr marL="1828800" indent="0">
+              <a:buNone/>
+              <a:defRPr sz="1600" b="1"/>
+            </a:lvl5pPr>
+            <a:lvl6pPr marL="2286000" indent="0">
+              <a:buNone/>
+              <a:defRPr sz="1600" b="1"/>
+            </a:lvl6pPr>
+            <a:lvl7pPr marL="2743200" indent="0">
+              <a:buNone/>
+              <a:defRPr sz="1600" b="1"/>
+            </a:lvl7pPr>
+            <a:lvl8pPr marL="3200400" indent="0">
+              <a:buNone/>
+              <a:defRPr sz="1600" b="1"/>
+            </a:lvl8pPr>
+            <a:lvl9pPr marL="3657600" indent="0">
+              <a:buNone/>
+              <a:defRPr sz="1600" b="1"/>
+            </a:lvl9pPr>
+          </a:lstStyle>
+          <a:p>
+            <a:pPr lvl="0"/>
+            <a:r>
+              <a:rPr lang="pt-BR"/>
+              <a:t>Clique para editar os estilos de texto Mestres</a:t>
+            </a:r>
+          </a:p>
+        </p:txBody>
+      </p:sp>
+      <p:sp>
+        <p:nvSpPr>
+          <p:cNvPr id="4" name="Espaço Reservado para Conteúdo 3">
+            <a:extLst>
+              <a:ext uri="{FF2B5EF4-FFF2-40B4-BE49-F238E27FC236}">
+                <a16:creationId xmlns:a16="http://schemas.microsoft.com/office/drawing/2014/main" id="{590DD032-856F-A3D0-B576-263E361672CA}"/>
+              </a:ext>
+            </a:extLst>
+          </p:cNvPr>
+          <p:cNvSpPr>
+            <a:spLocks noGrp="1"/>
+          </p:cNvSpPr>
+          <p:nvPr>
+            <p:ph sz="half" idx="2"/>
+          </p:nvPr>
+        </p:nvSpPr>
+        <p:spPr>
+          <a:xfrm>
+            <a:off x="839788" y="2505075"/>
+            <a:ext cx="5157787" cy="3684588"/>
+          </a:xfrm>
+        </p:spPr>
+        <p:txBody>
+          <a:bodyPr/>
+          <a:lstStyle/>
+          <a:p>
+            <a:pPr lvl="0"/>
+            <a:r>
+              <a:rPr lang="pt-BR"/>
+              <a:t>Clique para editar os estilos de texto Mestres</a:t>
+            </a:r>
+          </a:p>
+          <a:p>
+            <a:pPr lvl="1"/>
+            <a:r>
+              <a:rPr lang="pt-BR"/>
+              <a:t>Segundo nível</a:t>
+            </a:r>
+          </a:p>
+          <a:p>
+            <a:pPr lvl="2"/>
+            <a:r>
+              <a:rPr lang="pt-BR"/>
+              <a:t>Terceiro nível</a:t>
+            </a:r>
+          </a:p>
+          <a:p>
+            <a:pPr lvl="3"/>
+            <a:r>
+              <a:rPr lang="pt-BR"/>
+              <a:t>Quarto nível</a:t>
+            </a:r>
+          </a:p>
+          <a:p>
+            <a:pPr lvl="4"/>
+            <a:r>
+              <a:rPr lang="pt-BR"/>
+              <a:t>Quinto nível</a:t>
+            </a:r>
+          </a:p>
+        </p:txBody>
+      </p:sp>
+      <p:sp>
+        <p:nvSpPr>
+          <p:cNvPr id="5" name="Espaço Reservado para Texto 4">
+            <a:extLst>
+              <a:ext uri="{FF2B5EF4-FFF2-40B4-BE49-F238E27FC236}">
+                <a16:creationId xmlns:a16="http://schemas.microsoft.com/office/drawing/2014/main" id="{450C5C19-93E0-182F-ADCC-3BC2AAD2DEB4}"/>
+              </a:ext>
+            </a:extLst>
+          </p:cNvPr>
+          <p:cNvSpPr>
+            <a:spLocks noGrp="1"/>
+          </p:cNvSpPr>
+          <p:nvPr>
+            <p:ph type="body" sz="quarter" idx="3"/>
+          </p:nvPr>
+        </p:nvSpPr>
+        <p:spPr>
+          <a:xfrm>
+            <a:off x="6172200" y="1681163"/>
+            <a:ext cx="5183188" cy="823912"/>
+          </a:xfrm>
+        </p:spPr>
+        <p:txBody>
+          <a:bodyPr anchor="b"/>
+          <a:lstStyle>
+            <a:lvl1pPr marL="0" indent="0">
+              <a:buNone/>
+              <a:defRPr sz="2400" b="1"/>
+            </a:lvl1pPr>
+            <a:lvl2pPr marL="457200" indent="0">
+              <a:buNone/>
+              <a:defRPr sz="2000" b="1"/>
+            </a:lvl2pPr>
+            <a:lvl3pPr marL="914400" indent="0">
+              <a:buNone/>
+              <a:defRPr sz="1800" b="1"/>
+            </a:lvl3pPr>
+            <a:lvl4pPr marL="1371600" indent="0">
+              <a:buNone/>
+              <a:defRPr sz="1600" b="1"/>
+            </a:lvl4pPr>
+            <a:lvl5pPr marL="1828800" indent="0">
+              <a:buNone/>
+              <a:defRPr sz="1600" b="1"/>
+            </a:lvl5pPr>
+            <a:lvl6pPr marL="2286000" indent="0">
+              <a:buNone/>
+              <a:defRPr sz="1600" b="1"/>
+            </a:lvl6pPr>
+            <a:lvl7pPr marL="2743200" indent="0">
+              <a:buNone/>
+              <a:defRPr sz="1600" b="1"/>
+            </a:lvl7pPr>
+            <a:lvl8pPr marL="3200400" indent="0">
+              <a:buNone/>
+              <a:defRPr sz="1600" b="1"/>
+            </a:lvl8pPr>
+            <a:lvl9pPr marL="3657600" indent="0">
+              <a:buNone/>
+              <a:defRPr sz="1600" b="1"/>
+            </a:lvl9pPr>
+          </a:lstStyle>
+          <a:p>
+            <a:pPr lvl="0"/>
+            <a:r>
+              <a:rPr lang="pt-BR"/>
+              <a:t>Clique para editar os estilos de texto Mestres</a:t>
+            </a:r>
+          </a:p>
+        </p:txBody>
+      </p:sp>
+      <p:sp>
+        <p:nvSpPr>
+          <p:cNvPr id="6" name="Espaço Reservado para Conteúdo 5">
+            <a:extLst>
+              <a:ext uri="{FF2B5EF4-FFF2-40B4-BE49-F238E27FC236}">
+                <a16:creationId xmlns:a16="http://schemas.microsoft.com/office/drawing/2014/main" id="{193B2CBE-62EB-AF20-3201-B5B33C694BB3}"/>
+              </a:ext>
+            </a:extLst>
+          </p:cNvPr>
+          <p:cNvSpPr>
+            <a:spLocks noGrp="1"/>
+          </p:cNvSpPr>
+          <p:nvPr>
+            <p:ph sz="quarter" idx="4"/>
+          </p:nvPr>
+        </p:nvSpPr>
+        <p:spPr>
+          <a:xfrm>
+            <a:off x="6172200" y="2505075"/>
+            <a:ext cx="5183188" cy="3684588"/>
+          </a:xfrm>
+        </p:spPr>
+        <p:txBody>
+          <a:bodyPr/>
+          <a:lstStyle/>
+          <a:p>
+            <a:pPr lvl="0"/>
+            <a:r>
+              <a:rPr lang="pt-BR"/>
+              <a:t>Clique para editar os estilos de texto Mestres</a:t>
+            </a:r>
+          </a:p>
+          <a:p>
+            <a:pPr lvl="1"/>
+            <a:r>
+              <a:rPr lang="pt-BR"/>
+              <a:t>Segundo nível</a:t>
+            </a:r>
+          </a:p>
+          <a:p>
+            <a:pPr lvl="2"/>
+            <a:r>
+              <a:rPr lang="pt-BR"/>
+              <a:t>Terceiro nível</a:t>
+            </a:r>
+          </a:p>
+          <a:p>
+            <a:pPr lvl="3"/>
+            <a:r>
+              <a:rPr lang="pt-BR"/>
+              <a:t>Quarto nível</a:t>
+            </a:r>
+          </a:p>
+          <a:p>
+            <a:pPr lvl="4"/>
+            <a:r>
+              <a:rPr lang="pt-BR"/>
+              <a:t>Quinto nível</a:t>
+            </a:r>
+          </a:p>
+        </p:txBody>
+      </p:sp>
+      <p:sp>
+        <p:nvSpPr>
+          <p:cNvPr id="7" name="Espaço Reservado para Data 6">
+            <a:extLst>
+              <a:ext uri="{FF2B5EF4-FFF2-40B4-BE49-F238E27FC236}">
+                <a16:creationId xmlns:a16="http://schemas.microsoft.com/office/drawing/2014/main" id="{68C52885-8346-A889-F9D5-E3D2A1D9BEF9}"/>
+              </a:ext>
+            </a:extLst>
+          </p:cNvPr>
+          <p:cNvSpPr>
+            <a:spLocks noGrp="1"/>
+          </p:cNvSpPr>
+          <p:nvPr>
+            <p:ph type="dt" sz="half" idx="10"/>
+          </p:nvPr>
+        </p:nvSpPr>
+        <p:spPr/>
+        <p:txBody>
+          <a:bodyPr/>
+          <a:lstStyle/>
+          <a:p>
+            <a:fld id="{D6507521-8C51-4813-BF91-ED62A8AF3277}" type="datetimeFigureOut">
+              <a:rPr lang="pt-BR" smtClean="0"/>
+              <a:t>24/04/2026</a:t>
+            </a:fld>
+            <a:endParaRPr lang="pt-BR"/>
+          </a:p>
+        </p:txBody>
+      </p:sp>
+      <p:sp>
+        <p:nvSpPr>
+          <p:cNvPr id="8" name="Espaço Reservado para Rodapé 7">
+            <a:extLst>
+              <a:ext uri="{FF2B5EF4-FFF2-40B4-BE49-F238E27FC236}">
+                <a16:creationId xmlns:a16="http://schemas.microsoft.com/office/drawing/2014/main" id="{121DB69A-0C63-0FC0-AC49-7BD0C4D26FC2}"/>
+              </a:ext>
+            </a:extLst>
+          </p:cNvPr>
+          <p:cNvSpPr>
+            <a:spLocks noGrp="1"/>
+          </p:cNvSpPr>
+          <p:nvPr>
+            <p:ph type="ftr" sz="quarter" idx="11"/>
+          </p:nvPr>
+        </p:nvSpPr>
+        <p:spPr/>
+        <p:txBody>
+          <a:bodyPr/>
+          <a:lstStyle/>
+          <a:p>
+            <a:endParaRPr lang="pt-BR"/>
+          </a:p>
+        </p:txBody>
+      </p:sp>
+      <p:sp>
+        <p:nvSpPr>
+          <p:cNvPr id="9" name="Espaço Reservado para Número de Slide 8">
+            <a:extLst>
+              <a:ext uri="{FF2B5EF4-FFF2-40B4-BE49-F238E27FC236}">
+                <a16:creationId xmlns:a16="http://schemas.microsoft.com/office/drawing/2014/main" id="{D2C9F7D8-A6A5-7D07-4850-DBF8A806AE80}"/>
+              </a:ext>
+            </a:extLst>
+          </p:cNvPr>
+          <p:cNvSpPr>
+            <a:spLocks noGrp="1"/>
+          </p:cNvSpPr>
+          <p:nvPr>
+            <p:ph type="sldNum" sz="quarter" idx="12"/>
+          </p:nvPr>
+        </p:nvSpPr>
+        <p:spPr/>
+        <p:txBody>
+          <a:bodyPr/>
+          <a:lstStyle/>
+          <a:p>
+            <a:fld id="{2E4A13C5-F07B-482F-913C-E6F34CF189C3}" type="slidenum">
+              <a:rPr lang="pt-BR" smtClean="0"/>
+              <a:t>‹nº›</a:t>
+            </a:fld>
+            <a:endParaRPr lang="pt-BR"/>
+          </a:p>
+        </p:txBody>
+      </p:sp>
+    </p:spTree>
+    <p:extLst>
+      <p:ext uri="{BB962C8B-B14F-4D97-AF65-F5344CB8AC3E}">
+        <p14:creationId xmlns:p14="http://schemas.microsoft.com/office/powerpoint/2010/main" val="3218752677"/>
+      </p:ext>
+    </p:extLst>
+  </p:cSld>
+  <p:clrMapOvr>
+    <a:masterClrMapping/>
+  </p:clrMapOvr>
+</p:sldLayout>
+</file>
+
+<file path=ppt/slideLayouts/slideLayout12.xml><?xml version="1.0" encoding="utf-8"?>
+<p:sldLayout xmlns:a="http://schemas.openxmlformats.org/drawingml/2006/main" xmlns:r="http://schemas.openxmlformats.org/officeDocument/2006/relationships" xmlns:p="http://schemas.openxmlformats.org/presentationml/2006/main" type="titleOnly" preserve="1">
+  <p:cSld name="Somente Título">
+    <p:spTree>
+      <p:nvGrpSpPr>
+        <p:cNvPr id="1" name=""/>
+        <p:cNvGrpSpPr/>
+        <p:nvPr/>
+      </p:nvGrpSpPr>
+      <p:grpSpPr>
+        <a:xfrm>
+          <a:off x="0" y="0"/>
+          <a:ext cx="0" cy="0"/>
+          <a:chOff x="0" y="0"/>
+          <a:chExt cx="0" cy="0"/>
+        </a:xfrm>
+      </p:grpSpPr>
+      <p:sp>
+        <p:nvSpPr>
+          <p:cNvPr id="2" name="Título 1">
+            <a:extLst>
+              <a:ext uri="{FF2B5EF4-FFF2-40B4-BE49-F238E27FC236}">
+                <a16:creationId xmlns:a16="http://schemas.microsoft.com/office/drawing/2014/main" id="{A9F438E3-D300-871B-8177-585A8DA8CD5E}"/>
+              </a:ext>
+            </a:extLst>
+          </p:cNvPr>
+          <p:cNvSpPr>
+            <a:spLocks noGrp="1"/>
+          </p:cNvSpPr>
+          <p:nvPr>
+            <p:ph type="title"/>
+          </p:nvPr>
+        </p:nvSpPr>
+        <p:spPr/>
+        <p:txBody>
+          <a:bodyPr/>
+          <a:lstStyle/>
+          <a:p>
+            <a:r>
+              <a:rPr lang="pt-BR"/>
+              <a:t>Clique para editar o título Mestre</a:t>
+            </a:r>
+          </a:p>
+        </p:txBody>
+      </p:sp>
+      <p:sp>
+        <p:nvSpPr>
+          <p:cNvPr id="3" name="Espaço Reservado para Data 2">
+            <a:extLst>
+              <a:ext uri="{FF2B5EF4-FFF2-40B4-BE49-F238E27FC236}">
+                <a16:creationId xmlns:a16="http://schemas.microsoft.com/office/drawing/2014/main" id="{259A6547-E984-13E8-20BE-19851830F7DA}"/>
+              </a:ext>
+            </a:extLst>
+          </p:cNvPr>
+          <p:cNvSpPr>
+            <a:spLocks noGrp="1"/>
+          </p:cNvSpPr>
+          <p:nvPr>
+            <p:ph type="dt" sz="half" idx="10"/>
+          </p:nvPr>
+        </p:nvSpPr>
+        <p:spPr/>
+        <p:txBody>
+          <a:bodyPr/>
+          <a:lstStyle/>
+          <a:p>
+            <a:fld id="{D6507521-8C51-4813-BF91-ED62A8AF3277}" type="datetimeFigureOut">
+              <a:rPr lang="pt-BR" smtClean="0"/>
+              <a:t>24/04/2026</a:t>
+            </a:fld>
+            <a:endParaRPr lang="pt-BR"/>
+          </a:p>
+        </p:txBody>
+      </p:sp>
+      <p:sp>
+        <p:nvSpPr>
+          <p:cNvPr id="4" name="Espaço Reservado para Rodapé 3">
+            <a:extLst>
+              <a:ext uri="{FF2B5EF4-FFF2-40B4-BE49-F238E27FC236}">
+                <a16:creationId xmlns:a16="http://schemas.microsoft.com/office/drawing/2014/main" id="{E416B89F-7168-E63F-7888-2AF419B23F55}"/>
+              </a:ext>
+            </a:extLst>
+          </p:cNvPr>
+          <p:cNvSpPr>
+            <a:spLocks noGrp="1"/>
+          </p:cNvSpPr>
+          <p:nvPr>
+            <p:ph type="ftr" sz="quarter" idx="11"/>
+          </p:nvPr>
+        </p:nvSpPr>
+        <p:spPr/>
+        <p:txBody>
+          <a:bodyPr/>
+          <a:lstStyle/>
+          <a:p>
+            <a:endParaRPr lang="pt-BR"/>
+          </a:p>
+        </p:txBody>
+      </p:sp>
+      <p:sp>
+        <p:nvSpPr>
+          <p:cNvPr id="5" name="Espaço Reservado para Número de Slide 4">
+            <a:extLst>
+              <a:ext uri="{FF2B5EF4-FFF2-40B4-BE49-F238E27FC236}">
+                <a16:creationId xmlns:a16="http://schemas.microsoft.com/office/drawing/2014/main" id="{947F0AB4-012E-25AA-7157-7D4C838A22DE}"/>
+              </a:ext>
+            </a:extLst>
+          </p:cNvPr>
+          <p:cNvSpPr>
+            <a:spLocks noGrp="1"/>
+          </p:cNvSpPr>
+          <p:nvPr>
+            <p:ph type="sldNum" sz="quarter" idx="12"/>
+          </p:nvPr>
+        </p:nvSpPr>
+        <p:spPr/>
+        <p:txBody>
+          <a:bodyPr/>
+          <a:lstStyle/>
+          <a:p>
+            <a:fld id="{2E4A13C5-F07B-482F-913C-E6F34CF189C3}" type="slidenum">
+              <a:rPr lang="pt-BR" smtClean="0"/>
+              <a:t>‹nº›</a:t>
+            </a:fld>
+            <a:endParaRPr lang="pt-BR"/>
+          </a:p>
+        </p:txBody>
+      </p:sp>
+    </p:spTree>
+    <p:extLst>
+      <p:ext uri="{BB962C8B-B14F-4D97-AF65-F5344CB8AC3E}">
+        <p14:creationId xmlns:p14="http://schemas.microsoft.com/office/powerpoint/2010/main" val="3108021292"/>
+      </p:ext>
+    </p:extLst>
+  </p:cSld>
+  <p:clrMapOvr>
+    <a:masterClrMapping/>
+  </p:clrMapOvr>
+</p:sldLayout>
+</file>
+
+<file path=ppt/slideLayouts/slideLayout13.xml><?xml version="1.0" encoding="utf-8"?>
+<p:sldLayout xmlns:a="http://schemas.openxmlformats.org/drawingml/2006/main" xmlns:r="http://schemas.openxmlformats.org/officeDocument/2006/relationships" xmlns:p="http://schemas.openxmlformats.org/presentationml/2006/main" type="blank" preserve="1">
+  <p:cSld name="Em Branco">
+    <p:spTree>
+      <p:nvGrpSpPr>
+        <p:cNvPr id="1" name=""/>
+        <p:cNvGrpSpPr/>
+        <p:nvPr/>
+      </p:nvGrpSpPr>
+      <p:grpSpPr>
+        <a:xfrm>
+          <a:off x="0" y="0"/>
+          <a:ext cx="0" cy="0"/>
+          <a:chOff x="0" y="0"/>
+          <a:chExt cx="0" cy="0"/>
+        </a:xfrm>
+      </p:grpSpPr>
+      <p:sp>
+        <p:nvSpPr>
+          <p:cNvPr id="2" name="Espaço Reservado para Data 1">
+            <a:extLst>
+              <a:ext uri="{FF2B5EF4-FFF2-40B4-BE49-F238E27FC236}">
+                <a16:creationId xmlns:a16="http://schemas.microsoft.com/office/drawing/2014/main" id="{11D00156-4B7C-2E3D-81EB-3494244744BD}"/>
+              </a:ext>
+            </a:extLst>
+          </p:cNvPr>
+          <p:cNvSpPr>
+            <a:spLocks noGrp="1"/>
+          </p:cNvSpPr>
+          <p:nvPr>
+            <p:ph type="dt" sz="half" idx="10"/>
+          </p:nvPr>
+        </p:nvSpPr>
+        <p:spPr/>
+        <p:txBody>
+          <a:bodyPr/>
+          <a:lstStyle/>
+          <a:p>
+            <a:fld id="{D6507521-8C51-4813-BF91-ED62A8AF3277}" type="datetimeFigureOut">
+              <a:rPr lang="pt-BR" smtClean="0"/>
+              <a:t>24/04/2026</a:t>
+            </a:fld>
+            <a:endParaRPr lang="pt-BR"/>
+          </a:p>
+        </p:txBody>
+      </p:sp>
+      <p:sp>
+        <p:nvSpPr>
+          <p:cNvPr id="3" name="Espaço Reservado para Rodapé 2">
+            <a:extLst>
+              <a:ext uri="{FF2B5EF4-FFF2-40B4-BE49-F238E27FC236}">
+                <a16:creationId xmlns:a16="http://schemas.microsoft.com/office/drawing/2014/main" id="{CA308730-C701-5D31-B66F-2CDBBC403789}"/>
+              </a:ext>
+            </a:extLst>
+          </p:cNvPr>
+          <p:cNvSpPr>
+            <a:spLocks noGrp="1"/>
+          </p:cNvSpPr>
+          <p:nvPr>
+            <p:ph type="ftr" sz="quarter" idx="11"/>
+          </p:nvPr>
+        </p:nvSpPr>
+        <p:spPr/>
+        <p:txBody>
+          <a:bodyPr/>
+          <a:lstStyle/>
+          <a:p>
+            <a:endParaRPr lang="pt-BR"/>
+          </a:p>
+        </p:txBody>
+      </p:sp>
+      <p:sp>
+        <p:nvSpPr>
+          <p:cNvPr id="4" name="Espaço Reservado para Número de Slide 3">
+            <a:extLst>
+              <a:ext uri="{FF2B5EF4-FFF2-40B4-BE49-F238E27FC236}">
+                <a16:creationId xmlns:a16="http://schemas.microsoft.com/office/drawing/2014/main" id="{4FD6B5BA-AEE2-035D-E227-ECFC0D6B8F61}"/>
+              </a:ext>
+            </a:extLst>
+          </p:cNvPr>
+          <p:cNvSpPr>
+            <a:spLocks noGrp="1"/>
+          </p:cNvSpPr>
+          <p:nvPr>
+            <p:ph type="sldNum" sz="quarter" idx="12"/>
+          </p:nvPr>
+        </p:nvSpPr>
+        <p:spPr/>
+        <p:txBody>
+          <a:bodyPr/>
+          <a:lstStyle/>
+          <a:p>
+            <a:fld id="{2E4A13C5-F07B-482F-913C-E6F34CF189C3}" type="slidenum">
+              <a:rPr lang="pt-BR" smtClean="0"/>
+              <a:t>‹nº›</a:t>
+            </a:fld>
+            <a:endParaRPr lang="pt-BR"/>
+          </a:p>
+        </p:txBody>
+      </p:sp>
+    </p:spTree>
+    <p:extLst>
+      <p:ext uri="{BB962C8B-B14F-4D97-AF65-F5344CB8AC3E}">
+        <p14:creationId xmlns:p14="http://schemas.microsoft.com/office/powerpoint/2010/main" val="1899460768"/>
+      </p:ext>
+    </p:extLst>
+  </p:cSld>
+  <p:clrMapOvr>
+    <a:masterClrMapping/>
+  </p:clrMapOvr>
+</p:sldLayout>
+</file>
+
+<file path=ppt/slideLayouts/slideLayout14.xml><?xml version="1.0" encoding="utf-8"?>
+<p:sldLayout xmlns:a="http://schemas.openxmlformats.org/drawingml/2006/main" xmlns:r="http://schemas.openxmlformats.org/officeDocument/2006/relationships" xmlns:p="http://schemas.openxmlformats.org/presentationml/2006/main" type="objTx" preserve="1">
+  <p:cSld name="Conteúdo com Legenda">
+    <p:spTree>
+      <p:nvGrpSpPr>
+        <p:cNvPr id="1" name=""/>
+        <p:cNvGrpSpPr/>
+        <p:nvPr/>
+      </p:nvGrpSpPr>
+      <p:grpSpPr>
+        <a:xfrm>
+          <a:off x="0" y="0"/>
+          <a:ext cx="0" cy="0"/>
+          <a:chOff x="0" y="0"/>
+          <a:chExt cx="0" cy="0"/>
+        </a:xfrm>
+      </p:grpSpPr>
+      <p:sp>
+        <p:nvSpPr>
+          <p:cNvPr id="2" name="Título 1">
+            <a:extLst>
+              <a:ext uri="{FF2B5EF4-FFF2-40B4-BE49-F238E27FC236}">
+                <a16:creationId xmlns:a16="http://schemas.microsoft.com/office/drawing/2014/main" id="{D9A571C9-F52A-5A61-0527-9ECDB726B0A4}"/>
+              </a:ext>
+            </a:extLst>
+          </p:cNvPr>
+          <p:cNvSpPr>
+            <a:spLocks noGrp="1"/>
+          </p:cNvSpPr>
+          <p:nvPr>
+            <p:ph type="title"/>
+          </p:nvPr>
+        </p:nvSpPr>
+        <p:spPr>
+          <a:xfrm>
+            <a:off x="839788" y="457200"/>
+            <a:ext cx="3932237" cy="1600200"/>
+          </a:xfrm>
+        </p:spPr>
+        <p:txBody>
+          <a:bodyPr anchor="b"/>
+          <a:lstStyle>
+            <a:lvl1pPr>
+              <a:defRPr sz="3200"/>
+            </a:lvl1pPr>
+          </a:lstStyle>
+          <a:p>
+            <a:r>
+              <a:rPr lang="pt-BR"/>
+              <a:t>Clique para editar o título Mestre</a:t>
+            </a:r>
+          </a:p>
+        </p:txBody>
+      </p:sp>
+      <p:sp>
+        <p:nvSpPr>
+          <p:cNvPr id="3" name="Espaço Reservado para Conteúdo 2">
+            <a:extLst>
+              <a:ext uri="{FF2B5EF4-FFF2-40B4-BE49-F238E27FC236}">
+                <a16:creationId xmlns:a16="http://schemas.microsoft.com/office/drawing/2014/main" id="{5DCFBD18-0950-F366-646F-108BDFD77513}"/>
+              </a:ext>
+            </a:extLst>
+          </p:cNvPr>
+          <p:cNvSpPr>
+            <a:spLocks noGrp="1"/>
+          </p:cNvSpPr>
+          <p:nvPr>
+            <p:ph idx="1"/>
+          </p:nvPr>
+        </p:nvSpPr>
+        <p:spPr>
+          <a:xfrm>
+            <a:off x="5183188" y="987425"/>
+            <a:ext cx="6172200" cy="4873625"/>
+          </a:xfrm>
+        </p:spPr>
+        <p:txBody>
+          <a:bodyPr/>
+          <a:lstStyle>
+            <a:lvl1pPr>
+              <a:defRPr sz="3200"/>
+            </a:lvl1pPr>
+            <a:lvl2pPr>
+              <a:defRPr sz="2800"/>
+            </a:lvl2pPr>
+            <a:lvl3pPr>
+              <a:defRPr sz="2400"/>
+            </a:lvl3pPr>
+            <a:lvl4pPr>
+              <a:defRPr sz="2000"/>
+            </a:lvl4pPr>
+            <a:lvl5pPr>
+              <a:defRPr sz="2000"/>
+            </a:lvl5pPr>
+            <a:lvl6pPr>
+              <a:defRPr sz="2000"/>
+            </a:lvl6pPr>
+            <a:lvl7pPr>
+              <a:defRPr sz="2000"/>
+            </a:lvl7pPr>
+            <a:lvl8pPr>
+              <a:defRPr sz="2000"/>
+            </a:lvl8pPr>
+            <a:lvl9pPr>
+              <a:defRPr sz="2000"/>
+            </a:lvl9pPr>
+          </a:lstStyle>
+          <a:p>
+            <a:pPr lvl="0"/>
+            <a:r>
+              <a:rPr lang="pt-BR"/>
+              <a:t>Clique para editar os estilos de texto Mestres</a:t>
+            </a:r>
+          </a:p>
+          <a:p>
+            <a:pPr lvl="1"/>
+            <a:r>
+              <a:rPr lang="pt-BR"/>
+              <a:t>Segundo nível</a:t>
+            </a:r>
+          </a:p>
+          <a:p>
+            <a:pPr lvl="2"/>
+            <a:r>
+              <a:rPr lang="pt-BR"/>
+              <a:t>Terceiro nível</a:t>
+            </a:r>
+          </a:p>
+          <a:p>
+            <a:pPr lvl="3"/>
+            <a:r>
+              <a:rPr lang="pt-BR"/>
+              <a:t>Quarto nível</a:t>
+            </a:r>
+          </a:p>
+          <a:p>
+            <a:pPr lvl="4"/>
+            <a:r>
+              <a:rPr lang="pt-BR"/>
+              <a:t>Quinto nível</a:t>
+            </a:r>
+          </a:p>
+        </p:txBody>
+      </p:sp>
+      <p:sp>
+        <p:nvSpPr>
+          <p:cNvPr id="4" name="Espaço Reservado para Texto 3">
+            <a:extLst>
+              <a:ext uri="{FF2B5EF4-FFF2-40B4-BE49-F238E27FC236}">
+                <a16:creationId xmlns:a16="http://schemas.microsoft.com/office/drawing/2014/main" id="{F339DDDE-E2D9-8AE1-2501-A2496C2B28A5}"/>
+              </a:ext>
+            </a:extLst>
+          </p:cNvPr>
+          <p:cNvSpPr>
+            <a:spLocks noGrp="1"/>
+          </p:cNvSpPr>
+          <p:nvPr>
+            <p:ph type="body" sz="half" idx="2"/>
+          </p:nvPr>
+        </p:nvSpPr>
+        <p:spPr>
+          <a:xfrm>
+            <a:off x="839788" y="2057400"/>
+            <a:ext cx="3932237" cy="3811588"/>
+          </a:xfrm>
+        </p:spPr>
+        <p:txBody>
+          <a:bodyPr/>
+          <a:lstStyle>
+            <a:lvl1pPr marL="0" indent="0">
+              <a:buNone/>
+              <a:defRPr sz="1600"/>
+            </a:lvl1pPr>
+            <a:lvl2pPr marL="457200" indent="0">
+              <a:buNone/>
+              <a:defRPr sz="1400"/>
+            </a:lvl2pPr>
+            <a:lvl3pPr marL="914400" indent="0">
+              <a:buNone/>
+              <a:defRPr sz="1200"/>
+            </a:lvl3pPr>
+            <a:lvl4pPr marL="1371600" indent="0">
+              <a:buNone/>
+              <a:defRPr sz="1000"/>
+            </a:lvl4pPr>
+            <a:lvl5pPr marL="1828800" indent="0">
+              <a:buNone/>
+              <a:defRPr sz="1000"/>
+            </a:lvl5pPr>
+            <a:lvl6pPr marL="2286000" indent="0">
+              <a:buNone/>
+              <a:defRPr sz="1000"/>
+            </a:lvl6pPr>
+            <a:lvl7pPr marL="2743200" indent="0">
+              <a:buNone/>
+              <a:defRPr sz="1000"/>
+            </a:lvl7pPr>
+            <a:lvl8pPr marL="3200400" indent="0">
+              <a:buNone/>
+              <a:defRPr sz="1000"/>
+            </a:lvl8pPr>
+            <a:lvl9pPr marL="3657600" indent="0">
+              <a:buNone/>
+              <a:defRPr sz="1000"/>
+            </a:lvl9pPr>
+          </a:lstStyle>
+          <a:p>
+            <a:pPr lvl="0"/>
+            <a:r>
+              <a:rPr lang="pt-BR"/>
+              <a:t>Clique para editar os estilos de texto Mestres</a:t>
+            </a:r>
+          </a:p>
+        </p:txBody>
+      </p:sp>
+      <p:sp>
+        <p:nvSpPr>
+          <p:cNvPr id="5" name="Espaço Reservado para Data 4">
+            <a:extLst>
+              <a:ext uri="{FF2B5EF4-FFF2-40B4-BE49-F238E27FC236}">
+                <a16:creationId xmlns:a16="http://schemas.microsoft.com/office/drawing/2014/main" id="{744337A6-C818-71B2-1CEC-6331C024EDFB}"/>
+              </a:ext>
+            </a:extLst>
+          </p:cNvPr>
+          <p:cNvSpPr>
+            <a:spLocks noGrp="1"/>
+          </p:cNvSpPr>
+          <p:nvPr>
+            <p:ph type="dt" sz="half" idx="10"/>
+          </p:nvPr>
+        </p:nvSpPr>
+        <p:spPr/>
+        <p:txBody>
+          <a:bodyPr/>
+          <a:lstStyle/>
+          <a:p>
+            <a:fld id="{D6507521-8C51-4813-BF91-ED62A8AF3277}" type="datetimeFigureOut">
+              <a:rPr lang="pt-BR" smtClean="0"/>
+              <a:t>24/04/2026</a:t>
+            </a:fld>
+            <a:endParaRPr lang="pt-BR"/>
+          </a:p>
+        </p:txBody>
+      </p:sp>
+      <p:sp>
+        <p:nvSpPr>
+          <p:cNvPr id="6" name="Espaço Reservado para Rodapé 5">
+            <a:extLst>
+              <a:ext uri="{FF2B5EF4-FFF2-40B4-BE49-F238E27FC236}">
+                <a16:creationId xmlns:a16="http://schemas.microsoft.com/office/drawing/2014/main" id="{C5257A08-AABD-E7B3-FFF7-C56BA0A60499}"/>
+              </a:ext>
+            </a:extLst>
+          </p:cNvPr>
+          <p:cNvSpPr>
+            <a:spLocks noGrp="1"/>
+          </p:cNvSpPr>
+          <p:nvPr>
+            <p:ph type="ftr" sz="quarter" idx="11"/>
+          </p:nvPr>
+        </p:nvSpPr>
+        <p:spPr/>
+        <p:txBody>
+          <a:bodyPr/>
+          <a:lstStyle/>
+          <a:p>
+            <a:endParaRPr lang="pt-BR"/>
+          </a:p>
+        </p:txBody>
+      </p:sp>
+      <p:sp>
+        <p:nvSpPr>
+          <p:cNvPr id="7" name="Espaço Reservado para Número de Slide 6">
+            <a:extLst>
+              <a:ext uri="{FF2B5EF4-FFF2-40B4-BE49-F238E27FC236}">
+                <a16:creationId xmlns:a16="http://schemas.microsoft.com/office/drawing/2014/main" id="{F2D8D8E6-827B-32EB-0F64-69934FAA5052}"/>
+              </a:ext>
+            </a:extLst>
+          </p:cNvPr>
+          <p:cNvSpPr>
+            <a:spLocks noGrp="1"/>
+          </p:cNvSpPr>
+          <p:nvPr>
+            <p:ph type="sldNum" sz="quarter" idx="12"/>
+          </p:nvPr>
+        </p:nvSpPr>
+        <p:spPr/>
+        <p:txBody>
+          <a:bodyPr/>
+          <a:lstStyle/>
+          <a:p>
+            <a:fld id="{2E4A13C5-F07B-482F-913C-E6F34CF189C3}" type="slidenum">
+              <a:rPr lang="pt-BR" smtClean="0"/>
+              <a:t>‹nº›</a:t>
+            </a:fld>
+            <a:endParaRPr lang="pt-BR"/>
+          </a:p>
+        </p:txBody>
+      </p:sp>
+    </p:spTree>
+    <p:extLst>
+      <p:ext uri="{BB962C8B-B14F-4D97-AF65-F5344CB8AC3E}">
+        <p14:creationId xmlns:p14="http://schemas.microsoft.com/office/powerpoint/2010/main" val="2910641785"/>
+      </p:ext>
+    </p:extLst>
+  </p:cSld>
+  <p:clrMapOvr>
+    <a:masterClrMapping/>
+  </p:clrMapOvr>
+</p:sldLayout>
+</file>
+
+<file path=ppt/slideLayouts/slideLayout15.xml><?xml version="1.0" encoding="utf-8"?>
+<p:sldLayout xmlns:a="http://schemas.openxmlformats.org/drawingml/2006/main" xmlns:r="http://schemas.openxmlformats.org/officeDocument/2006/relationships" xmlns:p="http://schemas.openxmlformats.org/presentationml/2006/main" type="picTx" preserve="1">
+  <p:cSld name="Imagem com Legenda">
+    <p:spTree>
+      <p:nvGrpSpPr>
+        <p:cNvPr id="1" name=""/>
+        <p:cNvGrpSpPr/>
+        <p:nvPr/>
+      </p:nvGrpSpPr>
+      <p:grpSpPr>
+        <a:xfrm>
+          <a:off x="0" y="0"/>
+          <a:ext cx="0" cy="0"/>
+          <a:chOff x="0" y="0"/>
+          <a:chExt cx="0" cy="0"/>
+        </a:xfrm>
+      </p:grpSpPr>
+      <p:sp>
+        <p:nvSpPr>
+          <p:cNvPr id="2" name="Título 1">
+            <a:extLst>
+              <a:ext uri="{FF2B5EF4-FFF2-40B4-BE49-F238E27FC236}">
+                <a16:creationId xmlns:a16="http://schemas.microsoft.com/office/drawing/2014/main" id="{03D004D5-C553-0106-4386-7BE220E06D03}"/>
+              </a:ext>
+            </a:extLst>
+          </p:cNvPr>
+          <p:cNvSpPr>
+            <a:spLocks noGrp="1"/>
+          </p:cNvSpPr>
+          <p:nvPr>
+            <p:ph type="title"/>
+          </p:nvPr>
+        </p:nvSpPr>
+        <p:spPr>
+          <a:xfrm>
+            <a:off x="839788" y="457200"/>
+            <a:ext cx="3932237" cy="1600200"/>
+          </a:xfrm>
+        </p:spPr>
+        <p:txBody>
+          <a:bodyPr anchor="b"/>
+          <a:lstStyle>
+            <a:lvl1pPr>
+              <a:defRPr sz="3200"/>
+            </a:lvl1pPr>
+          </a:lstStyle>
+          <a:p>
+            <a:r>
+              <a:rPr lang="pt-BR"/>
+              <a:t>Clique para editar o título Mestre</a:t>
+            </a:r>
+          </a:p>
+        </p:txBody>
+      </p:sp>
+      <p:sp>
+        <p:nvSpPr>
+          <p:cNvPr id="3" name="Espaço Reservado para Imagem 2">
+            <a:extLst>
+              <a:ext uri="{FF2B5EF4-FFF2-40B4-BE49-F238E27FC236}">
+                <a16:creationId xmlns:a16="http://schemas.microsoft.com/office/drawing/2014/main" id="{AE4264D6-CB12-92D3-ED4F-8665F3225F89}"/>
+              </a:ext>
+            </a:extLst>
+          </p:cNvPr>
+          <p:cNvSpPr>
+            <a:spLocks noGrp="1"/>
+          </p:cNvSpPr>
+          <p:nvPr>
+            <p:ph type="pic" idx="1"/>
+          </p:nvPr>
+        </p:nvSpPr>
+        <p:spPr>
+          <a:xfrm>
+            <a:off x="5183188" y="987425"/>
+            <a:ext cx="6172200" cy="4873625"/>
+          </a:xfrm>
+        </p:spPr>
+        <p:txBody>
+          <a:bodyPr/>
+          <a:lstStyle>
+            <a:lvl1pPr marL="0" indent="0">
+              <a:buNone/>
+              <a:defRPr sz="3200"/>
+            </a:lvl1pPr>
+            <a:lvl2pPr marL="457200" indent="0">
+              <a:buNone/>
+              <a:defRPr sz="2800"/>
+            </a:lvl2pPr>
+            <a:lvl3pPr marL="914400" indent="0">
+              <a:buNone/>
+              <a:defRPr sz="2400"/>
+            </a:lvl3pPr>
+            <a:lvl4pPr marL="1371600" indent="0">
+              <a:buNone/>
+              <a:defRPr sz="2000"/>
+            </a:lvl4pPr>
+            <a:lvl5pPr marL="1828800" indent="0">
+              <a:buNone/>
+              <a:defRPr sz="2000"/>
+            </a:lvl5pPr>
+            <a:lvl6pPr marL="2286000" indent="0">
+              <a:buNone/>
+              <a:defRPr sz="2000"/>
+            </a:lvl6pPr>
+            <a:lvl7pPr marL="2743200" indent="0">
+              <a:buNone/>
+              <a:defRPr sz="2000"/>
+            </a:lvl7pPr>
+            <a:lvl8pPr marL="3200400" indent="0">
+              <a:buNone/>
+              <a:defRPr sz="2000"/>
+            </a:lvl8pPr>
+            <a:lvl9pPr marL="3657600" indent="0">
+              <a:buNone/>
+              <a:defRPr sz="2000"/>
+            </a:lvl9pPr>
+          </a:lstStyle>
+          <a:p>
+            <a:endParaRPr lang="pt-BR"/>
+          </a:p>
+        </p:txBody>
+      </p:sp>
+      <p:sp>
+        <p:nvSpPr>
+          <p:cNvPr id="4" name="Espaço Reservado para Texto 3">
+            <a:extLst>
+              <a:ext uri="{FF2B5EF4-FFF2-40B4-BE49-F238E27FC236}">
+                <a16:creationId xmlns:a16="http://schemas.microsoft.com/office/drawing/2014/main" id="{F881DA6E-74D0-A153-8B0B-66602D4DA23F}"/>
+              </a:ext>
+            </a:extLst>
+          </p:cNvPr>
+          <p:cNvSpPr>
+            <a:spLocks noGrp="1"/>
+          </p:cNvSpPr>
+          <p:nvPr>
+            <p:ph type="body" sz="half" idx="2"/>
+          </p:nvPr>
+        </p:nvSpPr>
+        <p:spPr>
+          <a:xfrm>
+            <a:off x="839788" y="2057400"/>
+            <a:ext cx="3932237" cy="3811588"/>
+          </a:xfrm>
+        </p:spPr>
+        <p:txBody>
+          <a:bodyPr/>
+          <a:lstStyle>
+            <a:lvl1pPr marL="0" indent="0">
+              <a:buNone/>
+              <a:defRPr sz="1600"/>
+            </a:lvl1pPr>
+            <a:lvl2pPr marL="457200" indent="0">
+              <a:buNone/>
+              <a:defRPr sz="1400"/>
+            </a:lvl2pPr>
+            <a:lvl3pPr marL="914400" indent="0">
+              <a:buNone/>
+              <a:defRPr sz="1200"/>
+            </a:lvl3pPr>
+            <a:lvl4pPr marL="1371600" indent="0">
+              <a:buNone/>
+              <a:defRPr sz="1000"/>
+            </a:lvl4pPr>
+            <a:lvl5pPr marL="1828800" indent="0">
+              <a:buNone/>
+              <a:defRPr sz="1000"/>
+            </a:lvl5pPr>
+            <a:lvl6pPr marL="2286000" indent="0">
+              <a:buNone/>
+              <a:defRPr sz="1000"/>
+            </a:lvl6pPr>
+            <a:lvl7pPr marL="2743200" indent="0">
+              <a:buNone/>
+              <a:defRPr sz="1000"/>
+            </a:lvl7pPr>
+            <a:lvl8pPr marL="3200400" indent="0">
+              <a:buNone/>
+              <a:defRPr sz="1000"/>
+            </a:lvl8pPr>
+            <a:lvl9pPr marL="3657600" indent="0">
+              <a:buNone/>
+              <a:defRPr sz="1000"/>
+            </a:lvl9pPr>
+          </a:lstStyle>
+          <a:p>
+            <a:pPr lvl="0"/>
+            <a:r>
+              <a:rPr lang="pt-BR"/>
+              <a:t>Clique para editar os estilos de texto Mestres</a:t>
+            </a:r>
+          </a:p>
+        </p:txBody>
+      </p:sp>
+      <p:sp>
+        <p:nvSpPr>
+          <p:cNvPr id="5" name="Espaço Reservado para Data 4">
+            <a:extLst>
+              <a:ext uri="{FF2B5EF4-FFF2-40B4-BE49-F238E27FC236}">
+                <a16:creationId xmlns:a16="http://schemas.microsoft.com/office/drawing/2014/main" id="{F09557E6-809D-6780-BC3E-CEA864CFDD35}"/>
+              </a:ext>
+            </a:extLst>
+          </p:cNvPr>
+          <p:cNvSpPr>
+            <a:spLocks noGrp="1"/>
+          </p:cNvSpPr>
+          <p:nvPr>
+            <p:ph type="dt" sz="half" idx="10"/>
+          </p:nvPr>
+        </p:nvSpPr>
+        <p:spPr/>
+        <p:txBody>
+          <a:bodyPr/>
+          <a:lstStyle/>
+          <a:p>
+            <a:fld id="{D6507521-8C51-4813-BF91-ED62A8AF3277}" type="datetimeFigureOut">
+              <a:rPr lang="pt-BR" smtClean="0"/>
+              <a:t>24/04/2026</a:t>
+            </a:fld>
+            <a:endParaRPr lang="pt-BR"/>
+          </a:p>
+        </p:txBody>
+      </p:sp>
+      <p:sp>
+        <p:nvSpPr>
+          <p:cNvPr id="6" name="Espaço Reservado para Rodapé 5">
+            <a:extLst>
+              <a:ext uri="{FF2B5EF4-FFF2-40B4-BE49-F238E27FC236}">
+                <a16:creationId xmlns:a16="http://schemas.microsoft.com/office/drawing/2014/main" id="{4F672D94-0AF3-75E0-1877-E700D18F3AB8}"/>
+              </a:ext>
+            </a:extLst>
+          </p:cNvPr>
+          <p:cNvSpPr>
+            <a:spLocks noGrp="1"/>
+          </p:cNvSpPr>
+          <p:nvPr>
+            <p:ph type="ftr" sz="quarter" idx="11"/>
+          </p:nvPr>
+        </p:nvSpPr>
+        <p:spPr/>
+        <p:txBody>
+          <a:bodyPr/>
+          <a:lstStyle/>
+          <a:p>
+            <a:endParaRPr lang="pt-BR"/>
+          </a:p>
+        </p:txBody>
+      </p:sp>
+      <p:sp>
+        <p:nvSpPr>
+          <p:cNvPr id="7" name="Espaço Reservado para Número de Slide 6">
+            <a:extLst>
+              <a:ext uri="{FF2B5EF4-FFF2-40B4-BE49-F238E27FC236}">
+                <a16:creationId xmlns:a16="http://schemas.microsoft.com/office/drawing/2014/main" id="{0636AC0E-08BB-8E75-6658-3CF035734E6B}"/>
+              </a:ext>
+            </a:extLst>
+          </p:cNvPr>
+          <p:cNvSpPr>
+            <a:spLocks noGrp="1"/>
+          </p:cNvSpPr>
+          <p:nvPr>
+            <p:ph type="sldNum" sz="quarter" idx="12"/>
+          </p:nvPr>
+        </p:nvSpPr>
+        <p:spPr/>
+        <p:txBody>
+          <a:bodyPr/>
+          <a:lstStyle/>
+          <a:p>
+            <a:fld id="{2E4A13C5-F07B-482F-913C-E6F34CF189C3}" type="slidenum">
+              <a:rPr lang="pt-BR" smtClean="0"/>
+              <a:t>‹nº›</a:t>
+            </a:fld>
+            <a:endParaRPr lang="pt-BR"/>
+          </a:p>
+        </p:txBody>
+      </p:sp>
+    </p:spTree>
+    <p:extLst>
+      <p:ext uri="{BB962C8B-B14F-4D97-AF65-F5344CB8AC3E}">
+        <p14:creationId xmlns:p14="http://schemas.microsoft.com/office/powerpoint/2010/main" val="2498940351"/>
+      </p:ext>
+    </p:extLst>
+  </p:cSld>
+  <p:clrMapOvr>
+    <a:masterClrMapping/>
+  </p:clrMapOvr>
+</p:sldLayout>
+</file>
+
+<file path=ppt/slideLayouts/slideLayout16.xml><?xml version="1.0" encoding="utf-8"?>
+<p:sldLayout xmlns:a="http://schemas.openxmlformats.org/drawingml/2006/main" xmlns:r="http://schemas.openxmlformats.org/officeDocument/2006/relationships" xmlns:p="http://schemas.openxmlformats.org/presentationml/2006/main" type="vertTx" preserve="1">
+  <p:cSld name="Título e Texto Vertical">
+    <p:spTree>
+      <p:nvGrpSpPr>
+        <p:cNvPr id="1" name=""/>
+        <p:cNvGrpSpPr/>
+        <p:nvPr/>
+      </p:nvGrpSpPr>
+      <p:grpSpPr>
+        <a:xfrm>
+          <a:off x="0" y="0"/>
+          <a:ext cx="0" cy="0"/>
+          <a:chOff x="0" y="0"/>
+          <a:chExt cx="0" cy="0"/>
+        </a:xfrm>
+      </p:grpSpPr>
+      <p:sp>
+        <p:nvSpPr>
+          <p:cNvPr id="2" name="Título 1">
+            <a:extLst>
+              <a:ext uri="{FF2B5EF4-FFF2-40B4-BE49-F238E27FC236}">
+                <a16:creationId xmlns:a16="http://schemas.microsoft.com/office/drawing/2014/main" id="{C54C6B2E-7ACB-59D5-95E0-98485D21B86F}"/>
+              </a:ext>
+            </a:extLst>
+          </p:cNvPr>
+          <p:cNvSpPr>
+            <a:spLocks noGrp="1"/>
+          </p:cNvSpPr>
+          <p:nvPr>
+            <p:ph type="title"/>
+          </p:nvPr>
+        </p:nvSpPr>
+        <p:spPr/>
+        <p:txBody>
+          <a:bodyPr/>
+          <a:lstStyle/>
+          <a:p>
+            <a:r>
+              <a:rPr lang="pt-BR"/>
+              <a:t>Clique para editar o título Mestre</a:t>
+            </a:r>
+          </a:p>
+        </p:txBody>
+      </p:sp>
+      <p:sp>
+        <p:nvSpPr>
+          <p:cNvPr id="3" name="Espaço Reservado para Texto Vertical 2">
+            <a:extLst>
+              <a:ext uri="{FF2B5EF4-FFF2-40B4-BE49-F238E27FC236}">
+                <a16:creationId xmlns:a16="http://schemas.microsoft.com/office/drawing/2014/main" id="{5025CC42-D798-2CF8-A974-3F32D8FE90D8}"/>
+              </a:ext>
+            </a:extLst>
+          </p:cNvPr>
+          <p:cNvSpPr>
+            <a:spLocks noGrp="1"/>
+          </p:cNvSpPr>
+          <p:nvPr>
+            <p:ph type="body" orient="vert" idx="1"/>
+          </p:nvPr>
+        </p:nvSpPr>
+        <p:spPr/>
+        <p:txBody>
+          <a:bodyPr vert="eaVert"/>
+          <a:lstStyle/>
+          <a:p>
+            <a:pPr lvl="0"/>
+            <a:r>
+              <a:rPr lang="pt-BR"/>
+              <a:t>Clique para editar os estilos de texto Mestres</a:t>
+            </a:r>
+          </a:p>
+          <a:p>
+            <a:pPr lvl="1"/>
+            <a:r>
+              <a:rPr lang="pt-BR"/>
+              <a:t>Segundo nível</a:t>
+            </a:r>
+          </a:p>
+          <a:p>
+            <a:pPr lvl="2"/>
+            <a:r>
+              <a:rPr lang="pt-BR"/>
+              <a:t>Terceiro nível</a:t>
+            </a:r>
+          </a:p>
+          <a:p>
+            <a:pPr lvl="3"/>
+            <a:r>
+              <a:rPr lang="pt-BR"/>
+              <a:t>Quarto nível</a:t>
+            </a:r>
+          </a:p>
+          <a:p>
+            <a:pPr lvl="4"/>
+            <a:r>
+              <a:rPr lang="pt-BR"/>
+              <a:t>Quinto nível</a:t>
+            </a:r>
+          </a:p>
+        </p:txBody>
+      </p:sp>
+      <p:sp>
+        <p:nvSpPr>
+          <p:cNvPr id="4" name="Espaço Reservado para Data 3">
+            <a:extLst>
+              <a:ext uri="{FF2B5EF4-FFF2-40B4-BE49-F238E27FC236}">
+                <a16:creationId xmlns:a16="http://schemas.microsoft.com/office/drawing/2014/main" id="{08C49997-819B-95AF-0792-9D32C694638D}"/>
+              </a:ext>
+            </a:extLst>
+          </p:cNvPr>
+          <p:cNvSpPr>
+            <a:spLocks noGrp="1"/>
+          </p:cNvSpPr>
+          <p:nvPr>
+            <p:ph type="dt" sz="half" idx="10"/>
+          </p:nvPr>
+        </p:nvSpPr>
+        <p:spPr/>
+        <p:txBody>
+          <a:bodyPr/>
+          <a:lstStyle/>
+          <a:p>
+            <a:fld id="{D6507521-8C51-4813-BF91-ED62A8AF3277}" type="datetimeFigureOut">
+              <a:rPr lang="pt-BR" smtClean="0"/>
+              <a:t>24/04/2026</a:t>
+            </a:fld>
+            <a:endParaRPr lang="pt-BR"/>
+          </a:p>
+        </p:txBody>
+      </p:sp>
+      <p:sp>
+        <p:nvSpPr>
+          <p:cNvPr id="5" name="Espaço Reservado para Rodapé 4">
+            <a:extLst>
+              <a:ext uri="{FF2B5EF4-FFF2-40B4-BE49-F238E27FC236}">
+                <a16:creationId xmlns:a16="http://schemas.microsoft.com/office/drawing/2014/main" id="{9C4AD505-8D67-0BAC-938E-6EA6658DC7D6}"/>
+              </a:ext>
+            </a:extLst>
+          </p:cNvPr>
+          <p:cNvSpPr>
+            <a:spLocks noGrp="1"/>
+          </p:cNvSpPr>
+          <p:nvPr>
+            <p:ph type="ftr" sz="quarter" idx="11"/>
+          </p:nvPr>
+        </p:nvSpPr>
+        <p:spPr/>
+        <p:txBody>
+          <a:bodyPr/>
+          <a:lstStyle/>
+          <a:p>
+            <a:endParaRPr lang="pt-BR"/>
+          </a:p>
+        </p:txBody>
+      </p:sp>
+      <p:sp>
+        <p:nvSpPr>
+          <p:cNvPr id="6" name="Espaço Reservado para Número de Slide 5">
+            <a:extLst>
+              <a:ext uri="{FF2B5EF4-FFF2-40B4-BE49-F238E27FC236}">
+                <a16:creationId xmlns:a16="http://schemas.microsoft.com/office/drawing/2014/main" id="{2B09552F-F936-6B7D-976E-8BE100E1E30F}"/>
+              </a:ext>
+            </a:extLst>
+          </p:cNvPr>
+          <p:cNvSpPr>
+            <a:spLocks noGrp="1"/>
+          </p:cNvSpPr>
+          <p:nvPr>
+            <p:ph type="sldNum" sz="quarter" idx="12"/>
+          </p:nvPr>
+        </p:nvSpPr>
+        <p:spPr/>
+        <p:txBody>
+          <a:bodyPr/>
+          <a:lstStyle/>
+          <a:p>
+            <a:fld id="{2E4A13C5-F07B-482F-913C-E6F34CF189C3}" type="slidenum">
+              <a:rPr lang="pt-BR" smtClean="0"/>
+              <a:t>‹nº›</a:t>
+            </a:fld>
+            <a:endParaRPr lang="pt-BR"/>
+          </a:p>
+        </p:txBody>
+      </p:sp>
+    </p:spTree>
+    <p:extLst>
+      <p:ext uri="{BB962C8B-B14F-4D97-AF65-F5344CB8AC3E}">
+        <p14:creationId xmlns:p14="http://schemas.microsoft.com/office/powerpoint/2010/main" val="3636916872"/>
+      </p:ext>
+    </p:extLst>
+  </p:cSld>
+  <p:clrMapOvr>
+    <a:masterClrMapping/>
+  </p:clrMapOvr>
+</p:sldLayout>
+</file>
+
+<file path=ppt/slideLayouts/slideLayout17.xml><?xml version="1.0" encoding="utf-8"?>
+<p:sldLayout xmlns:a="http://schemas.openxmlformats.org/drawingml/2006/main" xmlns:r="http://schemas.openxmlformats.org/officeDocument/2006/relationships" xmlns:p="http://schemas.openxmlformats.org/presentationml/2006/main" type="vertTitleAndTx" preserve="1">
+  <p:cSld name="Texto e Título Vertical">
+    <p:spTree>
+      <p:nvGrpSpPr>
+        <p:cNvPr id="1" name=""/>
+        <p:cNvGrpSpPr/>
+        <p:nvPr/>
+      </p:nvGrpSpPr>
+      <p:grpSpPr>
+        <a:xfrm>
+          <a:off x="0" y="0"/>
+          <a:ext cx="0" cy="0"/>
+          <a:chOff x="0" y="0"/>
+          <a:chExt cx="0" cy="0"/>
+        </a:xfrm>
+      </p:grpSpPr>
+      <p:sp>
+        <p:nvSpPr>
+          <p:cNvPr id="2" name="Título Vertical 1">
+            <a:extLst>
+              <a:ext uri="{FF2B5EF4-FFF2-40B4-BE49-F238E27FC236}">
+                <a16:creationId xmlns:a16="http://schemas.microsoft.com/office/drawing/2014/main" id="{2B4FEF1E-8D37-2C31-8636-D486A3142D3E}"/>
+              </a:ext>
+            </a:extLst>
+          </p:cNvPr>
+          <p:cNvSpPr>
+            <a:spLocks noGrp="1"/>
+          </p:cNvSpPr>
+          <p:nvPr>
+            <p:ph type="title" orient="vert"/>
+          </p:nvPr>
+        </p:nvSpPr>
+        <p:spPr>
+          <a:xfrm>
+            <a:off x="8724900" y="365125"/>
+            <a:ext cx="2628900" cy="5811838"/>
+          </a:xfrm>
+        </p:spPr>
+        <p:txBody>
+          <a:bodyPr vert="eaVert"/>
+          <a:lstStyle/>
+          <a:p>
+            <a:r>
+              <a:rPr lang="pt-BR"/>
+              <a:t>Clique para editar o título Mestre</a:t>
+            </a:r>
+          </a:p>
+        </p:txBody>
+      </p:sp>
+      <p:sp>
+        <p:nvSpPr>
+          <p:cNvPr id="3" name="Espaço Reservado para Texto Vertical 2">
+            <a:extLst>
+              <a:ext uri="{FF2B5EF4-FFF2-40B4-BE49-F238E27FC236}">
+                <a16:creationId xmlns:a16="http://schemas.microsoft.com/office/drawing/2014/main" id="{C68DC6A6-38CC-71CB-8146-6DF4113FE4EB}"/>
+              </a:ext>
+            </a:extLst>
+          </p:cNvPr>
+          <p:cNvSpPr>
+            <a:spLocks noGrp="1"/>
+          </p:cNvSpPr>
+          <p:nvPr>
+            <p:ph type="body" orient="vert" idx="1"/>
+          </p:nvPr>
+        </p:nvSpPr>
+        <p:spPr>
+          <a:xfrm>
+            <a:off x="838200" y="365125"/>
+            <a:ext cx="7734300" cy="5811838"/>
+          </a:xfrm>
+        </p:spPr>
+        <p:txBody>
+          <a:bodyPr vert="eaVert"/>
+          <a:lstStyle/>
+          <a:p>
+            <a:pPr lvl="0"/>
+            <a:r>
+              <a:rPr lang="pt-BR"/>
+              <a:t>Clique para editar os estilos de texto Mestres</a:t>
+            </a:r>
+          </a:p>
+          <a:p>
+            <a:pPr lvl="1"/>
+            <a:r>
+              <a:rPr lang="pt-BR"/>
+              <a:t>Segundo nível</a:t>
+            </a:r>
+          </a:p>
+          <a:p>
+            <a:pPr lvl="2"/>
+            <a:r>
+              <a:rPr lang="pt-BR"/>
+              <a:t>Terceiro nível</a:t>
+            </a:r>
+          </a:p>
+          <a:p>
+            <a:pPr lvl="3"/>
+            <a:r>
+              <a:rPr lang="pt-BR"/>
+              <a:t>Quarto nível</a:t>
+            </a:r>
+          </a:p>
+          <a:p>
+            <a:pPr lvl="4"/>
+            <a:r>
+              <a:rPr lang="pt-BR"/>
+              <a:t>Quinto nível</a:t>
+            </a:r>
+          </a:p>
+        </p:txBody>
+      </p:sp>
+      <p:sp>
+        <p:nvSpPr>
+          <p:cNvPr id="4" name="Espaço Reservado para Data 3">
+            <a:extLst>
+              <a:ext uri="{FF2B5EF4-FFF2-40B4-BE49-F238E27FC236}">
+                <a16:creationId xmlns:a16="http://schemas.microsoft.com/office/drawing/2014/main" id="{EC9D5A90-DBFD-E3C0-13D2-48CB7DA725C8}"/>
+              </a:ext>
+            </a:extLst>
+          </p:cNvPr>
+          <p:cNvSpPr>
+            <a:spLocks noGrp="1"/>
+          </p:cNvSpPr>
+          <p:nvPr>
+            <p:ph type="dt" sz="half" idx="10"/>
+          </p:nvPr>
+        </p:nvSpPr>
+        <p:spPr/>
+        <p:txBody>
+          <a:bodyPr/>
+          <a:lstStyle/>
+          <a:p>
+            <a:fld id="{D6507521-8C51-4813-BF91-ED62A8AF3277}" type="datetimeFigureOut">
+              <a:rPr lang="pt-BR" smtClean="0"/>
+              <a:t>24/04/2026</a:t>
+            </a:fld>
+            <a:endParaRPr lang="pt-BR"/>
+          </a:p>
+        </p:txBody>
+      </p:sp>
+      <p:sp>
+        <p:nvSpPr>
+          <p:cNvPr id="5" name="Espaço Reservado para Rodapé 4">
+            <a:extLst>
+              <a:ext uri="{FF2B5EF4-FFF2-40B4-BE49-F238E27FC236}">
+                <a16:creationId xmlns:a16="http://schemas.microsoft.com/office/drawing/2014/main" id="{D151D6D3-7F1C-22C9-2E1A-7726F26EC0D1}"/>
+              </a:ext>
+            </a:extLst>
+          </p:cNvPr>
+          <p:cNvSpPr>
+            <a:spLocks noGrp="1"/>
+          </p:cNvSpPr>
+          <p:nvPr>
+            <p:ph type="ftr" sz="quarter" idx="11"/>
+          </p:nvPr>
+        </p:nvSpPr>
+        <p:spPr/>
+        <p:txBody>
+          <a:bodyPr/>
+          <a:lstStyle/>
+          <a:p>
+            <a:endParaRPr lang="pt-BR"/>
+          </a:p>
+        </p:txBody>
+      </p:sp>
+      <p:sp>
+        <p:nvSpPr>
+          <p:cNvPr id="6" name="Espaço Reservado para Número de Slide 5">
+            <a:extLst>
+              <a:ext uri="{FF2B5EF4-FFF2-40B4-BE49-F238E27FC236}">
+                <a16:creationId xmlns:a16="http://schemas.microsoft.com/office/drawing/2014/main" id="{3930CBB3-78F5-FD54-8361-D38BD988D80A}"/>
+              </a:ext>
+            </a:extLst>
+          </p:cNvPr>
+          <p:cNvSpPr>
+            <a:spLocks noGrp="1"/>
+          </p:cNvSpPr>
+          <p:nvPr>
+            <p:ph type="sldNum" sz="quarter" idx="12"/>
+          </p:nvPr>
+        </p:nvSpPr>
+        <p:spPr/>
+        <p:txBody>
+          <a:bodyPr/>
+          <a:lstStyle/>
+          <a:p>
+            <a:fld id="{2E4A13C5-F07B-482F-913C-E6F34CF189C3}" type="slidenum">
+              <a:rPr lang="pt-BR" smtClean="0"/>
+              <a:t>‹nº›</a:t>
+            </a:fld>
+            <a:endParaRPr lang="pt-BR"/>
+          </a:p>
+        </p:txBody>
+      </p:sp>
+    </p:spTree>
+    <p:extLst>
+      <p:ext uri="{BB962C8B-B14F-4D97-AF65-F5344CB8AC3E}">
+        <p14:creationId xmlns:p14="http://schemas.microsoft.com/office/powerpoint/2010/main" val="2168683166"/>
+      </p:ext>
+    </p:extLst>
+  </p:cSld>
+  <p:clrMapOvr>
+    <a:masterClrMapping/>
+  </p:clrMapOvr>
+</p:sldLayout>
+</file>
+
 <file path=ppt/slideLayouts/slideLayout2.xml><?xml version="1.0" encoding="utf-8"?>
 <p:sldLayout xmlns:a="http://schemas.openxmlformats.org/drawingml/2006/main" xmlns:r="http://schemas.openxmlformats.org/officeDocument/2006/relationships" xmlns:p="http://schemas.openxmlformats.org/presentationml/2006/main" preserve="1" userDrawn="1">
   <p:cSld name="1_Slide de Título">
     <p:bg>
       <p:bgPr>
         <a:solidFill>
-          <a:schemeClr val="tx1"/>
+          <a:schemeClr val="bg1"/>
         </a:solidFill>
         <a:effectLst/>
       </p:bgPr>
@@ -365,6 +2302,66 @@
           </a:prstGeom>
         </p:spPr>
       </p:pic>
+      <p:pic>
+        <p:nvPicPr>
+          <p:cNvPr id="2" name="Imagem 1" descr="cps-removebg-preview.png">
+            <a:extLst>
+              <a:ext uri="{FF2B5EF4-FFF2-40B4-BE49-F238E27FC236}">
+                <a16:creationId xmlns:a16="http://schemas.microsoft.com/office/drawing/2014/main" id="{96A2F0B1-018F-9D4C-90AE-84101272AD06}"/>
+              </a:ext>
+            </a:extLst>
+          </p:cNvPr>
+          <p:cNvPicPr>
+            <a:picLocks noChangeAspect="1"/>
+          </p:cNvPicPr>
+          <p:nvPr userDrawn="1"/>
+        </p:nvPicPr>
+        <p:blipFill>
+          <a:blip r:embed="rId6"/>
+          <a:stretch>
+            <a:fillRect/>
+          </a:stretch>
+        </p:blipFill>
+        <p:spPr>
+          <a:xfrm>
+            <a:off x="10048875" y="-232324"/>
+            <a:ext cx="2143125" cy="2143125"/>
+          </a:xfrm>
+          <a:prstGeom prst="rect">
+            <a:avLst/>
+          </a:prstGeom>
+        </p:spPr>
+      </p:pic>
+      <p:pic>
+        <p:nvPicPr>
+          <p:cNvPr id="3" name="Imagem 2" descr="Logotipo">
+            <a:extLst>
+              <a:ext uri="{FF2B5EF4-FFF2-40B4-BE49-F238E27FC236}">
+                <a16:creationId xmlns:a16="http://schemas.microsoft.com/office/drawing/2014/main" id="{A4E5AF2A-220C-79B4-A037-13101D8B44F8}"/>
+              </a:ext>
+            </a:extLst>
+          </p:cNvPr>
+          <p:cNvPicPr>
+            <a:picLocks noChangeAspect="1"/>
+          </p:cNvPicPr>
+          <p:nvPr userDrawn="1"/>
+        </p:nvPicPr>
+        <p:blipFill>
+          <a:blip r:embed="rId7"/>
+          <a:stretch>
+            <a:fillRect/>
+          </a:stretch>
+        </p:blipFill>
+        <p:spPr>
+          <a:xfrm>
+            <a:off x="0" y="53427"/>
+            <a:ext cx="2905125" cy="1571625"/>
+          </a:xfrm>
+          <a:prstGeom prst="rect">
+            <a:avLst/>
+          </a:prstGeom>
+        </p:spPr>
+      </p:pic>
     </p:spTree>
     <p:extLst>
       <p:ext uri="{BB962C8B-B14F-4D97-AF65-F5344CB8AC3E}">
@@ -379,6 +2376,242 @@
 </file>
 
 <file path=ppt/slideLayouts/slideLayout3.xml><?xml version="1.0" encoding="utf-8"?>
+<p:sldLayout xmlns:a="http://schemas.openxmlformats.org/drawingml/2006/main" xmlns:r="http://schemas.openxmlformats.org/officeDocument/2006/relationships" xmlns:p="http://schemas.openxmlformats.org/presentationml/2006/main" preserve="1" userDrawn="1">
+  <p:cSld name="Layout Personalizado">
+    <p:spTree>
+      <p:nvGrpSpPr>
+        <p:cNvPr id="1" name=""/>
+        <p:cNvGrpSpPr/>
+        <p:nvPr/>
+      </p:nvGrpSpPr>
+      <p:grpSpPr>
+        <a:xfrm>
+          <a:off x="0" y="0"/>
+          <a:ext cx="0" cy="0"/>
+          <a:chOff x="0" y="0"/>
+          <a:chExt cx="0" cy="0"/>
+        </a:xfrm>
+      </p:grpSpPr>
+      <p:sp>
+        <p:nvSpPr>
+          <p:cNvPr id="2" name="Título 1">
+            <a:extLst>
+              <a:ext uri="{FF2B5EF4-FFF2-40B4-BE49-F238E27FC236}">
+                <a16:creationId xmlns:a16="http://schemas.microsoft.com/office/drawing/2014/main" id="{9DB525E9-F7D6-0042-4FBA-223F2B448F4C}"/>
+              </a:ext>
+            </a:extLst>
+          </p:cNvPr>
+          <p:cNvSpPr>
+            <a:spLocks noGrp="1"/>
+          </p:cNvSpPr>
+          <p:nvPr>
+            <p:ph type="title"/>
+          </p:nvPr>
+        </p:nvSpPr>
+        <p:spPr>
+          <a:xfrm>
+            <a:off x="2315688" y="365125"/>
+            <a:ext cx="7956468" cy="869909"/>
+          </a:xfrm>
+          <a:prstGeom prst="rect">
+            <a:avLst/>
+          </a:prstGeom>
+        </p:spPr>
+        <p:txBody>
+          <a:bodyPr/>
+          <a:lstStyle>
+            <a:lvl1pPr>
+              <a:defRPr b="1">
+                <a:latin typeface="Verdana" panose="020B0604030504040204" pitchFamily="34" charset="0"/>
+                <a:ea typeface="Verdana" panose="020B0604030504040204" pitchFamily="34" charset="0"/>
+              </a:defRPr>
+            </a:lvl1pPr>
+          </a:lstStyle>
+          <a:p>
+            <a:r>
+              <a:rPr lang="pt-BR" dirty="0"/>
+              <a:t>Clique para editar o título Mestre</a:t>
+            </a:r>
+          </a:p>
+        </p:txBody>
+      </p:sp>
+      <p:pic>
+        <p:nvPicPr>
+          <p:cNvPr id="3" name="Imagem 2" descr="Logotipo">
+            <a:extLst>
+              <a:ext uri="{FF2B5EF4-FFF2-40B4-BE49-F238E27FC236}">
+                <a16:creationId xmlns:a16="http://schemas.microsoft.com/office/drawing/2014/main" id="{B52B2C8A-0763-2C27-6FA0-8B35274D4BF0}"/>
+              </a:ext>
+            </a:extLst>
+          </p:cNvPr>
+          <p:cNvPicPr>
+            <a:picLocks noChangeAspect="1"/>
+          </p:cNvPicPr>
+          <p:nvPr userDrawn="1"/>
+        </p:nvPicPr>
+        <p:blipFill>
+          <a:blip r:embed="rId2"/>
+          <a:stretch>
+            <a:fillRect/>
+          </a:stretch>
+        </p:blipFill>
+        <p:spPr>
+          <a:xfrm>
+            <a:off x="0" y="53427"/>
+            <a:ext cx="2905125" cy="1571625"/>
+          </a:xfrm>
+          <a:prstGeom prst="rect">
+            <a:avLst/>
+          </a:prstGeom>
+        </p:spPr>
+      </p:pic>
+      <p:pic>
+        <p:nvPicPr>
+          <p:cNvPr id="4" name="Imagem 3" descr="cps-removebg-preview.png">
+            <a:extLst>
+              <a:ext uri="{FF2B5EF4-FFF2-40B4-BE49-F238E27FC236}">
+                <a16:creationId xmlns:a16="http://schemas.microsoft.com/office/drawing/2014/main" id="{414F4410-DE05-7CC7-C1AC-4E705EDC9CE4}"/>
+              </a:ext>
+            </a:extLst>
+          </p:cNvPr>
+          <p:cNvPicPr>
+            <a:picLocks noChangeAspect="1"/>
+          </p:cNvPicPr>
+          <p:nvPr userDrawn="1"/>
+        </p:nvPicPr>
+        <p:blipFill>
+          <a:blip r:embed="rId3"/>
+          <a:stretch>
+            <a:fillRect/>
+          </a:stretch>
+        </p:blipFill>
+        <p:spPr>
+          <a:xfrm>
+            <a:off x="10048875" y="-232324"/>
+            <a:ext cx="2143125" cy="2143125"/>
+          </a:xfrm>
+          <a:prstGeom prst="rect">
+            <a:avLst/>
+          </a:prstGeom>
+        </p:spPr>
+      </p:pic>
+      <p:sp>
+        <p:nvSpPr>
+          <p:cNvPr id="5" name="Espaço Reservado para Texto 2">
+            <a:extLst>
+              <a:ext uri="{FF2B5EF4-FFF2-40B4-BE49-F238E27FC236}">
+                <a16:creationId xmlns:a16="http://schemas.microsoft.com/office/drawing/2014/main" id="{0EDC0BA6-4766-E81A-B83A-78F9968EFD01}"/>
+              </a:ext>
+            </a:extLst>
+          </p:cNvPr>
+          <p:cNvSpPr>
+            <a:spLocks noGrp="1"/>
+          </p:cNvSpPr>
+          <p:nvPr>
+            <p:ph idx="1"/>
+          </p:nvPr>
+        </p:nvSpPr>
+        <p:spPr>
+          <a:xfrm>
+            <a:off x="838200" y="1825625"/>
+            <a:ext cx="10515600" cy="4351338"/>
+          </a:xfrm>
+          <a:prstGeom prst="rect">
+            <a:avLst/>
+          </a:prstGeom>
+        </p:spPr>
+        <p:txBody>
+          <a:bodyPr vert="horz" lIns="91440" tIns="45720" rIns="91440" bIns="45720" rtlCol="0">
+            <a:normAutofit/>
+          </a:bodyPr>
+          <a:lstStyle>
+            <a:lvl1pPr>
+              <a:defRPr>
+                <a:solidFill>
+                  <a:schemeClr val="tx1"/>
+                </a:solidFill>
+              </a:defRPr>
+            </a:lvl1pPr>
+            <a:lvl2pPr>
+              <a:defRPr>
+                <a:solidFill>
+                  <a:schemeClr val="tx1"/>
+                </a:solidFill>
+              </a:defRPr>
+            </a:lvl2pPr>
+            <a:lvl3pPr>
+              <a:defRPr>
+                <a:solidFill>
+                  <a:schemeClr val="tx1"/>
+                </a:solidFill>
+              </a:defRPr>
+            </a:lvl3pPr>
+            <a:lvl4pPr>
+              <a:defRPr>
+                <a:solidFill>
+                  <a:schemeClr val="tx1"/>
+                </a:solidFill>
+              </a:defRPr>
+            </a:lvl4pPr>
+            <a:lvl5pPr>
+              <a:defRPr>
+                <a:solidFill>
+                  <a:schemeClr val="tx1"/>
+                </a:solidFill>
+              </a:defRPr>
+            </a:lvl5pPr>
+          </a:lstStyle>
+          <a:p>
+            <a:pPr lvl="0"/>
+            <a:r>
+              <a:rPr lang="pt-BR" dirty="0"/>
+              <a:t>Clique para editar os estilos de texto Mestres</a:t>
+            </a:r>
+          </a:p>
+          <a:p>
+            <a:pPr lvl="1"/>
+            <a:r>
+              <a:rPr lang="pt-BR" dirty="0"/>
+              <a:t>Segundo nível</a:t>
+            </a:r>
+          </a:p>
+          <a:p>
+            <a:pPr lvl="2"/>
+            <a:r>
+              <a:rPr lang="pt-BR" dirty="0"/>
+              <a:t>Terceiro nível</a:t>
+            </a:r>
+          </a:p>
+          <a:p>
+            <a:pPr lvl="3"/>
+            <a:r>
+              <a:rPr lang="pt-BR" dirty="0"/>
+              <a:t>Quarto nível</a:t>
+            </a:r>
+          </a:p>
+          <a:p>
+            <a:pPr lvl="4"/>
+            <a:r>
+              <a:rPr lang="pt-BR" dirty="0"/>
+              <a:t>Quinto nível</a:t>
+            </a:r>
+          </a:p>
+        </p:txBody>
+      </p:sp>
+    </p:spTree>
+    <p:extLst>
+      <p:ext uri="{BB962C8B-B14F-4D97-AF65-F5344CB8AC3E}">
+        <p14:creationId xmlns:p14="http://schemas.microsoft.com/office/powerpoint/2010/main" val="2637872468"/>
+      </p:ext>
+    </p:extLst>
+  </p:cSld>
+  <p:clrMapOvr>
+    <a:masterClrMapping/>
+  </p:clrMapOvr>
+</p:sldLayout>
+</file>
+
+<file path=ppt/slideLayouts/slideLayout4.xml><?xml version="1.0" encoding="utf-8"?>
 <p:sldLayout xmlns:a="http://schemas.openxmlformats.org/drawingml/2006/main" xmlns:r="http://schemas.openxmlformats.org/officeDocument/2006/relationships" xmlns:p="http://schemas.openxmlformats.org/presentationml/2006/main" preserve="1" userDrawn="1">
   <p:cSld name="2_Slide de Título">
     <p:bg>
@@ -467,6 +2700,1040 @@
     <p:extLst>
       <p:ext uri="{BB962C8B-B14F-4D97-AF65-F5344CB8AC3E}">
         <p14:creationId xmlns:p14="http://schemas.microsoft.com/office/powerpoint/2010/main" val="4153823153"/>
+      </p:ext>
+    </p:extLst>
+  </p:cSld>
+  <p:clrMapOvr>
+    <a:masterClrMapping/>
+  </p:clrMapOvr>
+</p:sldLayout>
+</file>
+
+<file path=ppt/slideLayouts/slideLayout5.xml><?xml version="1.0" encoding="utf-8"?>
+<p:sldLayout xmlns:a="http://schemas.openxmlformats.org/drawingml/2006/main" xmlns:r="http://schemas.openxmlformats.org/officeDocument/2006/relationships" xmlns:p="http://schemas.openxmlformats.org/presentationml/2006/main" type="secHead" preserve="1">
+  <p:cSld name="Cabeçalho da Seção">
+    <p:spTree>
+      <p:nvGrpSpPr>
+        <p:cNvPr id="1" name=""/>
+        <p:cNvGrpSpPr/>
+        <p:nvPr/>
+      </p:nvGrpSpPr>
+      <p:grpSpPr>
+        <a:xfrm>
+          <a:off x="0" y="0"/>
+          <a:ext cx="0" cy="0"/>
+          <a:chOff x="0" y="0"/>
+          <a:chExt cx="0" cy="0"/>
+        </a:xfrm>
+      </p:grpSpPr>
+      <p:sp>
+        <p:nvSpPr>
+          <p:cNvPr id="2" name="Título 1">
+            <a:extLst>
+              <a:ext uri="{FF2B5EF4-FFF2-40B4-BE49-F238E27FC236}">
+                <a16:creationId xmlns:a16="http://schemas.microsoft.com/office/drawing/2014/main" id="{874CAF36-3183-E399-E902-91260942F08C}"/>
+              </a:ext>
+            </a:extLst>
+          </p:cNvPr>
+          <p:cNvSpPr>
+            <a:spLocks noGrp="1"/>
+          </p:cNvSpPr>
+          <p:nvPr>
+            <p:ph type="title"/>
+          </p:nvPr>
+        </p:nvSpPr>
+        <p:spPr>
+          <a:xfrm>
+            <a:off x="831850" y="1709738"/>
+            <a:ext cx="10515600" cy="2852737"/>
+          </a:xfrm>
+        </p:spPr>
+        <p:txBody>
+          <a:bodyPr anchor="b"/>
+          <a:lstStyle>
+            <a:lvl1pPr>
+              <a:defRPr sz="6000"/>
+            </a:lvl1pPr>
+          </a:lstStyle>
+          <a:p>
+            <a:r>
+              <a:rPr lang="pt-BR"/>
+              <a:t>Clique para editar o título Mestre</a:t>
+            </a:r>
+          </a:p>
+        </p:txBody>
+      </p:sp>
+      <p:sp>
+        <p:nvSpPr>
+          <p:cNvPr id="3" name="Espaço Reservado para Texto 2">
+            <a:extLst>
+              <a:ext uri="{FF2B5EF4-FFF2-40B4-BE49-F238E27FC236}">
+                <a16:creationId xmlns:a16="http://schemas.microsoft.com/office/drawing/2014/main" id="{711262FF-52F8-ACA6-1216-164903750DBB}"/>
+              </a:ext>
+            </a:extLst>
+          </p:cNvPr>
+          <p:cNvSpPr>
+            <a:spLocks noGrp="1"/>
+          </p:cNvSpPr>
+          <p:nvPr>
+            <p:ph type="body" idx="1"/>
+          </p:nvPr>
+        </p:nvSpPr>
+        <p:spPr>
+          <a:xfrm>
+            <a:off x="831850" y="4589463"/>
+            <a:ext cx="10515600" cy="1500187"/>
+          </a:xfrm>
+        </p:spPr>
+        <p:txBody>
+          <a:bodyPr/>
+          <a:lstStyle>
+            <a:lvl1pPr marL="0" indent="0">
+              <a:buNone/>
+              <a:defRPr sz="2400">
+                <a:solidFill>
+                  <a:schemeClr val="tx1">
+                    <a:tint val="82000"/>
+                  </a:schemeClr>
+                </a:solidFill>
+              </a:defRPr>
+            </a:lvl1pPr>
+            <a:lvl2pPr marL="457200" indent="0">
+              <a:buNone/>
+              <a:defRPr sz="2000">
+                <a:solidFill>
+                  <a:schemeClr val="tx1">
+                    <a:tint val="82000"/>
+                  </a:schemeClr>
+                </a:solidFill>
+              </a:defRPr>
+            </a:lvl2pPr>
+            <a:lvl3pPr marL="914400" indent="0">
+              <a:buNone/>
+              <a:defRPr sz="1800">
+                <a:solidFill>
+                  <a:schemeClr val="tx1">
+                    <a:tint val="82000"/>
+                  </a:schemeClr>
+                </a:solidFill>
+              </a:defRPr>
+            </a:lvl3pPr>
+            <a:lvl4pPr marL="1371600" indent="0">
+              <a:buNone/>
+              <a:defRPr sz="1600">
+                <a:solidFill>
+                  <a:schemeClr val="tx1">
+                    <a:tint val="82000"/>
+                  </a:schemeClr>
+                </a:solidFill>
+              </a:defRPr>
+            </a:lvl4pPr>
+            <a:lvl5pPr marL="1828800" indent="0">
+              <a:buNone/>
+              <a:defRPr sz="1600">
+                <a:solidFill>
+                  <a:schemeClr val="tx1">
+                    <a:tint val="82000"/>
+                  </a:schemeClr>
+                </a:solidFill>
+              </a:defRPr>
+            </a:lvl5pPr>
+            <a:lvl6pPr marL="2286000" indent="0">
+              <a:buNone/>
+              <a:defRPr sz="1600">
+                <a:solidFill>
+                  <a:schemeClr val="tx1">
+                    <a:tint val="82000"/>
+                  </a:schemeClr>
+                </a:solidFill>
+              </a:defRPr>
+            </a:lvl6pPr>
+            <a:lvl7pPr marL="2743200" indent="0">
+              <a:buNone/>
+              <a:defRPr sz="1600">
+                <a:solidFill>
+                  <a:schemeClr val="tx1">
+                    <a:tint val="82000"/>
+                  </a:schemeClr>
+                </a:solidFill>
+              </a:defRPr>
+            </a:lvl7pPr>
+            <a:lvl8pPr marL="3200400" indent="0">
+              <a:buNone/>
+              <a:defRPr sz="1600">
+                <a:solidFill>
+                  <a:schemeClr val="tx1">
+                    <a:tint val="82000"/>
+                  </a:schemeClr>
+                </a:solidFill>
+              </a:defRPr>
+            </a:lvl8pPr>
+            <a:lvl9pPr marL="3657600" indent="0">
+              <a:buNone/>
+              <a:defRPr sz="1600">
+                <a:solidFill>
+                  <a:schemeClr val="tx1">
+                    <a:tint val="82000"/>
+                  </a:schemeClr>
+                </a:solidFill>
+              </a:defRPr>
+            </a:lvl9pPr>
+          </a:lstStyle>
+          <a:p>
+            <a:pPr lvl="0"/>
+            <a:r>
+              <a:rPr lang="pt-BR"/>
+              <a:t>Clique para editar os estilos de texto Mestres</a:t>
+            </a:r>
+          </a:p>
+        </p:txBody>
+      </p:sp>
+      <p:sp>
+        <p:nvSpPr>
+          <p:cNvPr id="4" name="Espaço Reservado para Data 3">
+            <a:extLst>
+              <a:ext uri="{FF2B5EF4-FFF2-40B4-BE49-F238E27FC236}">
+                <a16:creationId xmlns:a16="http://schemas.microsoft.com/office/drawing/2014/main" id="{E6225A41-BD0F-049E-B9CB-35466896A831}"/>
+              </a:ext>
+            </a:extLst>
+          </p:cNvPr>
+          <p:cNvSpPr>
+            <a:spLocks noGrp="1"/>
+          </p:cNvSpPr>
+          <p:nvPr>
+            <p:ph type="dt" sz="half" idx="10"/>
+          </p:nvPr>
+        </p:nvSpPr>
+        <p:spPr/>
+        <p:txBody>
+          <a:bodyPr/>
+          <a:lstStyle/>
+          <a:p>
+            <a:fld id="{9645C534-AD3C-41DB-B4E7-DEBFB029BEC4}" type="datetimeFigureOut">
+              <a:rPr lang="pt-BR" smtClean="0"/>
+              <a:t>24/04/2026</a:t>
+            </a:fld>
+            <a:endParaRPr lang="pt-BR" dirty="0"/>
+          </a:p>
+        </p:txBody>
+      </p:sp>
+      <p:sp>
+        <p:nvSpPr>
+          <p:cNvPr id="5" name="Espaço Reservado para Rodapé 4">
+            <a:extLst>
+              <a:ext uri="{FF2B5EF4-FFF2-40B4-BE49-F238E27FC236}">
+                <a16:creationId xmlns:a16="http://schemas.microsoft.com/office/drawing/2014/main" id="{539FCECD-224C-E264-5877-6D95040BCCDE}"/>
+              </a:ext>
+            </a:extLst>
+          </p:cNvPr>
+          <p:cNvSpPr>
+            <a:spLocks noGrp="1"/>
+          </p:cNvSpPr>
+          <p:nvPr>
+            <p:ph type="ftr" sz="quarter" idx="11"/>
+          </p:nvPr>
+        </p:nvSpPr>
+        <p:spPr/>
+        <p:txBody>
+          <a:bodyPr/>
+          <a:lstStyle/>
+          <a:p>
+            <a:endParaRPr lang="pt-BR" dirty="0"/>
+          </a:p>
+        </p:txBody>
+      </p:sp>
+      <p:sp>
+        <p:nvSpPr>
+          <p:cNvPr id="6" name="Espaço Reservado para Número de Slide 5">
+            <a:extLst>
+              <a:ext uri="{FF2B5EF4-FFF2-40B4-BE49-F238E27FC236}">
+                <a16:creationId xmlns:a16="http://schemas.microsoft.com/office/drawing/2014/main" id="{0AF5B9B9-4A66-9DE2-5450-3F993E845A8F}"/>
+              </a:ext>
+            </a:extLst>
+          </p:cNvPr>
+          <p:cNvSpPr>
+            <a:spLocks noGrp="1"/>
+          </p:cNvSpPr>
+          <p:nvPr>
+            <p:ph type="sldNum" sz="quarter" idx="12"/>
+          </p:nvPr>
+        </p:nvSpPr>
+        <p:spPr/>
+        <p:txBody>
+          <a:bodyPr/>
+          <a:lstStyle/>
+          <a:p>
+            <a:fld id="{BFC2DFD3-94E5-4E28-9B2A-AA0A72A59D00}" type="slidenum">
+              <a:rPr lang="pt-BR" smtClean="0"/>
+              <a:t>‹nº›</a:t>
+            </a:fld>
+            <a:endParaRPr lang="pt-BR"/>
+          </a:p>
+        </p:txBody>
+      </p:sp>
+    </p:spTree>
+    <p:extLst>
+      <p:ext uri="{BB962C8B-B14F-4D97-AF65-F5344CB8AC3E}">
+        <p14:creationId xmlns:p14="http://schemas.microsoft.com/office/powerpoint/2010/main" val="889517533"/>
+      </p:ext>
+    </p:extLst>
+  </p:cSld>
+  <p:clrMapOvr>
+    <a:masterClrMapping/>
+  </p:clrMapOvr>
+</p:sldLayout>
+</file>
+
+<file path=ppt/slideLayouts/slideLayout6.xml><?xml version="1.0" encoding="utf-8"?>
+<p:sldLayout xmlns:a="http://schemas.openxmlformats.org/drawingml/2006/main" xmlns:r="http://schemas.openxmlformats.org/officeDocument/2006/relationships" xmlns:p="http://schemas.openxmlformats.org/presentationml/2006/main" preserve="1" userDrawn="1">
+  <p:cSld name="1_Layout Personalizado">
+    <p:spTree>
+      <p:nvGrpSpPr>
+        <p:cNvPr id="1" name=""/>
+        <p:cNvGrpSpPr/>
+        <p:nvPr/>
+      </p:nvGrpSpPr>
+      <p:grpSpPr>
+        <a:xfrm>
+          <a:off x="0" y="0"/>
+          <a:ext cx="0" cy="0"/>
+          <a:chOff x="0" y="0"/>
+          <a:chExt cx="0" cy="0"/>
+        </a:xfrm>
+      </p:grpSpPr>
+      <p:sp>
+        <p:nvSpPr>
+          <p:cNvPr id="2" name="Título 1">
+            <a:extLst>
+              <a:ext uri="{FF2B5EF4-FFF2-40B4-BE49-F238E27FC236}">
+                <a16:creationId xmlns:a16="http://schemas.microsoft.com/office/drawing/2014/main" id="{78FDA054-6552-97C1-08C7-2C065196D7DA}"/>
+              </a:ext>
+            </a:extLst>
+          </p:cNvPr>
+          <p:cNvSpPr>
+            <a:spLocks noGrp="1"/>
+          </p:cNvSpPr>
+          <p:nvPr>
+            <p:ph type="title"/>
+          </p:nvPr>
+        </p:nvSpPr>
+        <p:spPr>
+          <a:xfrm>
+            <a:off x="838200" y="365125"/>
+            <a:ext cx="10515600" cy="1325563"/>
+          </a:xfrm>
+          <a:prstGeom prst="rect">
+            <a:avLst/>
+          </a:prstGeom>
+        </p:spPr>
+        <p:txBody>
+          <a:bodyPr/>
+          <a:lstStyle/>
+          <a:p>
+            <a:r>
+              <a:rPr lang="pt-BR"/>
+              <a:t>Clique para editar o título Mestre</a:t>
+            </a:r>
+          </a:p>
+        </p:txBody>
+      </p:sp>
+    </p:spTree>
+    <p:extLst>
+      <p:ext uri="{BB962C8B-B14F-4D97-AF65-F5344CB8AC3E}">
+        <p14:creationId xmlns:p14="http://schemas.microsoft.com/office/powerpoint/2010/main" val="177281839"/>
+      </p:ext>
+    </p:extLst>
+  </p:cSld>
+  <p:clrMapOvr>
+    <a:masterClrMapping/>
+  </p:clrMapOvr>
+</p:sldLayout>
+</file>
+
+<file path=ppt/slideLayouts/slideLayout7.xml><?xml version="1.0" encoding="utf-8"?>
+<p:sldLayout xmlns:a="http://schemas.openxmlformats.org/drawingml/2006/main" xmlns:r="http://schemas.openxmlformats.org/officeDocument/2006/relationships" xmlns:p="http://schemas.openxmlformats.org/presentationml/2006/main" type="title" preserve="1">
+  <p:cSld name="Slide de Título">
+    <p:spTree>
+      <p:nvGrpSpPr>
+        <p:cNvPr id="1" name=""/>
+        <p:cNvGrpSpPr/>
+        <p:nvPr/>
+      </p:nvGrpSpPr>
+      <p:grpSpPr>
+        <a:xfrm>
+          <a:off x="0" y="0"/>
+          <a:ext cx="0" cy="0"/>
+          <a:chOff x="0" y="0"/>
+          <a:chExt cx="0" cy="0"/>
+        </a:xfrm>
+      </p:grpSpPr>
+      <p:sp>
+        <p:nvSpPr>
+          <p:cNvPr id="2" name="Título 1">
+            <a:extLst>
+              <a:ext uri="{FF2B5EF4-FFF2-40B4-BE49-F238E27FC236}">
+                <a16:creationId xmlns:a16="http://schemas.microsoft.com/office/drawing/2014/main" id="{28ECD6E9-25D1-705D-4D4C-8D5259206AE3}"/>
+              </a:ext>
+            </a:extLst>
+          </p:cNvPr>
+          <p:cNvSpPr>
+            <a:spLocks noGrp="1"/>
+          </p:cNvSpPr>
+          <p:nvPr>
+            <p:ph type="ctrTitle"/>
+          </p:nvPr>
+        </p:nvSpPr>
+        <p:spPr>
+          <a:xfrm>
+            <a:off x="1524000" y="1122363"/>
+            <a:ext cx="9144000" cy="2387600"/>
+          </a:xfrm>
+        </p:spPr>
+        <p:txBody>
+          <a:bodyPr anchor="b"/>
+          <a:lstStyle>
+            <a:lvl1pPr algn="ctr">
+              <a:defRPr sz="6000"/>
+            </a:lvl1pPr>
+          </a:lstStyle>
+          <a:p>
+            <a:r>
+              <a:rPr lang="pt-BR"/>
+              <a:t>Clique para editar o título Mestre</a:t>
+            </a:r>
+          </a:p>
+        </p:txBody>
+      </p:sp>
+      <p:sp>
+        <p:nvSpPr>
+          <p:cNvPr id="3" name="Subtítulo 2">
+            <a:extLst>
+              <a:ext uri="{FF2B5EF4-FFF2-40B4-BE49-F238E27FC236}">
+                <a16:creationId xmlns:a16="http://schemas.microsoft.com/office/drawing/2014/main" id="{C579E6BB-D742-7C37-A465-3797CAD19328}"/>
+              </a:ext>
+            </a:extLst>
+          </p:cNvPr>
+          <p:cNvSpPr>
+            <a:spLocks noGrp="1"/>
+          </p:cNvSpPr>
+          <p:nvPr>
+            <p:ph type="subTitle" idx="1"/>
+          </p:nvPr>
+        </p:nvSpPr>
+        <p:spPr>
+          <a:xfrm>
+            <a:off x="1524000" y="3602038"/>
+            <a:ext cx="9144000" cy="1655762"/>
+          </a:xfrm>
+        </p:spPr>
+        <p:txBody>
+          <a:bodyPr/>
+          <a:lstStyle>
+            <a:lvl1pPr marL="0" indent="0" algn="ctr">
+              <a:buNone/>
+              <a:defRPr sz="2400"/>
+            </a:lvl1pPr>
+            <a:lvl2pPr marL="457200" indent="0" algn="ctr">
+              <a:buNone/>
+              <a:defRPr sz="2000"/>
+            </a:lvl2pPr>
+            <a:lvl3pPr marL="914400" indent="0" algn="ctr">
+              <a:buNone/>
+              <a:defRPr sz="1800"/>
+            </a:lvl3pPr>
+            <a:lvl4pPr marL="1371600" indent="0" algn="ctr">
+              <a:buNone/>
+              <a:defRPr sz="1600"/>
+            </a:lvl4pPr>
+            <a:lvl5pPr marL="1828800" indent="0" algn="ctr">
+              <a:buNone/>
+              <a:defRPr sz="1600"/>
+            </a:lvl5pPr>
+            <a:lvl6pPr marL="2286000" indent="0" algn="ctr">
+              <a:buNone/>
+              <a:defRPr sz="1600"/>
+            </a:lvl6pPr>
+            <a:lvl7pPr marL="2743200" indent="0" algn="ctr">
+              <a:buNone/>
+              <a:defRPr sz="1600"/>
+            </a:lvl7pPr>
+            <a:lvl8pPr marL="3200400" indent="0" algn="ctr">
+              <a:buNone/>
+              <a:defRPr sz="1600"/>
+            </a:lvl8pPr>
+            <a:lvl9pPr marL="3657600" indent="0" algn="ctr">
+              <a:buNone/>
+              <a:defRPr sz="1600"/>
+            </a:lvl9pPr>
+          </a:lstStyle>
+          <a:p>
+            <a:r>
+              <a:rPr lang="pt-BR"/>
+              <a:t>Clique para editar o estilo do subtítulo Mestre</a:t>
+            </a:r>
+          </a:p>
+        </p:txBody>
+      </p:sp>
+      <p:sp>
+        <p:nvSpPr>
+          <p:cNvPr id="4" name="Espaço Reservado para Data 3">
+            <a:extLst>
+              <a:ext uri="{FF2B5EF4-FFF2-40B4-BE49-F238E27FC236}">
+                <a16:creationId xmlns:a16="http://schemas.microsoft.com/office/drawing/2014/main" id="{24AEDE03-D45C-3BE5-A076-22568C5A701D}"/>
+              </a:ext>
+            </a:extLst>
+          </p:cNvPr>
+          <p:cNvSpPr>
+            <a:spLocks noGrp="1"/>
+          </p:cNvSpPr>
+          <p:nvPr>
+            <p:ph type="dt" sz="half" idx="10"/>
+          </p:nvPr>
+        </p:nvSpPr>
+        <p:spPr/>
+        <p:txBody>
+          <a:bodyPr/>
+          <a:lstStyle/>
+          <a:p>
+            <a:fld id="{D6507521-8C51-4813-BF91-ED62A8AF3277}" type="datetimeFigureOut">
+              <a:rPr lang="pt-BR" smtClean="0"/>
+              <a:t>24/04/2026</a:t>
+            </a:fld>
+            <a:endParaRPr lang="pt-BR"/>
+          </a:p>
+        </p:txBody>
+      </p:sp>
+      <p:sp>
+        <p:nvSpPr>
+          <p:cNvPr id="5" name="Espaço Reservado para Rodapé 4">
+            <a:extLst>
+              <a:ext uri="{FF2B5EF4-FFF2-40B4-BE49-F238E27FC236}">
+                <a16:creationId xmlns:a16="http://schemas.microsoft.com/office/drawing/2014/main" id="{A6202C7A-5CE7-E5F2-39D2-C6E471548E96}"/>
+              </a:ext>
+            </a:extLst>
+          </p:cNvPr>
+          <p:cNvSpPr>
+            <a:spLocks noGrp="1"/>
+          </p:cNvSpPr>
+          <p:nvPr>
+            <p:ph type="ftr" sz="quarter" idx="11"/>
+          </p:nvPr>
+        </p:nvSpPr>
+        <p:spPr/>
+        <p:txBody>
+          <a:bodyPr/>
+          <a:lstStyle/>
+          <a:p>
+            <a:endParaRPr lang="pt-BR"/>
+          </a:p>
+        </p:txBody>
+      </p:sp>
+      <p:sp>
+        <p:nvSpPr>
+          <p:cNvPr id="6" name="Espaço Reservado para Número de Slide 5">
+            <a:extLst>
+              <a:ext uri="{FF2B5EF4-FFF2-40B4-BE49-F238E27FC236}">
+                <a16:creationId xmlns:a16="http://schemas.microsoft.com/office/drawing/2014/main" id="{565B5D69-6911-0C46-16CD-895F5C594FED}"/>
+              </a:ext>
+            </a:extLst>
+          </p:cNvPr>
+          <p:cNvSpPr>
+            <a:spLocks noGrp="1"/>
+          </p:cNvSpPr>
+          <p:nvPr>
+            <p:ph type="sldNum" sz="quarter" idx="12"/>
+          </p:nvPr>
+        </p:nvSpPr>
+        <p:spPr/>
+        <p:txBody>
+          <a:bodyPr/>
+          <a:lstStyle/>
+          <a:p>
+            <a:fld id="{2E4A13C5-F07B-482F-913C-E6F34CF189C3}" type="slidenum">
+              <a:rPr lang="pt-BR" smtClean="0"/>
+              <a:t>‹nº›</a:t>
+            </a:fld>
+            <a:endParaRPr lang="pt-BR"/>
+          </a:p>
+        </p:txBody>
+      </p:sp>
+    </p:spTree>
+    <p:extLst>
+      <p:ext uri="{BB962C8B-B14F-4D97-AF65-F5344CB8AC3E}">
+        <p14:creationId xmlns:p14="http://schemas.microsoft.com/office/powerpoint/2010/main" val="1822716780"/>
+      </p:ext>
+    </p:extLst>
+  </p:cSld>
+  <p:clrMapOvr>
+    <a:masterClrMapping/>
+  </p:clrMapOvr>
+</p:sldLayout>
+</file>
+
+<file path=ppt/slideLayouts/slideLayout8.xml><?xml version="1.0" encoding="utf-8"?>
+<p:sldLayout xmlns:a="http://schemas.openxmlformats.org/drawingml/2006/main" xmlns:r="http://schemas.openxmlformats.org/officeDocument/2006/relationships" xmlns:p="http://schemas.openxmlformats.org/presentationml/2006/main" type="obj" preserve="1">
+  <p:cSld name="Título e Conteúdo">
+    <p:spTree>
+      <p:nvGrpSpPr>
+        <p:cNvPr id="1" name=""/>
+        <p:cNvGrpSpPr/>
+        <p:nvPr/>
+      </p:nvGrpSpPr>
+      <p:grpSpPr>
+        <a:xfrm>
+          <a:off x="0" y="0"/>
+          <a:ext cx="0" cy="0"/>
+          <a:chOff x="0" y="0"/>
+          <a:chExt cx="0" cy="0"/>
+        </a:xfrm>
+      </p:grpSpPr>
+      <p:sp>
+        <p:nvSpPr>
+          <p:cNvPr id="2" name="Título 1">
+            <a:extLst>
+              <a:ext uri="{FF2B5EF4-FFF2-40B4-BE49-F238E27FC236}">
+                <a16:creationId xmlns:a16="http://schemas.microsoft.com/office/drawing/2014/main" id="{2134FFB9-07EC-6172-1212-34AA3248062D}"/>
+              </a:ext>
+            </a:extLst>
+          </p:cNvPr>
+          <p:cNvSpPr>
+            <a:spLocks noGrp="1"/>
+          </p:cNvSpPr>
+          <p:nvPr>
+            <p:ph type="title"/>
+          </p:nvPr>
+        </p:nvSpPr>
+        <p:spPr/>
+        <p:txBody>
+          <a:bodyPr/>
+          <a:lstStyle/>
+          <a:p>
+            <a:r>
+              <a:rPr lang="pt-BR"/>
+              <a:t>Clique para editar o título Mestre</a:t>
+            </a:r>
+          </a:p>
+        </p:txBody>
+      </p:sp>
+      <p:sp>
+        <p:nvSpPr>
+          <p:cNvPr id="3" name="Espaço Reservado para Conteúdo 2">
+            <a:extLst>
+              <a:ext uri="{FF2B5EF4-FFF2-40B4-BE49-F238E27FC236}">
+                <a16:creationId xmlns:a16="http://schemas.microsoft.com/office/drawing/2014/main" id="{F45FFA75-3A51-70FE-7167-396EA91FFD34}"/>
+              </a:ext>
+            </a:extLst>
+          </p:cNvPr>
+          <p:cNvSpPr>
+            <a:spLocks noGrp="1"/>
+          </p:cNvSpPr>
+          <p:nvPr>
+            <p:ph idx="1"/>
+          </p:nvPr>
+        </p:nvSpPr>
+        <p:spPr/>
+        <p:txBody>
+          <a:bodyPr/>
+          <a:lstStyle/>
+          <a:p>
+            <a:pPr lvl="0"/>
+            <a:r>
+              <a:rPr lang="pt-BR"/>
+              <a:t>Clique para editar os estilos de texto Mestres</a:t>
+            </a:r>
+          </a:p>
+          <a:p>
+            <a:pPr lvl="1"/>
+            <a:r>
+              <a:rPr lang="pt-BR"/>
+              <a:t>Segundo nível</a:t>
+            </a:r>
+          </a:p>
+          <a:p>
+            <a:pPr lvl="2"/>
+            <a:r>
+              <a:rPr lang="pt-BR"/>
+              <a:t>Terceiro nível</a:t>
+            </a:r>
+          </a:p>
+          <a:p>
+            <a:pPr lvl="3"/>
+            <a:r>
+              <a:rPr lang="pt-BR"/>
+              <a:t>Quarto nível</a:t>
+            </a:r>
+          </a:p>
+          <a:p>
+            <a:pPr lvl="4"/>
+            <a:r>
+              <a:rPr lang="pt-BR"/>
+              <a:t>Quinto nível</a:t>
+            </a:r>
+          </a:p>
+        </p:txBody>
+      </p:sp>
+      <p:sp>
+        <p:nvSpPr>
+          <p:cNvPr id="4" name="Espaço Reservado para Data 3">
+            <a:extLst>
+              <a:ext uri="{FF2B5EF4-FFF2-40B4-BE49-F238E27FC236}">
+                <a16:creationId xmlns:a16="http://schemas.microsoft.com/office/drawing/2014/main" id="{6CD51970-FFB9-A3B2-D977-60F011107848}"/>
+              </a:ext>
+            </a:extLst>
+          </p:cNvPr>
+          <p:cNvSpPr>
+            <a:spLocks noGrp="1"/>
+          </p:cNvSpPr>
+          <p:nvPr>
+            <p:ph type="dt" sz="half" idx="10"/>
+          </p:nvPr>
+        </p:nvSpPr>
+        <p:spPr/>
+        <p:txBody>
+          <a:bodyPr/>
+          <a:lstStyle/>
+          <a:p>
+            <a:fld id="{D6507521-8C51-4813-BF91-ED62A8AF3277}" type="datetimeFigureOut">
+              <a:rPr lang="pt-BR" smtClean="0"/>
+              <a:t>24/04/2026</a:t>
+            </a:fld>
+            <a:endParaRPr lang="pt-BR"/>
+          </a:p>
+        </p:txBody>
+      </p:sp>
+      <p:sp>
+        <p:nvSpPr>
+          <p:cNvPr id="5" name="Espaço Reservado para Rodapé 4">
+            <a:extLst>
+              <a:ext uri="{FF2B5EF4-FFF2-40B4-BE49-F238E27FC236}">
+                <a16:creationId xmlns:a16="http://schemas.microsoft.com/office/drawing/2014/main" id="{01E2CDBE-4AC6-107E-3E56-8387FF288799}"/>
+              </a:ext>
+            </a:extLst>
+          </p:cNvPr>
+          <p:cNvSpPr>
+            <a:spLocks noGrp="1"/>
+          </p:cNvSpPr>
+          <p:nvPr>
+            <p:ph type="ftr" sz="quarter" idx="11"/>
+          </p:nvPr>
+        </p:nvSpPr>
+        <p:spPr/>
+        <p:txBody>
+          <a:bodyPr/>
+          <a:lstStyle/>
+          <a:p>
+            <a:endParaRPr lang="pt-BR"/>
+          </a:p>
+        </p:txBody>
+      </p:sp>
+      <p:sp>
+        <p:nvSpPr>
+          <p:cNvPr id="6" name="Espaço Reservado para Número de Slide 5">
+            <a:extLst>
+              <a:ext uri="{FF2B5EF4-FFF2-40B4-BE49-F238E27FC236}">
+                <a16:creationId xmlns:a16="http://schemas.microsoft.com/office/drawing/2014/main" id="{2DDD5DFC-4025-0D3A-30BE-D32ACAA9FD65}"/>
+              </a:ext>
+            </a:extLst>
+          </p:cNvPr>
+          <p:cNvSpPr>
+            <a:spLocks noGrp="1"/>
+          </p:cNvSpPr>
+          <p:nvPr>
+            <p:ph type="sldNum" sz="quarter" idx="12"/>
+          </p:nvPr>
+        </p:nvSpPr>
+        <p:spPr/>
+        <p:txBody>
+          <a:bodyPr/>
+          <a:lstStyle/>
+          <a:p>
+            <a:fld id="{2E4A13C5-F07B-482F-913C-E6F34CF189C3}" type="slidenum">
+              <a:rPr lang="pt-BR" smtClean="0"/>
+              <a:t>‹nº›</a:t>
+            </a:fld>
+            <a:endParaRPr lang="pt-BR"/>
+          </a:p>
+        </p:txBody>
+      </p:sp>
+    </p:spTree>
+    <p:extLst>
+      <p:ext uri="{BB962C8B-B14F-4D97-AF65-F5344CB8AC3E}">
+        <p14:creationId xmlns:p14="http://schemas.microsoft.com/office/powerpoint/2010/main" val="515513454"/>
+      </p:ext>
+    </p:extLst>
+  </p:cSld>
+  <p:clrMapOvr>
+    <a:masterClrMapping/>
+  </p:clrMapOvr>
+</p:sldLayout>
+</file>
+
+<file path=ppt/slideLayouts/slideLayout9.xml><?xml version="1.0" encoding="utf-8"?>
+<p:sldLayout xmlns:a="http://schemas.openxmlformats.org/drawingml/2006/main" xmlns:r="http://schemas.openxmlformats.org/officeDocument/2006/relationships" xmlns:p="http://schemas.openxmlformats.org/presentationml/2006/main" type="secHead" preserve="1">
+  <p:cSld name="Cabeçalho da Seção">
+    <p:spTree>
+      <p:nvGrpSpPr>
+        <p:cNvPr id="1" name=""/>
+        <p:cNvGrpSpPr/>
+        <p:nvPr/>
+      </p:nvGrpSpPr>
+      <p:grpSpPr>
+        <a:xfrm>
+          <a:off x="0" y="0"/>
+          <a:ext cx="0" cy="0"/>
+          <a:chOff x="0" y="0"/>
+          <a:chExt cx="0" cy="0"/>
+        </a:xfrm>
+      </p:grpSpPr>
+      <p:sp>
+        <p:nvSpPr>
+          <p:cNvPr id="2" name="Título 1">
+            <a:extLst>
+              <a:ext uri="{FF2B5EF4-FFF2-40B4-BE49-F238E27FC236}">
+                <a16:creationId xmlns:a16="http://schemas.microsoft.com/office/drawing/2014/main" id="{2D0F0CFF-A89E-B053-80AF-04D5FA6A4A60}"/>
+              </a:ext>
+            </a:extLst>
+          </p:cNvPr>
+          <p:cNvSpPr>
+            <a:spLocks noGrp="1"/>
+          </p:cNvSpPr>
+          <p:nvPr>
+            <p:ph type="title"/>
+          </p:nvPr>
+        </p:nvSpPr>
+        <p:spPr>
+          <a:xfrm>
+            <a:off x="831850" y="1709738"/>
+            <a:ext cx="10515600" cy="2852737"/>
+          </a:xfrm>
+        </p:spPr>
+        <p:txBody>
+          <a:bodyPr anchor="b"/>
+          <a:lstStyle>
+            <a:lvl1pPr>
+              <a:defRPr sz="6000"/>
+            </a:lvl1pPr>
+          </a:lstStyle>
+          <a:p>
+            <a:r>
+              <a:rPr lang="pt-BR"/>
+              <a:t>Clique para editar o título Mestre</a:t>
+            </a:r>
+          </a:p>
+        </p:txBody>
+      </p:sp>
+      <p:sp>
+        <p:nvSpPr>
+          <p:cNvPr id="3" name="Espaço Reservado para Texto 2">
+            <a:extLst>
+              <a:ext uri="{FF2B5EF4-FFF2-40B4-BE49-F238E27FC236}">
+                <a16:creationId xmlns:a16="http://schemas.microsoft.com/office/drawing/2014/main" id="{7A26B97D-B02B-A8C7-1B10-490FF74FA756}"/>
+              </a:ext>
+            </a:extLst>
+          </p:cNvPr>
+          <p:cNvSpPr>
+            <a:spLocks noGrp="1"/>
+          </p:cNvSpPr>
+          <p:nvPr>
+            <p:ph type="body" idx="1"/>
+          </p:nvPr>
+        </p:nvSpPr>
+        <p:spPr>
+          <a:xfrm>
+            <a:off x="831850" y="4589463"/>
+            <a:ext cx="10515600" cy="1500187"/>
+          </a:xfrm>
+        </p:spPr>
+        <p:txBody>
+          <a:bodyPr/>
+          <a:lstStyle>
+            <a:lvl1pPr marL="0" indent="0">
+              <a:buNone/>
+              <a:defRPr sz="2400">
+                <a:solidFill>
+                  <a:schemeClr val="tx1">
+                    <a:tint val="82000"/>
+                  </a:schemeClr>
+                </a:solidFill>
+              </a:defRPr>
+            </a:lvl1pPr>
+            <a:lvl2pPr marL="457200" indent="0">
+              <a:buNone/>
+              <a:defRPr sz="2000">
+                <a:solidFill>
+                  <a:schemeClr val="tx1">
+                    <a:tint val="82000"/>
+                  </a:schemeClr>
+                </a:solidFill>
+              </a:defRPr>
+            </a:lvl2pPr>
+            <a:lvl3pPr marL="914400" indent="0">
+              <a:buNone/>
+              <a:defRPr sz="1800">
+                <a:solidFill>
+                  <a:schemeClr val="tx1">
+                    <a:tint val="82000"/>
+                  </a:schemeClr>
+                </a:solidFill>
+              </a:defRPr>
+            </a:lvl3pPr>
+            <a:lvl4pPr marL="1371600" indent="0">
+              <a:buNone/>
+              <a:defRPr sz="1600">
+                <a:solidFill>
+                  <a:schemeClr val="tx1">
+                    <a:tint val="82000"/>
+                  </a:schemeClr>
+                </a:solidFill>
+              </a:defRPr>
+            </a:lvl4pPr>
+            <a:lvl5pPr marL="1828800" indent="0">
+              <a:buNone/>
+              <a:defRPr sz="1600">
+                <a:solidFill>
+                  <a:schemeClr val="tx1">
+                    <a:tint val="82000"/>
+                  </a:schemeClr>
+                </a:solidFill>
+              </a:defRPr>
+            </a:lvl5pPr>
+            <a:lvl6pPr marL="2286000" indent="0">
+              <a:buNone/>
+              <a:defRPr sz="1600">
+                <a:solidFill>
+                  <a:schemeClr val="tx1">
+                    <a:tint val="82000"/>
+                  </a:schemeClr>
+                </a:solidFill>
+              </a:defRPr>
+            </a:lvl6pPr>
+            <a:lvl7pPr marL="2743200" indent="0">
+              <a:buNone/>
+              <a:defRPr sz="1600">
+                <a:solidFill>
+                  <a:schemeClr val="tx1">
+                    <a:tint val="82000"/>
+                  </a:schemeClr>
+                </a:solidFill>
+              </a:defRPr>
+            </a:lvl7pPr>
+            <a:lvl8pPr marL="3200400" indent="0">
+              <a:buNone/>
+              <a:defRPr sz="1600">
+                <a:solidFill>
+                  <a:schemeClr val="tx1">
+                    <a:tint val="82000"/>
+                  </a:schemeClr>
+                </a:solidFill>
+              </a:defRPr>
+            </a:lvl8pPr>
+            <a:lvl9pPr marL="3657600" indent="0">
+              <a:buNone/>
+              <a:defRPr sz="1600">
+                <a:solidFill>
+                  <a:schemeClr val="tx1">
+                    <a:tint val="82000"/>
+                  </a:schemeClr>
+                </a:solidFill>
+              </a:defRPr>
+            </a:lvl9pPr>
+          </a:lstStyle>
+          <a:p>
+            <a:pPr lvl="0"/>
+            <a:r>
+              <a:rPr lang="pt-BR"/>
+              <a:t>Clique para editar os estilos de texto Mestres</a:t>
+            </a:r>
+          </a:p>
+        </p:txBody>
+      </p:sp>
+      <p:sp>
+        <p:nvSpPr>
+          <p:cNvPr id="4" name="Espaço Reservado para Data 3">
+            <a:extLst>
+              <a:ext uri="{FF2B5EF4-FFF2-40B4-BE49-F238E27FC236}">
+                <a16:creationId xmlns:a16="http://schemas.microsoft.com/office/drawing/2014/main" id="{731E4DAE-9B9C-E52B-EA5C-9D972CE5F1FB}"/>
+              </a:ext>
+            </a:extLst>
+          </p:cNvPr>
+          <p:cNvSpPr>
+            <a:spLocks noGrp="1"/>
+          </p:cNvSpPr>
+          <p:nvPr>
+            <p:ph type="dt" sz="half" idx="10"/>
+          </p:nvPr>
+        </p:nvSpPr>
+        <p:spPr/>
+        <p:txBody>
+          <a:bodyPr/>
+          <a:lstStyle/>
+          <a:p>
+            <a:fld id="{D6507521-8C51-4813-BF91-ED62A8AF3277}" type="datetimeFigureOut">
+              <a:rPr lang="pt-BR" smtClean="0"/>
+              <a:t>24/04/2026</a:t>
+            </a:fld>
+            <a:endParaRPr lang="pt-BR"/>
+          </a:p>
+        </p:txBody>
+      </p:sp>
+      <p:sp>
+        <p:nvSpPr>
+          <p:cNvPr id="5" name="Espaço Reservado para Rodapé 4">
+            <a:extLst>
+              <a:ext uri="{FF2B5EF4-FFF2-40B4-BE49-F238E27FC236}">
+                <a16:creationId xmlns:a16="http://schemas.microsoft.com/office/drawing/2014/main" id="{6AEDD059-4B86-663B-11D1-0F25AE764BEB}"/>
+              </a:ext>
+            </a:extLst>
+          </p:cNvPr>
+          <p:cNvSpPr>
+            <a:spLocks noGrp="1"/>
+          </p:cNvSpPr>
+          <p:nvPr>
+            <p:ph type="ftr" sz="quarter" idx="11"/>
+          </p:nvPr>
+        </p:nvSpPr>
+        <p:spPr/>
+        <p:txBody>
+          <a:bodyPr/>
+          <a:lstStyle/>
+          <a:p>
+            <a:endParaRPr lang="pt-BR"/>
+          </a:p>
+        </p:txBody>
+      </p:sp>
+      <p:sp>
+        <p:nvSpPr>
+          <p:cNvPr id="6" name="Espaço Reservado para Número de Slide 5">
+            <a:extLst>
+              <a:ext uri="{FF2B5EF4-FFF2-40B4-BE49-F238E27FC236}">
+                <a16:creationId xmlns:a16="http://schemas.microsoft.com/office/drawing/2014/main" id="{5B34BB2C-8EBB-E4FC-A9D1-ADE05B1C4C48}"/>
+              </a:ext>
+            </a:extLst>
+          </p:cNvPr>
+          <p:cNvSpPr>
+            <a:spLocks noGrp="1"/>
+          </p:cNvSpPr>
+          <p:nvPr>
+            <p:ph type="sldNum" sz="quarter" idx="12"/>
+          </p:nvPr>
+        </p:nvSpPr>
+        <p:spPr/>
+        <p:txBody>
+          <a:bodyPr/>
+          <a:lstStyle/>
+          <a:p>
+            <a:fld id="{2E4A13C5-F07B-482F-913C-E6F34CF189C3}" type="slidenum">
+              <a:rPr lang="pt-BR" smtClean="0"/>
+              <a:t>‹nº›</a:t>
+            </a:fld>
+            <a:endParaRPr lang="pt-BR"/>
+          </a:p>
+        </p:txBody>
+      </p:sp>
+    </p:spTree>
+    <p:extLst>
+      <p:ext uri="{BB962C8B-B14F-4D97-AF65-F5344CB8AC3E}">
+        <p14:creationId xmlns:p14="http://schemas.microsoft.com/office/powerpoint/2010/main" val="1795536212"/>
       </p:ext>
     </p:extLst>
   </p:cSld>
@@ -509,7 +3776,578 @@
   <p:sldLayoutIdLst>
     <p:sldLayoutId id="2147483649" r:id="rId1"/>
     <p:sldLayoutId id="2147483650" r:id="rId2"/>
-    <p:sldLayoutId id="2147483651" r:id="rId3"/>
+    <p:sldLayoutId id="2147483652" r:id="rId3"/>
+    <p:sldLayoutId id="2147483651" r:id="rId4"/>
+    <p:sldLayoutId id="2147483656" r:id="rId5"/>
+    <p:sldLayoutId id="2147483657" r:id="rId6"/>
+  </p:sldLayoutIdLst>
+  <p:txStyles>
+    <p:titleStyle>
+      <a:lvl1pPr algn="l" defTabSz="914400" rtl="0" eaLnBrk="1" latinLnBrk="0" hangingPunct="1">
+        <a:lnSpc>
+          <a:spcPct val="90000"/>
+        </a:lnSpc>
+        <a:spcBef>
+          <a:spcPct val="0"/>
+        </a:spcBef>
+        <a:buNone/>
+        <a:defRPr sz="4400" kern="1200">
+          <a:solidFill>
+            <a:schemeClr val="tx1"/>
+          </a:solidFill>
+          <a:latin typeface="+mj-lt"/>
+          <a:ea typeface="+mj-ea"/>
+          <a:cs typeface="+mj-cs"/>
+        </a:defRPr>
+      </a:lvl1pPr>
+    </p:titleStyle>
+    <p:bodyStyle>
+      <a:lvl1pPr marL="228600" indent="-228600" algn="l" defTabSz="914400" rtl="0" eaLnBrk="1" latinLnBrk="0" hangingPunct="1">
+        <a:lnSpc>
+          <a:spcPct val="90000"/>
+        </a:lnSpc>
+        <a:spcBef>
+          <a:spcPts val="1000"/>
+        </a:spcBef>
+        <a:buFont typeface="Arial" panose="020B0604020202020204" pitchFamily="34" charset="0"/>
+        <a:buChar char="•"/>
+        <a:defRPr sz="2800" kern="1200">
+          <a:solidFill>
+            <a:schemeClr val="tx1"/>
+          </a:solidFill>
+          <a:latin typeface="+mn-lt"/>
+          <a:ea typeface="+mn-ea"/>
+          <a:cs typeface="+mn-cs"/>
+        </a:defRPr>
+      </a:lvl1pPr>
+      <a:lvl2pPr marL="685800" indent="-228600" algn="l" defTabSz="914400" rtl="0" eaLnBrk="1" latinLnBrk="0" hangingPunct="1">
+        <a:lnSpc>
+          <a:spcPct val="90000"/>
+        </a:lnSpc>
+        <a:spcBef>
+          <a:spcPts val="500"/>
+        </a:spcBef>
+        <a:buFont typeface="Arial" panose="020B0604020202020204" pitchFamily="34" charset="0"/>
+        <a:buChar char="•"/>
+        <a:defRPr sz="2400" kern="1200">
+          <a:solidFill>
+            <a:schemeClr val="tx1"/>
+          </a:solidFill>
+          <a:latin typeface="+mn-lt"/>
+          <a:ea typeface="+mn-ea"/>
+          <a:cs typeface="+mn-cs"/>
+        </a:defRPr>
+      </a:lvl2pPr>
+      <a:lvl3pPr marL="1143000" indent="-228600" algn="l" defTabSz="914400" rtl="0" eaLnBrk="1" latinLnBrk="0" hangingPunct="1">
+        <a:lnSpc>
+          <a:spcPct val="90000"/>
+        </a:lnSpc>
+        <a:spcBef>
+          <a:spcPts val="500"/>
+        </a:spcBef>
+        <a:buFont typeface="Arial" panose="020B0604020202020204" pitchFamily="34" charset="0"/>
+        <a:buChar char="•"/>
+        <a:defRPr sz="2000" kern="1200">
+          <a:solidFill>
+            <a:schemeClr val="tx1"/>
+          </a:solidFill>
+          <a:latin typeface="+mn-lt"/>
+          <a:ea typeface="+mn-ea"/>
+          <a:cs typeface="+mn-cs"/>
+        </a:defRPr>
+      </a:lvl3pPr>
+      <a:lvl4pPr marL="1600200" indent="-228600" algn="l" defTabSz="914400" rtl="0" eaLnBrk="1" latinLnBrk="0" hangingPunct="1">
+        <a:lnSpc>
+          <a:spcPct val="90000"/>
+        </a:lnSpc>
+        <a:spcBef>
+          <a:spcPts val="500"/>
+        </a:spcBef>
+        <a:buFont typeface="Arial" panose="020B0604020202020204" pitchFamily="34" charset="0"/>
+        <a:buChar char="•"/>
+        <a:defRPr sz="1800" kern="1200">
+          <a:solidFill>
+            <a:schemeClr val="tx1"/>
+          </a:solidFill>
+          <a:latin typeface="+mn-lt"/>
+          <a:ea typeface="+mn-ea"/>
+          <a:cs typeface="+mn-cs"/>
+        </a:defRPr>
+      </a:lvl4pPr>
+      <a:lvl5pPr marL="2057400" indent="-228600" algn="l" defTabSz="914400" rtl="0" eaLnBrk="1" latinLnBrk="0" hangingPunct="1">
+        <a:lnSpc>
+          <a:spcPct val="90000"/>
+        </a:lnSpc>
+        <a:spcBef>
+          <a:spcPts val="500"/>
+        </a:spcBef>
+        <a:buFont typeface="Arial" panose="020B0604020202020204" pitchFamily="34" charset="0"/>
+        <a:buChar char="•"/>
+        <a:defRPr sz="1800" kern="1200">
+          <a:solidFill>
+            <a:schemeClr val="tx1"/>
+          </a:solidFill>
+          <a:latin typeface="+mn-lt"/>
+          <a:ea typeface="+mn-ea"/>
+          <a:cs typeface="+mn-cs"/>
+        </a:defRPr>
+      </a:lvl5pPr>
+      <a:lvl6pPr marL="2514600" indent="-228600" algn="l" defTabSz="914400" rtl="0" eaLnBrk="1" latinLnBrk="0" hangingPunct="1">
+        <a:lnSpc>
+          <a:spcPct val="90000"/>
+        </a:lnSpc>
+        <a:spcBef>
+          <a:spcPts val="500"/>
+        </a:spcBef>
+        <a:buFont typeface="Arial" panose="020B0604020202020204" pitchFamily="34" charset="0"/>
+        <a:buChar char="•"/>
+        <a:defRPr sz="1800" kern="1200">
+          <a:solidFill>
+            <a:schemeClr val="tx1"/>
+          </a:solidFill>
+          <a:latin typeface="+mn-lt"/>
+          <a:ea typeface="+mn-ea"/>
+          <a:cs typeface="+mn-cs"/>
+        </a:defRPr>
+      </a:lvl6pPr>
+      <a:lvl7pPr marL="2971800" indent="-228600" algn="l" defTabSz="914400" rtl="0" eaLnBrk="1" latinLnBrk="0" hangingPunct="1">
+        <a:lnSpc>
+          <a:spcPct val="90000"/>
+        </a:lnSpc>
+        <a:spcBef>
+          <a:spcPts val="500"/>
+        </a:spcBef>
+        <a:buFont typeface="Arial" panose="020B0604020202020204" pitchFamily="34" charset="0"/>
+        <a:buChar char="•"/>
+        <a:defRPr sz="1800" kern="1200">
+          <a:solidFill>
+            <a:schemeClr val="tx1"/>
+          </a:solidFill>
+          <a:latin typeface="+mn-lt"/>
+          <a:ea typeface="+mn-ea"/>
+          <a:cs typeface="+mn-cs"/>
+        </a:defRPr>
+      </a:lvl7pPr>
+      <a:lvl8pPr marL="3429000" indent="-228600" algn="l" defTabSz="914400" rtl="0" eaLnBrk="1" latinLnBrk="0" hangingPunct="1">
+        <a:lnSpc>
+          <a:spcPct val="90000"/>
+        </a:lnSpc>
+        <a:spcBef>
+          <a:spcPts val="500"/>
+        </a:spcBef>
+        <a:buFont typeface="Arial" panose="020B0604020202020204" pitchFamily="34" charset="0"/>
+        <a:buChar char="•"/>
+        <a:defRPr sz="1800" kern="1200">
+          <a:solidFill>
+            <a:schemeClr val="tx1"/>
+          </a:solidFill>
+          <a:latin typeface="+mn-lt"/>
+          <a:ea typeface="+mn-ea"/>
+          <a:cs typeface="+mn-cs"/>
+        </a:defRPr>
+      </a:lvl8pPr>
+      <a:lvl9pPr marL="3886200" indent="-228600" algn="l" defTabSz="914400" rtl="0" eaLnBrk="1" latinLnBrk="0" hangingPunct="1">
+        <a:lnSpc>
+          <a:spcPct val="90000"/>
+        </a:lnSpc>
+        <a:spcBef>
+          <a:spcPts val="500"/>
+        </a:spcBef>
+        <a:buFont typeface="Arial" panose="020B0604020202020204" pitchFamily="34" charset="0"/>
+        <a:buChar char="•"/>
+        <a:defRPr sz="1800" kern="1200">
+          <a:solidFill>
+            <a:schemeClr val="tx1"/>
+          </a:solidFill>
+          <a:latin typeface="+mn-lt"/>
+          <a:ea typeface="+mn-ea"/>
+          <a:cs typeface="+mn-cs"/>
+        </a:defRPr>
+      </a:lvl9pPr>
+    </p:bodyStyle>
+    <p:otherStyle>
+      <a:defPPr>
+        <a:defRPr lang="pt-BR"/>
+      </a:defPPr>
+      <a:lvl1pPr marL="0" algn="l" defTabSz="914400" rtl="0" eaLnBrk="1" latinLnBrk="0" hangingPunct="1">
+        <a:defRPr sz="1800" kern="1200">
+          <a:solidFill>
+            <a:schemeClr val="tx1"/>
+          </a:solidFill>
+          <a:latin typeface="+mn-lt"/>
+          <a:ea typeface="+mn-ea"/>
+          <a:cs typeface="+mn-cs"/>
+        </a:defRPr>
+      </a:lvl1pPr>
+      <a:lvl2pPr marL="457200" algn="l" defTabSz="914400" rtl="0" eaLnBrk="1" latinLnBrk="0" hangingPunct="1">
+        <a:defRPr sz="1800" kern="1200">
+          <a:solidFill>
+            <a:schemeClr val="tx1"/>
+          </a:solidFill>
+          <a:latin typeface="+mn-lt"/>
+          <a:ea typeface="+mn-ea"/>
+          <a:cs typeface="+mn-cs"/>
+        </a:defRPr>
+      </a:lvl2pPr>
+      <a:lvl3pPr marL="914400" algn="l" defTabSz="914400" rtl="0" eaLnBrk="1" latinLnBrk="0" hangingPunct="1">
+        <a:defRPr sz="1800" kern="1200">
+          <a:solidFill>
+            <a:schemeClr val="tx1"/>
+          </a:solidFill>
+          <a:latin typeface="+mn-lt"/>
+          <a:ea typeface="+mn-ea"/>
+          <a:cs typeface="+mn-cs"/>
+        </a:defRPr>
+      </a:lvl3pPr>
+      <a:lvl4pPr marL="1371600" algn="l" defTabSz="914400" rtl="0" eaLnBrk="1" latinLnBrk="0" hangingPunct="1">
+        <a:defRPr sz="1800" kern="1200">
+          <a:solidFill>
+            <a:schemeClr val="tx1"/>
+          </a:solidFill>
+          <a:latin typeface="+mn-lt"/>
+          <a:ea typeface="+mn-ea"/>
+          <a:cs typeface="+mn-cs"/>
+        </a:defRPr>
+      </a:lvl4pPr>
+      <a:lvl5pPr marL="1828800" algn="l" defTabSz="914400" rtl="0" eaLnBrk="1" latinLnBrk="0" hangingPunct="1">
+        <a:defRPr sz="1800" kern="1200">
+          <a:solidFill>
+            <a:schemeClr val="tx1"/>
+          </a:solidFill>
+          <a:latin typeface="+mn-lt"/>
+          <a:ea typeface="+mn-ea"/>
+          <a:cs typeface="+mn-cs"/>
+        </a:defRPr>
+      </a:lvl5pPr>
+      <a:lvl6pPr marL="2286000" algn="l" defTabSz="914400" rtl="0" eaLnBrk="1" latinLnBrk="0" hangingPunct="1">
+        <a:defRPr sz="1800" kern="1200">
+          <a:solidFill>
+            <a:schemeClr val="tx1"/>
+          </a:solidFill>
+          <a:latin typeface="+mn-lt"/>
+          <a:ea typeface="+mn-ea"/>
+          <a:cs typeface="+mn-cs"/>
+        </a:defRPr>
+      </a:lvl6pPr>
+      <a:lvl7pPr marL="2743200" algn="l" defTabSz="914400" rtl="0" eaLnBrk="1" latinLnBrk="0" hangingPunct="1">
+        <a:defRPr sz="1800" kern="1200">
+          <a:solidFill>
+            <a:schemeClr val="tx1"/>
+          </a:solidFill>
+          <a:latin typeface="+mn-lt"/>
+          <a:ea typeface="+mn-ea"/>
+          <a:cs typeface="+mn-cs"/>
+        </a:defRPr>
+      </a:lvl7pPr>
+      <a:lvl8pPr marL="3200400" algn="l" defTabSz="914400" rtl="0" eaLnBrk="1" latinLnBrk="0" hangingPunct="1">
+        <a:defRPr sz="1800" kern="1200">
+          <a:solidFill>
+            <a:schemeClr val="tx1"/>
+          </a:solidFill>
+          <a:latin typeface="+mn-lt"/>
+          <a:ea typeface="+mn-ea"/>
+          <a:cs typeface="+mn-cs"/>
+        </a:defRPr>
+      </a:lvl8pPr>
+      <a:lvl9pPr marL="3657600" algn="l" defTabSz="914400" rtl="0" eaLnBrk="1" latinLnBrk="0" hangingPunct="1">
+        <a:defRPr sz="1800" kern="1200">
+          <a:solidFill>
+            <a:schemeClr val="tx1"/>
+          </a:solidFill>
+          <a:latin typeface="+mn-lt"/>
+          <a:ea typeface="+mn-ea"/>
+          <a:cs typeface="+mn-cs"/>
+        </a:defRPr>
+      </a:lvl9pPr>
+    </p:otherStyle>
+  </p:txStyles>
+</p:sldMaster>
+</file>
+
+<file path=ppt/slideMasters/slideMaster2.xml><?xml version="1.0" encoding="utf-8"?>
+<p:sldMaster xmlns:a="http://schemas.openxmlformats.org/drawingml/2006/main" xmlns:r="http://schemas.openxmlformats.org/officeDocument/2006/relationships" xmlns:p="http://schemas.openxmlformats.org/presentationml/2006/main" preserve="1">
+  <p:cSld>
+    <p:bg>
+      <p:bgRef idx="1001">
+        <a:schemeClr val="bg1"/>
+      </p:bgRef>
+    </p:bg>
+    <p:spTree>
+      <p:nvGrpSpPr>
+        <p:cNvPr id="1" name=""/>
+        <p:cNvGrpSpPr/>
+        <p:nvPr/>
+      </p:nvGrpSpPr>
+      <p:grpSpPr>
+        <a:xfrm>
+          <a:off x="0" y="0"/>
+          <a:ext cx="0" cy="0"/>
+          <a:chOff x="0" y="0"/>
+          <a:chExt cx="0" cy="0"/>
+        </a:xfrm>
+      </p:grpSpPr>
+      <p:sp>
+        <p:nvSpPr>
+          <p:cNvPr id="2" name="Espaço Reservado para Título 1">
+            <a:extLst>
+              <a:ext uri="{FF2B5EF4-FFF2-40B4-BE49-F238E27FC236}">
+                <a16:creationId xmlns:a16="http://schemas.microsoft.com/office/drawing/2014/main" id="{BF4BE8F4-17FA-8D68-3294-438EF02BE80D}"/>
+              </a:ext>
+            </a:extLst>
+          </p:cNvPr>
+          <p:cNvSpPr>
+            <a:spLocks noGrp="1"/>
+          </p:cNvSpPr>
+          <p:nvPr>
+            <p:ph type="title"/>
+          </p:nvPr>
+        </p:nvSpPr>
+        <p:spPr>
+          <a:xfrm>
+            <a:off x="838200" y="365125"/>
+            <a:ext cx="10515600" cy="1325563"/>
+          </a:xfrm>
+          <a:prstGeom prst="rect">
+            <a:avLst/>
+          </a:prstGeom>
+        </p:spPr>
+        <p:txBody>
+          <a:bodyPr vert="horz" lIns="91440" tIns="45720" rIns="91440" bIns="45720" rtlCol="0" anchor="ctr">
+            <a:normAutofit/>
+          </a:bodyPr>
+          <a:lstStyle/>
+          <a:p>
+            <a:r>
+              <a:rPr lang="pt-BR"/>
+              <a:t>Clique para editar o título Mestre</a:t>
+            </a:r>
+          </a:p>
+        </p:txBody>
+      </p:sp>
+      <p:sp>
+        <p:nvSpPr>
+          <p:cNvPr id="3" name="Espaço Reservado para Texto 2">
+            <a:extLst>
+              <a:ext uri="{FF2B5EF4-FFF2-40B4-BE49-F238E27FC236}">
+                <a16:creationId xmlns:a16="http://schemas.microsoft.com/office/drawing/2014/main" id="{A92012F4-30D6-4A1C-BB2B-EFDCF8A67BD1}"/>
+              </a:ext>
+            </a:extLst>
+          </p:cNvPr>
+          <p:cNvSpPr>
+            <a:spLocks noGrp="1"/>
+          </p:cNvSpPr>
+          <p:nvPr>
+            <p:ph type="body" idx="1"/>
+          </p:nvPr>
+        </p:nvSpPr>
+        <p:spPr>
+          <a:xfrm>
+            <a:off x="838200" y="1825625"/>
+            <a:ext cx="10515600" cy="4351338"/>
+          </a:xfrm>
+          <a:prstGeom prst="rect">
+            <a:avLst/>
+          </a:prstGeom>
+        </p:spPr>
+        <p:txBody>
+          <a:bodyPr vert="horz" lIns="91440" tIns="45720" rIns="91440" bIns="45720" rtlCol="0">
+            <a:normAutofit/>
+          </a:bodyPr>
+          <a:lstStyle/>
+          <a:p>
+            <a:pPr lvl="0"/>
+            <a:r>
+              <a:rPr lang="pt-BR"/>
+              <a:t>Clique para editar os estilos de texto Mestres</a:t>
+            </a:r>
+          </a:p>
+          <a:p>
+            <a:pPr lvl="1"/>
+            <a:r>
+              <a:rPr lang="pt-BR"/>
+              <a:t>Segundo nível</a:t>
+            </a:r>
+          </a:p>
+          <a:p>
+            <a:pPr lvl="2"/>
+            <a:r>
+              <a:rPr lang="pt-BR"/>
+              <a:t>Terceiro nível</a:t>
+            </a:r>
+          </a:p>
+          <a:p>
+            <a:pPr lvl="3"/>
+            <a:r>
+              <a:rPr lang="pt-BR"/>
+              <a:t>Quarto nível</a:t>
+            </a:r>
+          </a:p>
+          <a:p>
+            <a:pPr lvl="4"/>
+            <a:r>
+              <a:rPr lang="pt-BR"/>
+              <a:t>Quinto nível</a:t>
+            </a:r>
+          </a:p>
+        </p:txBody>
+      </p:sp>
+      <p:sp>
+        <p:nvSpPr>
+          <p:cNvPr id="4" name="Espaço Reservado para Data 3">
+            <a:extLst>
+              <a:ext uri="{FF2B5EF4-FFF2-40B4-BE49-F238E27FC236}">
+                <a16:creationId xmlns:a16="http://schemas.microsoft.com/office/drawing/2014/main" id="{029CCA91-75D2-91DB-EAEC-066003B06714}"/>
+              </a:ext>
+            </a:extLst>
+          </p:cNvPr>
+          <p:cNvSpPr>
+            <a:spLocks noGrp="1"/>
+          </p:cNvSpPr>
+          <p:nvPr>
+            <p:ph type="dt" sz="half" idx="2"/>
+          </p:nvPr>
+        </p:nvSpPr>
+        <p:spPr>
+          <a:xfrm>
+            <a:off x="838200" y="6356350"/>
+            <a:ext cx="2743200" cy="365125"/>
+          </a:xfrm>
+          <a:prstGeom prst="rect">
+            <a:avLst/>
+          </a:prstGeom>
+        </p:spPr>
+        <p:txBody>
+          <a:bodyPr vert="horz" lIns="91440" tIns="45720" rIns="91440" bIns="45720" rtlCol="0" anchor="ctr"/>
+          <a:lstStyle>
+            <a:lvl1pPr algn="l">
+              <a:defRPr sz="1200">
+                <a:solidFill>
+                  <a:schemeClr val="tx1">
+                    <a:tint val="82000"/>
+                  </a:schemeClr>
+                </a:solidFill>
+              </a:defRPr>
+            </a:lvl1pPr>
+          </a:lstStyle>
+          <a:p>
+            <a:fld id="{D6507521-8C51-4813-BF91-ED62A8AF3277}" type="datetimeFigureOut">
+              <a:rPr lang="pt-BR" smtClean="0"/>
+              <a:t>24/04/2026</a:t>
+            </a:fld>
+            <a:endParaRPr lang="pt-BR"/>
+          </a:p>
+        </p:txBody>
+      </p:sp>
+      <p:sp>
+        <p:nvSpPr>
+          <p:cNvPr id="5" name="Espaço Reservado para Rodapé 4">
+            <a:extLst>
+              <a:ext uri="{FF2B5EF4-FFF2-40B4-BE49-F238E27FC236}">
+                <a16:creationId xmlns:a16="http://schemas.microsoft.com/office/drawing/2014/main" id="{A4C1D829-8565-4395-BCB1-47B794E13075}"/>
+              </a:ext>
+            </a:extLst>
+          </p:cNvPr>
+          <p:cNvSpPr>
+            <a:spLocks noGrp="1"/>
+          </p:cNvSpPr>
+          <p:nvPr>
+            <p:ph type="ftr" sz="quarter" idx="3"/>
+          </p:nvPr>
+        </p:nvSpPr>
+        <p:spPr>
+          <a:xfrm>
+            <a:off x="4038600" y="6356350"/>
+            <a:ext cx="4114800" cy="365125"/>
+          </a:xfrm>
+          <a:prstGeom prst="rect">
+            <a:avLst/>
+          </a:prstGeom>
+        </p:spPr>
+        <p:txBody>
+          <a:bodyPr vert="horz" lIns="91440" tIns="45720" rIns="91440" bIns="45720" rtlCol="0" anchor="ctr"/>
+          <a:lstStyle>
+            <a:lvl1pPr algn="ctr">
+              <a:defRPr sz="1200">
+                <a:solidFill>
+                  <a:schemeClr val="tx1">
+                    <a:tint val="82000"/>
+                  </a:schemeClr>
+                </a:solidFill>
+              </a:defRPr>
+            </a:lvl1pPr>
+          </a:lstStyle>
+          <a:p>
+            <a:endParaRPr lang="pt-BR"/>
+          </a:p>
+        </p:txBody>
+      </p:sp>
+      <p:sp>
+        <p:nvSpPr>
+          <p:cNvPr id="6" name="Espaço Reservado para Número de Slide 5">
+            <a:extLst>
+              <a:ext uri="{FF2B5EF4-FFF2-40B4-BE49-F238E27FC236}">
+                <a16:creationId xmlns:a16="http://schemas.microsoft.com/office/drawing/2014/main" id="{C7948F7F-A8DE-7D71-28B6-C465011F4E36}"/>
+              </a:ext>
+            </a:extLst>
+          </p:cNvPr>
+          <p:cNvSpPr>
+            <a:spLocks noGrp="1"/>
+          </p:cNvSpPr>
+          <p:nvPr>
+            <p:ph type="sldNum" sz="quarter" idx="4"/>
+          </p:nvPr>
+        </p:nvSpPr>
+        <p:spPr>
+          <a:xfrm>
+            <a:off x="8610600" y="6356350"/>
+            <a:ext cx="2743200" cy="365125"/>
+          </a:xfrm>
+          <a:prstGeom prst="rect">
+            <a:avLst/>
+          </a:prstGeom>
+        </p:spPr>
+        <p:txBody>
+          <a:bodyPr vert="horz" lIns="91440" tIns="45720" rIns="91440" bIns="45720" rtlCol="0" anchor="ctr"/>
+          <a:lstStyle>
+            <a:lvl1pPr algn="r">
+              <a:defRPr sz="1200">
+                <a:solidFill>
+                  <a:schemeClr val="tx1">
+                    <a:tint val="82000"/>
+                  </a:schemeClr>
+                </a:solidFill>
+              </a:defRPr>
+            </a:lvl1pPr>
+          </a:lstStyle>
+          <a:p>
+            <a:fld id="{2E4A13C5-F07B-482F-913C-E6F34CF189C3}" type="slidenum">
+              <a:rPr lang="pt-BR" smtClean="0"/>
+              <a:t>‹nº›</a:t>
+            </a:fld>
+            <a:endParaRPr lang="pt-BR"/>
+          </a:p>
+        </p:txBody>
+      </p:sp>
+    </p:spTree>
+    <p:extLst>
+      <p:ext uri="{BB962C8B-B14F-4D97-AF65-F5344CB8AC3E}">
+        <p14:creationId xmlns:p14="http://schemas.microsoft.com/office/powerpoint/2010/main" val="3823918239"/>
+      </p:ext>
+    </p:extLst>
+  </p:cSld>
+  <p:clrMap bg1="lt1" tx1="dk1" bg2="lt2" tx2="dk2" accent1="accent1" accent2="accent2" accent3="accent3" accent4="accent4" accent5="accent5" accent6="accent6" hlink="hlink" folHlink="folHlink"/>
+  <p:sldLayoutIdLst>
+    <p:sldLayoutId id="2147483659" r:id="rId1"/>
+    <p:sldLayoutId id="2147483660" r:id="rId2"/>
+    <p:sldLayoutId id="2147483661" r:id="rId3"/>
+    <p:sldLayoutId id="2147483662" r:id="rId4"/>
+    <p:sldLayoutId id="2147483663" r:id="rId5"/>
+    <p:sldLayoutId id="2147483664" r:id="rId6"/>
+    <p:sldLayoutId id="2147483665" r:id="rId7"/>
+    <p:sldLayoutId id="2147483666" r:id="rId8"/>
+    <p:sldLayoutId id="2147483667" r:id="rId9"/>
+    <p:sldLayoutId id="2147483668" r:id="rId10"/>
+    <p:sldLayoutId id="2147483669" r:id="rId11"/>
   </p:sldLayoutIdLst>
   <p:txStyles>
     <p:titleStyle>
@@ -827,8 +4665,8 @@
         </p:nvSpPr>
         <p:spPr>
           <a:xfrm>
-            <a:off x="6202470" y="4881583"/>
-            <a:ext cx="5617029" cy="1391627"/>
+            <a:off x="6096000" y="4824143"/>
+            <a:ext cx="5617029" cy="1221419"/>
           </a:xfrm>
           <a:prstGeom prst="rect">
             <a:avLst/>
@@ -872,18 +4710,7 @@
                 <a:ea typeface="Verdana" panose="020B0604030504040204" pitchFamily="34" charset="0"/>
                 <a:cs typeface="Verdana" panose="020B0604030504040204" pitchFamily="34" charset="0"/>
               </a:rPr>
-              <a:t>Atalhos do sistema </a:t>
-            </a:r>
-            <a:r>
-              <a:rPr lang="pt-BR" sz="1600" b="1" dirty="0" err="1">
-                <a:solidFill>
-                  <a:schemeClr val="bg1"/>
-                </a:solidFill>
-                <a:latin typeface="Verdana" panose="020B0604030504040204" pitchFamily="34" charset="0"/>
-                <a:ea typeface="Verdana" panose="020B0604030504040204" pitchFamily="34" charset="0"/>
-                <a:cs typeface="Verdana" panose="020B0604030504040204" pitchFamily="34" charset="0"/>
-              </a:rPr>
-              <a:t>windows</a:t>
+              <a:t>Atalhos do sistema Windows</a:t>
             </a:r>
             <a:endParaRPr lang="pt-BR" sz="1600" dirty="0">
               <a:solidFill>
@@ -970,8 +4797,38 @@
         </p:blipFill>
         <p:spPr>
           <a:xfrm>
-            <a:off x="0" y="4585649"/>
-            <a:ext cx="1676614" cy="1676614"/>
+            <a:off x="10549288" y="4653935"/>
+            <a:ext cx="1848051" cy="1676614"/>
+          </a:xfrm>
+          <a:prstGeom prst="rect">
+            <a:avLst/>
+          </a:prstGeom>
+        </p:spPr>
+      </p:pic>
+      <p:pic>
+        <p:nvPicPr>
+          <p:cNvPr id="2" name="Imagem 1">
+            <a:extLst>
+              <a:ext uri="{FF2B5EF4-FFF2-40B4-BE49-F238E27FC236}">
+                <a16:creationId xmlns:a16="http://schemas.microsoft.com/office/drawing/2014/main" id="{8E5DFBD8-D443-FE9E-F5C0-35769DB9479F}"/>
+              </a:ext>
+            </a:extLst>
+          </p:cNvPr>
+          <p:cNvPicPr>
+            <a:picLocks noChangeAspect="1"/>
+          </p:cNvPicPr>
+          <p:nvPr/>
+        </p:nvPicPr>
+        <p:blipFill>
+          <a:blip r:embed="rId3"/>
+          <a:stretch>
+            <a:fillRect/>
+          </a:stretch>
+        </p:blipFill>
+        <p:spPr>
+          <a:xfrm>
+            <a:off x="-344692" y="4653935"/>
+            <a:ext cx="2691274" cy="1391627"/>
           </a:xfrm>
           <a:prstGeom prst="rect">
             <a:avLst/>
@@ -1209,8 +5066,8 @@
         </p:blipFill>
         <p:spPr>
           <a:xfrm>
-            <a:off x="10048875" y="-163773"/>
-            <a:ext cx="2143125" cy="2143125"/>
+            <a:off x="10146535" y="-216775"/>
+            <a:ext cx="2199701" cy="2126255"/>
           </a:xfrm>
           <a:prstGeom prst="rect">
             <a:avLst/>
@@ -1322,185 +5179,6 @@
           </a:p>
         </p:txBody>
       </p:sp>
-      <p:sp>
-        <p:nvSpPr>
-          <p:cNvPr id="5" name="CaixaDeTexto 4"/>
-          <p:cNvSpPr txBox="1"/>
-          <p:nvPr/>
-        </p:nvSpPr>
-        <p:spPr>
-          <a:xfrm>
-            <a:off x="-1" y="1288798"/>
-            <a:ext cx="12191999" cy="5970865"/>
-          </a:xfrm>
-          <a:prstGeom prst="rect">
-            <a:avLst/>
-          </a:prstGeom>
-          <a:noFill/>
-        </p:spPr>
-        <p:txBody>
-          <a:bodyPr wrap="square" rtlCol="0">
-            <a:spAutoFit/>
-          </a:bodyPr>
-          <a:lstStyle/>
-          <a:p>
-            <a:pPr algn="ctr">
-              <a:buFont typeface="Arial" panose="020B0604020202020204" pitchFamily="34" charset="0"/>
-              <a:buChar char="•"/>
-            </a:pPr>
-            <a:r>
-              <a:rPr lang="pt-BR" sz="3200" b="1" i="0" dirty="0">
-                <a:solidFill>
-                  <a:srgbClr val="E6E8F0"/>
-                </a:solidFill>
-                <a:effectLst/>
-                <a:latin typeface="Verdana" panose="020B0604030504040204" pitchFamily="34" charset="0"/>
-                <a:ea typeface="Verdana" panose="020B0604030504040204" pitchFamily="34" charset="0"/>
-              </a:rPr>
-              <a:t>Ctrl + Shift + S:</a:t>
-            </a:r>
-            <a:r>
-              <a:rPr lang="pt-BR" sz="3200" b="0" i="0" dirty="0">
-                <a:solidFill>
-                  <a:srgbClr val="E6E8F0"/>
-                </a:solidFill>
-                <a:effectLst/>
-                <a:latin typeface="Verdana" panose="020B0604030504040204" pitchFamily="34" charset="0"/>
-                <a:ea typeface="Verdana" panose="020B0604030504040204" pitchFamily="34" charset="0"/>
-              </a:rPr>
-              <a:t> Gestão de painel de estilos para padronização de documentos complexos.</a:t>
-            </a:r>
-          </a:p>
-          <a:p>
-            <a:pPr algn="ctr"/>
-            <a:endParaRPr lang="pt-BR" sz="3200" b="0" i="0" dirty="0">
-              <a:solidFill>
-                <a:srgbClr val="E6E8F0"/>
-              </a:solidFill>
-              <a:effectLst/>
-              <a:latin typeface="Verdana" panose="020B0604030504040204" pitchFamily="34" charset="0"/>
-              <a:ea typeface="Verdana" panose="020B0604030504040204" pitchFamily="34" charset="0"/>
-            </a:endParaRPr>
-          </a:p>
-          <a:p>
-            <a:pPr algn="ctr">
-              <a:buFont typeface="Arial" panose="020B0604020202020204" pitchFamily="34" charset="0"/>
-              <a:buChar char="•"/>
-            </a:pPr>
-            <a:r>
-              <a:rPr lang="pt-BR" sz="3200" b="1" i="0" dirty="0">
-                <a:solidFill>
-                  <a:srgbClr val="E6E8F0"/>
-                </a:solidFill>
-                <a:effectLst/>
-                <a:latin typeface="Verdana" panose="020B0604030504040204" pitchFamily="34" charset="0"/>
-                <a:ea typeface="Verdana" panose="020B0604030504040204" pitchFamily="34" charset="0"/>
-              </a:rPr>
-              <a:t>Ctrl + K:</a:t>
-            </a:r>
-            <a:r>
-              <a:rPr lang="pt-BR" sz="3200" b="0" i="0" dirty="0">
-                <a:solidFill>
-                  <a:srgbClr val="E6E8F0"/>
-                </a:solidFill>
-                <a:effectLst/>
-                <a:latin typeface="Verdana" panose="020B0604030504040204" pitchFamily="34" charset="0"/>
-                <a:ea typeface="Verdana" panose="020B0604030504040204" pitchFamily="34" charset="0"/>
-              </a:rPr>
-              <a:t> Indexação de hiperlinks e referenciamento cruzado.</a:t>
-            </a:r>
-          </a:p>
-          <a:p>
-            <a:pPr algn="ctr"/>
-            <a:endParaRPr lang="pt-BR" sz="3200" b="0" i="0" dirty="0">
-              <a:solidFill>
-                <a:srgbClr val="E6E8F0"/>
-              </a:solidFill>
-              <a:effectLst/>
-              <a:latin typeface="Verdana" panose="020B0604030504040204" pitchFamily="34" charset="0"/>
-              <a:ea typeface="Verdana" panose="020B0604030504040204" pitchFamily="34" charset="0"/>
-            </a:endParaRPr>
-          </a:p>
-          <a:p>
-            <a:pPr algn="ctr">
-              <a:buFont typeface="Arial" panose="020B0604020202020204" pitchFamily="34" charset="0"/>
-              <a:buChar char="•"/>
-            </a:pPr>
-            <a:r>
-              <a:rPr lang="pt-BR" sz="3200" b="1" i="0" dirty="0">
-                <a:solidFill>
-                  <a:srgbClr val="E6E8F0"/>
-                </a:solidFill>
-                <a:effectLst/>
-                <a:latin typeface="Verdana" panose="020B0604030504040204" pitchFamily="34" charset="0"/>
-                <a:ea typeface="Verdana" panose="020B0604030504040204" pitchFamily="34" charset="0"/>
-              </a:rPr>
-              <a:t>Ctrl + Alt + M:</a:t>
-            </a:r>
-            <a:r>
-              <a:rPr lang="pt-BR" sz="3200" b="0" i="0" dirty="0">
-                <a:solidFill>
-                  <a:srgbClr val="E6E8F0"/>
-                </a:solidFill>
-                <a:effectLst/>
-                <a:latin typeface="Verdana" panose="020B0604030504040204" pitchFamily="34" charset="0"/>
-                <a:ea typeface="Verdana" panose="020B0604030504040204" pitchFamily="34" charset="0"/>
-              </a:rPr>
-              <a:t> Inserção de metadados e comentários para revisão técnica.</a:t>
-            </a:r>
-          </a:p>
-          <a:p>
-            <a:pPr algn="ctr"/>
-            <a:endParaRPr lang="pt-BR" sz="3200" b="0" i="0" dirty="0">
-              <a:solidFill>
-                <a:srgbClr val="E6E8F0"/>
-              </a:solidFill>
-              <a:effectLst/>
-              <a:latin typeface="Verdana" panose="020B0604030504040204" pitchFamily="34" charset="0"/>
-              <a:ea typeface="Verdana" panose="020B0604030504040204" pitchFamily="34" charset="0"/>
-            </a:endParaRPr>
-          </a:p>
-          <a:p>
-            <a:pPr algn="ctr">
-              <a:buFont typeface="Arial" panose="020B0604020202020204" pitchFamily="34" charset="0"/>
-              <a:buChar char="•"/>
-            </a:pPr>
-            <a:r>
-              <a:rPr lang="pt-BR" sz="3200" b="1" i="0" dirty="0">
-                <a:solidFill>
-                  <a:srgbClr val="E6E8F0"/>
-                </a:solidFill>
-                <a:effectLst/>
-                <a:latin typeface="Verdana" panose="020B0604030504040204" pitchFamily="34" charset="0"/>
-                <a:ea typeface="Verdana" panose="020B0604030504040204" pitchFamily="34" charset="0"/>
-              </a:rPr>
-              <a:t>Alt + Shift + Setas:</a:t>
-            </a:r>
-            <a:r>
-              <a:rPr lang="pt-BR" sz="3200" b="0" i="0" dirty="0">
-                <a:solidFill>
-                  <a:srgbClr val="E6E8F0"/>
-                </a:solidFill>
-                <a:effectLst/>
-                <a:latin typeface="Verdana" panose="020B0604030504040204" pitchFamily="34" charset="0"/>
-                <a:ea typeface="Verdana" panose="020B0604030504040204" pitchFamily="34" charset="0"/>
-              </a:rPr>
-              <a:t> Reordenamento de estruturas hierárquicas em listas e tópicos</a:t>
-            </a:r>
-          </a:p>
-          <a:p>
-            <a:pPr algn="ctr"/>
-            <a:endParaRPr lang="pt-BR" sz="3000" b="1" i="1" dirty="0">
-              <a:solidFill>
-                <a:schemeClr val="bg1"/>
-              </a:solidFill>
-              <a:latin typeface="Verdana" panose="020B0604030504040204" pitchFamily="34" charset="0"/>
-              <a:ea typeface="Verdana" panose="020B0604030504040204" pitchFamily="34" charset="0"/>
-              <a:cs typeface="Times New Roman" pitchFamily="18" charset="0"/>
-            </a:endParaRPr>
-          </a:p>
-        </p:txBody>
-      </p:sp>
       <p:pic>
         <p:nvPicPr>
           <p:cNvPr id="4" name="Imagem 3" descr="cps-removebg-preview.png"/>
@@ -1517,7 +5195,7 @@
         </p:blipFill>
         <p:spPr>
           <a:xfrm>
-            <a:off x="10062912" y="-232324"/>
+            <a:off x="10048875" y="-232324"/>
             <a:ext cx="2143125" cy="2143125"/>
           </a:xfrm>
           <a:prstGeom prst="rect">
@@ -1555,6 +5233,31 @@
           </a:prstGeom>
         </p:spPr>
       </p:pic>
+      <p:sp>
+        <p:nvSpPr>
+          <p:cNvPr id="2" name="Título 1">
+            <a:extLst>
+              <a:ext uri="{FF2B5EF4-FFF2-40B4-BE49-F238E27FC236}">
+                <a16:creationId xmlns:a16="http://schemas.microsoft.com/office/drawing/2014/main" id="{B32EB11F-C7FB-CCBE-546A-41F670BB4926}"/>
+              </a:ext>
+            </a:extLst>
+          </p:cNvPr>
+          <p:cNvSpPr>
+            <a:spLocks noGrp="1"/>
+          </p:cNvSpPr>
+          <p:nvPr>
+            <p:ph type="title"/>
+          </p:nvPr>
+        </p:nvSpPr>
+        <p:spPr/>
+        <p:txBody>
+          <a:bodyPr/>
+          <a:lstStyle/>
+          <a:p>
+            <a:endParaRPr lang="pt-BR"/>
+          </a:p>
+        </p:txBody>
+      </p:sp>
     </p:spTree>
     <p:extLst>
       <p:ext uri="{BB962C8B-B14F-4D97-AF65-F5344CB8AC3E}">
@@ -1639,7 +5342,7 @@
         <p:spPr>
           <a:xfrm>
             <a:off x="1" y="1288798"/>
-            <a:ext cx="12191999" cy="5509200"/>
+            <a:ext cx="12191999" cy="10926068"/>
           </a:xfrm>
           <a:prstGeom prst="rect">
             <a:avLst/>
@@ -1685,6 +5388,95 @@
                 <a:cs typeface="Times New Roman" pitchFamily="18" charset="0"/>
               </a:rPr>
               <a:t> de fórmulas.</a:t>
+            </a:r>
+          </a:p>
+          <a:p>
+            <a:pPr algn="ctr"/>
+            <a:r>
+              <a:rPr lang="pt-BR" sz="3200" b="1" i="1" dirty="0">
+                <a:solidFill>
+                  <a:schemeClr val="bg1"/>
+                </a:solidFill>
+                <a:latin typeface="Verdana" panose="020B0604030504040204" pitchFamily="34" charset="0"/>
+                <a:ea typeface="Verdana" panose="020B0604030504040204" pitchFamily="34" charset="0"/>
+                <a:cs typeface="Times New Roman" pitchFamily="18" charset="0"/>
+              </a:rPr>
+              <a:t>Ctrl + Shift + S: Gestão de painel de estilos para padronização de documentos complexos.</a:t>
+            </a:r>
+          </a:p>
+          <a:p>
+            <a:pPr algn="ctr"/>
+            <a:endParaRPr lang="pt-BR" sz="3200" b="1" i="1" dirty="0">
+              <a:solidFill>
+                <a:schemeClr val="bg1"/>
+              </a:solidFill>
+              <a:latin typeface="Verdana" panose="020B0604030504040204" pitchFamily="34" charset="0"/>
+              <a:ea typeface="Verdana" panose="020B0604030504040204" pitchFamily="34" charset="0"/>
+              <a:cs typeface="Times New Roman" pitchFamily="18" charset="0"/>
+            </a:endParaRPr>
+          </a:p>
+          <a:p>
+            <a:pPr algn="ctr"/>
+            <a:r>
+              <a:rPr lang="pt-BR" sz="3200" b="1" i="1" dirty="0">
+                <a:solidFill>
+                  <a:schemeClr val="bg1"/>
+                </a:solidFill>
+                <a:latin typeface="Verdana" panose="020B0604030504040204" pitchFamily="34" charset="0"/>
+                <a:ea typeface="Verdana" panose="020B0604030504040204" pitchFamily="34" charset="0"/>
+                <a:cs typeface="Times New Roman" pitchFamily="18" charset="0"/>
+              </a:rPr>
+              <a:t>Ctrl + K: Indexação de hiperlinks e referenciamento cruzado.</a:t>
+            </a:r>
+          </a:p>
+          <a:p>
+            <a:pPr algn="ctr"/>
+            <a:endParaRPr lang="pt-BR" sz="3200" b="1" i="1" dirty="0">
+              <a:solidFill>
+                <a:schemeClr val="bg1"/>
+              </a:solidFill>
+              <a:latin typeface="Verdana" panose="020B0604030504040204" pitchFamily="34" charset="0"/>
+              <a:ea typeface="Verdana" panose="020B0604030504040204" pitchFamily="34" charset="0"/>
+              <a:cs typeface="Times New Roman" pitchFamily="18" charset="0"/>
+            </a:endParaRPr>
+          </a:p>
+          <a:p>
+            <a:pPr algn="ctr"/>
+            <a:r>
+              <a:rPr lang="pt-BR" sz="3200" b="1" i="1" dirty="0">
+                <a:solidFill>
+                  <a:schemeClr val="bg1"/>
+                </a:solidFill>
+                <a:latin typeface="Verdana" panose="020B0604030504040204" pitchFamily="34" charset="0"/>
+                <a:ea typeface="Verdana" panose="020B0604030504040204" pitchFamily="34" charset="0"/>
+                <a:cs typeface="Times New Roman" pitchFamily="18" charset="0"/>
+              </a:rPr>
+              <a:t>Ctrl + Alt + M: Inserção de metadados e comentários para revisão técnica.</a:t>
+            </a:r>
+          </a:p>
+          <a:p>
+            <a:pPr algn="ctr"/>
+            <a:endParaRPr lang="pt-BR" sz="3200" b="1" i="1" dirty="0">
+              <a:solidFill>
+                <a:schemeClr val="bg1"/>
+              </a:solidFill>
+              <a:latin typeface="Verdana" panose="020B0604030504040204" pitchFamily="34" charset="0"/>
+              <a:ea typeface="Verdana" panose="020B0604030504040204" pitchFamily="34" charset="0"/>
+              <a:cs typeface="Times New Roman" pitchFamily="18" charset="0"/>
+            </a:endParaRPr>
+          </a:p>
+          <a:p>
+            <a:pPr algn="ctr"/>
+            <a:r>
+              <a:rPr lang="pt-BR" sz="3200" b="1" i="1" dirty="0">
+                <a:solidFill>
+                  <a:schemeClr val="bg1"/>
+                </a:solidFill>
+                <a:latin typeface="Verdana" panose="020B0604030504040204" pitchFamily="34" charset="0"/>
+                <a:ea typeface="Verdana" panose="020B0604030504040204" pitchFamily="34" charset="0"/>
+                <a:cs typeface="Times New Roman" pitchFamily="18" charset="0"/>
+              </a:rPr>
+              <a:t>Alt + Shift + Setas: Reordenamento de estruturas hierárquicas em listas e tópicos</a:t>
             </a:r>
           </a:p>
           <a:p>
@@ -1818,6 +5610,31 @@
           </a:prstGeom>
         </p:spPr>
       </p:pic>
+      <p:sp>
+        <p:nvSpPr>
+          <p:cNvPr id="2" name="Título 1">
+            <a:extLst>
+              <a:ext uri="{FF2B5EF4-FFF2-40B4-BE49-F238E27FC236}">
+                <a16:creationId xmlns:a16="http://schemas.microsoft.com/office/drawing/2014/main" id="{93C4493E-9109-E103-0C81-F564D1A6CB67}"/>
+              </a:ext>
+            </a:extLst>
+          </p:cNvPr>
+          <p:cNvSpPr>
+            <a:spLocks noGrp="1"/>
+          </p:cNvSpPr>
+          <p:nvPr>
+            <p:ph type="title"/>
+          </p:nvPr>
+        </p:nvSpPr>
+        <p:spPr/>
+        <p:txBody>
+          <a:bodyPr/>
+          <a:lstStyle/>
+          <a:p>
+            <a:endParaRPr lang="pt-BR"/>
+          </a:p>
+        </p:txBody>
+      </p:sp>
     </p:spTree>
     <p:extLst>
       <p:ext uri="{BB962C8B-B14F-4D97-AF65-F5344CB8AC3E}">
@@ -1902,7 +5719,7 @@
         <p:spPr>
           <a:xfrm>
             <a:off x="-1" y="1288798"/>
-            <a:ext cx="12191999" cy="5509200"/>
+            <a:ext cx="12191999" cy="10926068"/>
           </a:xfrm>
           <a:prstGeom prst="rect">
             <a:avLst/>
@@ -1926,6 +5743,20 @@
                 <a:cs typeface="Times New Roman" pitchFamily="18" charset="0"/>
               </a:rPr>
               <a:t>Ctrl + D: Clonagem de objetos com preservação de deslocamento vetorial.</a:t>
+            </a:r>
+          </a:p>
+          <a:p>
+            <a:pPr algn="ctr"/>
+            <a:r>
+              <a:rPr lang="pt-BR" sz="3200" b="1" i="1" dirty="0">
+                <a:solidFill>
+                  <a:schemeClr val="bg1"/>
+                </a:solidFill>
+                <a:latin typeface="Verdana" panose="020B0604030504040204" pitchFamily="34" charset="0"/>
+                <a:ea typeface="Verdana" panose="020B0604030504040204" pitchFamily="34" charset="0"/>
+                <a:cs typeface="Times New Roman" pitchFamily="18" charset="0"/>
+              </a:rPr>
+              <a:t>Ctrl + Shift + S: Gestão de painel de estilos para padronização de documentos complexos.</a:t>
             </a:r>
           </a:p>
           <a:p>
@@ -1950,29 +5781,7 @@
                 <a:ea typeface="Verdana" panose="020B0604030504040204" pitchFamily="34" charset="0"/>
                 <a:cs typeface="Times New Roman" pitchFamily="18" charset="0"/>
               </a:rPr>
-              <a:t>Shift + F5: Execução de </a:t>
-            </a:r>
-            <a:r>
-              <a:rPr lang="pt-BR" sz="3200" b="1" i="1" dirty="0" err="1">
-                <a:solidFill>
-                  <a:schemeClr val="bg1"/>
-                </a:solidFill>
-                <a:latin typeface="Verdana" panose="020B0604030504040204" pitchFamily="34" charset="0"/>
-                <a:ea typeface="Verdana" panose="020B0604030504040204" pitchFamily="34" charset="0"/>
-                <a:cs typeface="Times New Roman" pitchFamily="18" charset="0"/>
-              </a:rPr>
-              <a:t>runtime</a:t>
-            </a:r>
-            <a:r>
-              <a:rPr lang="pt-BR" sz="3200" b="1" i="1" dirty="0">
-                <a:solidFill>
-                  <a:schemeClr val="bg1"/>
-                </a:solidFill>
-                <a:latin typeface="Verdana" panose="020B0604030504040204" pitchFamily="34" charset="0"/>
-                <a:ea typeface="Verdana" panose="020B0604030504040204" pitchFamily="34" charset="0"/>
-                <a:cs typeface="Times New Roman" pitchFamily="18" charset="0"/>
-              </a:rPr>
-              <a:t> a partir da posição atual do deck.</a:t>
+              <a:t>Ctrl + K: Indexação de hiperlinks e referenciamento cruzado.</a:t>
             </a:r>
           </a:p>
           <a:p>
@@ -1997,7 +5806,7 @@
                 <a:ea typeface="Verdana" panose="020B0604030504040204" pitchFamily="34" charset="0"/>
                 <a:cs typeface="Times New Roman" pitchFamily="18" charset="0"/>
               </a:rPr>
-              <a:t>Ctrl + G: Consolidação de elementos em grupos lógicos para manipulação em lote.</a:t>
+              <a:t>Ctrl + Alt + M: Inserção de metadados e comentários para revisão técnica.</a:t>
             </a:r>
           </a:p>
           <a:p>
@@ -2022,65 +5831,133 @@
                 <a:ea typeface="Verdana" panose="020B0604030504040204" pitchFamily="34" charset="0"/>
                 <a:cs typeface="Times New Roman" pitchFamily="18" charset="0"/>
               </a:rPr>
+              <a:t>Alt + Shift + Setas: Reordenamento de estruturas hierárquicas em listas e tópicos</a:t>
+            </a:r>
+          </a:p>
+          <a:p>
+            <a:pPr algn="ctr"/>
+            <a:endParaRPr lang="pt-BR" sz="3200" b="1" i="1" dirty="0">
+              <a:solidFill>
+                <a:schemeClr val="bg1"/>
+              </a:solidFill>
+              <a:latin typeface="Verdana" panose="020B0604030504040204" pitchFamily="34" charset="0"/>
+              <a:ea typeface="Verdana" panose="020B0604030504040204" pitchFamily="34" charset="0"/>
+              <a:cs typeface="Times New Roman" pitchFamily="18" charset="0"/>
+            </a:endParaRPr>
+          </a:p>
+          <a:p>
+            <a:pPr algn="ctr"/>
+            <a:r>
+              <a:rPr lang="pt-BR" sz="3200" b="1" i="1" dirty="0">
+                <a:solidFill>
+                  <a:schemeClr val="bg1"/>
+                </a:solidFill>
+                <a:latin typeface="Verdana" panose="020B0604030504040204" pitchFamily="34" charset="0"/>
+                <a:ea typeface="Verdana" panose="020B0604030504040204" pitchFamily="34" charset="0"/>
+                <a:cs typeface="Times New Roman" pitchFamily="18" charset="0"/>
+              </a:rPr>
+              <a:t>Shift + F5: Execução de </a:t>
+            </a:r>
+            <a:r>
+              <a:rPr lang="pt-BR" sz="3200" b="1" i="1" dirty="0" err="1">
+                <a:solidFill>
+                  <a:schemeClr val="bg1"/>
+                </a:solidFill>
+                <a:latin typeface="Verdana" panose="020B0604030504040204" pitchFamily="34" charset="0"/>
+                <a:ea typeface="Verdana" panose="020B0604030504040204" pitchFamily="34" charset="0"/>
+                <a:cs typeface="Times New Roman" pitchFamily="18" charset="0"/>
+              </a:rPr>
+              <a:t>runtime</a:t>
+            </a:r>
+            <a:r>
+              <a:rPr lang="pt-BR" sz="3200" b="1" i="1" dirty="0">
+                <a:solidFill>
+                  <a:schemeClr val="bg1"/>
+                </a:solidFill>
+                <a:latin typeface="Verdana" panose="020B0604030504040204" pitchFamily="34" charset="0"/>
+                <a:ea typeface="Verdana" panose="020B0604030504040204" pitchFamily="34" charset="0"/>
+                <a:cs typeface="Times New Roman" pitchFamily="18" charset="0"/>
+              </a:rPr>
+              <a:t> a partir da posição atual do deck.</a:t>
+            </a:r>
+          </a:p>
+          <a:p>
+            <a:pPr algn="ctr"/>
+            <a:endParaRPr lang="pt-BR" sz="3200" b="1" i="1" dirty="0">
+              <a:solidFill>
+                <a:schemeClr val="bg1"/>
+              </a:solidFill>
+              <a:latin typeface="Verdana" panose="020B0604030504040204" pitchFamily="34" charset="0"/>
+              <a:ea typeface="Verdana" panose="020B0604030504040204" pitchFamily="34" charset="0"/>
+              <a:cs typeface="Times New Roman" pitchFamily="18" charset="0"/>
+            </a:endParaRPr>
+          </a:p>
+          <a:p>
+            <a:pPr algn="ctr"/>
+            <a:r>
+              <a:rPr lang="pt-BR" sz="3200" b="1" i="1" dirty="0">
+                <a:solidFill>
+                  <a:schemeClr val="bg1"/>
+                </a:solidFill>
+                <a:latin typeface="Verdana" panose="020B0604030504040204" pitchFamily="34" charset="0"/>
+                <a:ea typeface="Verdana" panose="020B0604030504040204" pitchFamily="34" charset="0"/>
+                <a:cs typeface="Times New Roman" pitchFamily="18" charset="0"/>
+              </a:rPr>
+              <a:t>Ctrl + G: Consolidação de elementos em grupos lógicos para manipulação em lote.</a:t>
+            </a:r>
+          </a:p>
+          <a:p>
+            <a:pPr algn="ctr"/>
+            <a:endParaRPr lang="pt-BR" sz="3200" b="1" i="1" dirty="0">
+              <a:solidFill>
+                <a:schemeClr val="bg1"/>
+              </a:solidFill>
+              <a:latin typeface="Verdana" panose="020B0604030504040204" pitchFamily="34" charset="0"/>
+              <a:ea typeface="Verdana" panose="020B0604030504040204" pitchFamily="34" charset="0"/>
+              <a:cs typeface="Times New Roman" pitchFamily="18" charset="0"/>
+            </a:endParaRPr>
+          </a:p>
+          <a:p>
+            <a:pPr algn="ctr"/>
+            <a:r>
+              <a:rPr lang="pt-BR" sz="3200" b="1" i="1" dirty="0">
+                <a:solidFill>
+                  <a:schemeClr val="bg1"/>
+                </a:solidFill>
+                <a:latin typeface="Verdana" panose="020B0604030504040204" pitchFamily="34" charset="0"/>
+                <a:ea typeface="Verdana" panose="020B0604030504040204" pitchFamily="34" charset="0"/>
+                <a:cs typeface="Times New Roman" pitchFamily="18" charset="0"/>
+              </a:rPr>
               <a:t>Alt + F10: Abertura do painel de seleção para gestão de camadas e visibilidade de objetos.</a:t>
             </a:r>
           </a:p>
         </p:txBody>
       </p:sp>
-      <p:pic>
-        <p:nvPicPr>
-          <p:cNvPr id="4" name="Imagem 3" descr="cps-removebg-preview.png"/>
-          <p:cNvPicPr>
-            <a:picLocks noChangeAspect="1"/>
-          </p:cNvPicPr>
-          <p:nvPr/>
-        </p:nvPicPr>
-        <p:blipFill>
-          <a:blip r:embed="rId2"/>
-          <a:stretch>
-            <a:fillRect/>
-          </a:stretch>
-        </p:blipFill>
-        <p:spPr>
-          <a:xfrm>
-            <a:off x="9962246" y="-232324"/>
-            <a:ext cx="2143125" cy="2143125"/>
-          </a:xfrm>
-          <a:prstGeom prst="rect">
-            <a:avLst/>
-          </a:prstGeom>
-        </p:spPr>
-      </p:pic>
-      <p:pic>
-        <p:nvPicPr>
-          <p:cNvPr id="6" name="Imagem 5" descr="Logotipo">
-            <a:extLst>
-              <a:ext uri="{FF2B5EF4-FFF2-40B4-BE49-F238E27FC236}">
-                <a16:creationId xmlns:a16="http://schemas.microsoft.com/office/drawing/2014/main" id="{88607375-1DAE-F280-F0D0-CD90B4073342}"/>
-              </a:ext>
-            </a:extLst>
-          </p:cNvPr>
-          <p:cNvPicPr>
-            <a:picLocks noChangeAspect="1"/>
-          </p:cNvPicPr>
-          <p:nvPr/>
-        </p:nvPicPr>
-        <p:blipFill>
-          <a:blip r:embed="rId3"/>
-          <a:stretch>
-            <a:fillRect/>
-          </a:stretch>
-        </p:blipFill>
-        <p:spPr>
-          <a:xfrm>
-            <a:off x="0" y="53427"/>
-            <a:ext cx="2905125" cy="1571625"/>
-          </a:xfrm>
-          <a:prstGeom prst="rect">
-            <a:avLst/>
-          </a:prstGeom>
-        </p:spPr>
-      </p:pic>
+      <p:sp>
+        <p:nvSpPr>
+          <p:cNvPr id="2" name="Título 1">
+            <a:extLst>
+              <a:ext uri="{FF2B5EF4-FFF2-40B4-BE49-F238E27FC236}">
+                <a16:creationId xmlns:a16="http://schemas.microsoft.com/office/drawing/2014/main" id="{6DC002F1-B42D-BE10-CC56-633A21CDCC23}"/>
+              </a:ext>
+            </a:extLst>
+          </p:cNvPr>
+          <p:cNvSpPr>
+            <a:spLocks noGrp="1"/>
+          </p:cNvSpPr>
+          <p:nvPr>
+            <p:ph type="title"/>
+          </p:nvPr>
+        </p:nvSpPr>
+        <p:spPr/>
+        <p:txBody>
+          <a:bodyPr/>
+          <a:lstStyle/>
+          <a:p>
+            <a:endParaRPr lang="pt-BR"/>
+          </a:p>
+        </p:txBody>
+      </p:sp>
     </p:spTree>
     <p:extLst>
       <p:ext uri="{BB962C8B-B14F-4D97-AF65-F5344CB8AC3E}">
@@ -2394,7 +6271,7 @@
         </p:blipFill>
         <p:spPr>
           <a:xfrm>
-            <a:off x="9962246" y="-232324"/>
+            <a:off x="10048875" y="-232324"/>
             <a:ext cx="2143125" cy="2143125"/>
           </a:xfrm>
           <a:prstGeom prst="rect">
@@ -2529,7 +6406,7 @@
           </a:bodyPr>
           <a:lstStyle/>
           <a:p>
-            <a:pPr algn="l">
+            <a:pPr algn="ctr">
               <a:buFont typeface="Arial" panose="020B0604020202020204" pitchFamily="34" charset="0"/>
               <a:buChar char="•"/>
             </a:pPr>
@@ -2568,7 +6445,7 @@
             </a:r>
           </a:p>
           <a:p>
-            <a:pPr algn="l"/>
+            <a:pPr algn="ctr"/>
             <a:endParaRPr lang="pt-BR" sz="3200" b="1" i="1" dirty="0">
               <a:solidFill>
                 <a:srgbClr val="E6E8F0"/>
@@ -2579,7 +6456,7 @@
             </a:endParaRPr>
           </a:p>
           <a:p>
-            <a:pPr algn="l">
+            <a:pPr algn="ctr">
               <a:buFont typeface="Arial" panose="020B0604020202020204" pitchFamily="34" charset="0"/>
               <a:buChar char="•"/>
             </a:pPr>
@@ -2596,7 +6473,7 @@
             </a:r>
           </a:p>
           <a:p>
-            <a:pPr algn="l"/>
+            <a:pPr algn="ctr"/>
             <a:endParaRPr lang="pt-BR" sz="3200" b="1" i="1" dirty="0">
               <a:solidFill>
                 <a:srgbClr val="E6E8F0"/>
@@ -2607,7 +6484,7 @@
             </a:endParaRPr>
           </a:p>
           <a:p>
-            <a:pPr algn="l">
+            <a:pPr algn="ctr">
               <a:buFont typeface="Arial" panose="020B0604020202020204" pitchFamily="34" charset="0"/>
               <a:buChar char="•"/>
             </a:pPr>
@@ -2652,8 +6529,8 @@
         </p:blipFill>
         <p:spPr>
           <a:xfrm>
-            <a:off x="10048875" y="-163773"/>
-            <a:ext cx="2143125" cy="2143125"/>
+            <a:off x="10048875" y="-286439"/>
+            <a:ext cx="2143125" cy="2166772"/>
           </a:xfrm>
           <a:prstGeom prst="rect">
             <a:avLst/>
@@ -2736,7 +6613,7 @@
         </p:nvSpPr>
         <p:spPr>
           <a:xfrm>
-            <a:off x="3558560" y="4804012"/>
+            <a:off x="3558560" y="5930168"/>
             <a:ext cx="5074880" cy="279546"/>
           </a:xfrm>
           <a:prstGeom prst="rect">
@@ -2798,8 +6675,38 @@
         </p:blipFill>
         <p:spPr>
           <a:xfrm>
-            <a:off x="5024438" y="436729"/>
+            <a:off x="5024436" y="3565248"/>
             <a:ext cx="2143125" cy="2143125"/>
+          </a:xfrm>
+          <a:prstGeom prst="rect">
+            <a:avLst/>
+          </a:prstGeom>
+        </p:spPr>
+      </p:pic>
+      <p:pic>
+        <p:nvPicPr>
+          <p:cNvPr id="2" name="Imagem 1">
+            <a:extLst>
+              <a:ext uri="{FF2B5EF4-FFF2-40B4-BE49-F238E27FC236}">
+                <a16:creationId xmlns:a16="http://schemas.microsoft.com/office/drawing/2014/main" id="{1ABEC3BE-6412-025D-8235-6AF376B33648}"/>
+              </a:ext>
+            </a:extLst>
+          </p:cNvPr>
+          <p:cNvPicPr>
+            <a:picLocks noChangeAspect="1"/>
+          </p:cNvPicPr>
+          <p:nvPr/>
+        </p:nvPicPr>
+        <p:blipFill>
+          <a:blip r:embed="rId3"/>
+          <a:stretch>
+            <a:fillRect/>
+          </a:stretch>
+        </p:blipFill>
+        <p:spPr>
+          <a:xfrm>
+            <a:off x="4641978" y="648286"/>
+            <a:ext cx="2908044" cy="1572904"/>
           </a:xfrm>
           <a:prstGeom prst="rect">
             <a:avLst/>
@@ -3112,4 +7019,319 @@
     </a:ext>
   </a:extLst>
 </a:theme>
+</file>
+
+<file path=ppt/theme/theme2.xml><?xml version="1.0" encoding="utf-8"?>
+<a:theme xmlns:a="http://schemas.openxmlformats.org/drawingml/2006/main" name="Personalizar design">
+  <a:themeElements>
+    <a:clrScheme name="Office">
+      <a:dk1>
+        <a:sysClr val="windowText" lastClr="000000"/>
+      </a:dk1>
+      <a:lt1>
+        <a:sysClr val="window" lastClr="FFFFFF"/>
+      </a:lt1>
+      <a:dk2>
+        <a:srgbClr val="0E2841"/>
+      </a:dk2>
+      <a:lt2>
+        <a:srgbClr val="E8E8E8"/>
+      </a:lt2>
+      <a:accent1>
+        <a:srgbClr val="156082"/>
+      </a:accent1>
+      <a:accent2>
+        <a:srgbClr val="E97132"/>
+      </a:accent2>
+      <a:accent3>
+        <a:srgbClr val="196B24"/>
+      </a:accent3>
+      <a:accent4>
+        <a:srgbClr val="0F9ED5"/>
+      </a:accent4>
+      <a:accent5>
+        <a:srgbClr val="A02B93"/>
+      </a:accent5>
+      <a:accent6>
+        <a:srgbClr val="4EA72E"/>
+      </a:accent6>
+      <a:hlink>
+        <a:srgbClr val="467886"/>
+      </a:hlink>
+      <a:folHlink>
+        <a:srgbClr val="96607D"/>
+      </a:folHlink>
+    </a:clrScheme>
+    <a:fontScheme name="Office">
+      <a:majorFont>
+        <a:latin typeface="Aptos Display" panose="02110004020202020204"/>
+        <a:ea typeface=""/>
+        <a:cs typeface=""/>
+        <a:font script="Jpan" typeface="游ゴシック Light"/>
+        <a:font script="Hang" typeface="맑은 고딕"/>
+        <a:font script="Hans" typeface="等线 Light"/>
+        <a:font script="Hant" typeface="新細明體"/>
+        <a:font script="Arab" typeface="Times New Roman"/>
+        <a:font script="Hebr" typeface="Times New Roman"/>
+        <a:font script="Thai" typeface="Angsana New"/>
+        <a:font script="Ethi" typeface="Nyala"/>
+        <a:font script="Beng" typeface="Vrinda"/>
+        <a:font script="Gujr" typeface="Shruti"/>
+        <a:font script="Khmr" typeface="MoolBoran"/>
+        <a:font script="Knda" typeface="Tunga"/>
+        <a:font script="Guru" typeface="Raavi"/>
+        <a:font script="Cans" typeface="Euphemia"/>
+        <a:font script="Cher" typeface="Plantagenet Cherokee"/>
+        <a:font script="Yiii" typeface="Microsoft Yi Baiti"/>
+        <a:font script="Tibt" typeface="Microsoft Himalaya"/>
+        <a:font script="Thaa" typeface="MV Boli"/>
+        <a:font script="Deva" typeface="Mangal"/>
+        <a:font script="Telu" typeface="Gautami"/>
+        <a:font script="Taml" typeface="Latha"/>
+        <a:font script="Syrc" typeface="Estrangelo Edessa"/>
+        <a:font script="Orya" typeface="Kalinga"/>
+        <a:font script="Mlym" typeface="Kartika"/>
+        <a:font script="Laoo" typeface="DokChampa"/>
+        <a:font script="Sinh" typeface="Iskoola Pota"/>
+        <a:font script="Mong" typeface="Mongolian Baiti"/>
+        <a:font script="Viet" typeface="Times New Roman"/>
+        <a:font script="Uigh" typeface="Microsoft Uighur"/>
+        <a:font script="Geor" typeface="Sylfaen"/>
+        <a:font script="Armn" typeface="Arial"/>
+        <a:font script="Bugi" typeface="Leelawadee UI"/>
+        <a:font script="Bopo" typeface="Microsoft JhengHei"/>
+        <a:font script="Java" typeface="Javanese Text"/>
+        <a:font script="Lisu" typeface="Segoe UI"/>
+        <a:font script="Mymr" typeface="Myanmar Text"/>
+        <a:font script="Nkoo" typeface="Ebrima"/>
+        <a:font script="Olck" typeface="Nirmala UI"/>
+        <a:font script="Osma" typeface="Ebrima"/>
+        <a:font script="Phag" typeface="Phagspa"/>
+        <a:font script="Syrn" typeface="Estrangelo Edessa"/>
+        <a:font script="Syrj" typeface="Estrangelo Edessa"/>
+        <a:font script="Syre" typeface="Estrangelo Edessa"/>
+        <a:font script="Sora" typeface="Nirmala UI"/>
+        <a:font script="Tale" typeface="Microsoft Tai Le"/>
+        <a:font script="Talu" typeface="Microsoft New Tai Lue"/>
+        <a:font script="Tfng" typeface="Ebrima"/>
+      </a:majorFont>
+      <a:minorFont>
+        <a:latin typeface="Aptos" panose="02110004020202020204"/>
+        <a:ea typeface=""/>
+        <a:cs typeface=""/>
+        <a:font script="Jpan" typeface="游ゴシック"/>
+        <a:font script="Hang" typeface="맑은 고딕"/>
+        <a:font script="Hans" typeface="等线"/>
+        <a:font script="Hant" typeface="新細明體"/>
+        <a:font script="Arab" typeface="Arial"/>
+        <a:font script="Hebr" typeface="Arial"/>
+        <a:font script="Thai" typeface="Cordia New"/>
+        <a:font script="Ethi" typeface="Nyala"/>
+        <a:font script="Beng" typeface="Vrinda"/>
+        <a:font script="Gujr" typeface="Shruti"/>
+        <a:font script="Khmr" typeface="DaunPenh"/>
+        <a:font script="Knda" typeface="Tunga"/>
+        <a:font script="Guru" typeface="Raavi"/>
+        <a:font script="Cans" typeface="Euphemia"/>
+        <a:font script="Cher" typeface="Plantagenet Cherokee"/>
+        <a:font script="Yiii" typeface="Microsoft Yi Baiti"/>
+        <a:font script="Tibt" typeface="Microsoft Himalaya"/>
+        <a:font script="Thaa" typeface="MV Boli"/>
+        <a:font script="Deva" typeface="Mangal"/>
+        <a:font script="Telu" typeface="Gautami"/>
+        <a:font script="Taml" typeface="Latha"/>
+        <a:font script="Syrc" typeface="Estrangelo Edessa"/>
+        <a:font script="Orya" typeface="Kalinga"/>
+        <a:font script="Mlym" typeface="Kartika"/>
+        <a:font script="Laoo" typeface="DokChampa"/>
+        <a:font script="Sinh" typeface="Iskoola Pota"/>
+        <a:font script="Mong" typeface="Mongolian Baiti"/>
+        <a:font script="Viet" typeface="Arial"/>
+        <a:font script="Uigh" typeface="Microsoft Uighur"/>
+        <a:font script="Geor" typeface="Sylfaen"/>
+        <a:font script="Armn" typeface="Arial"/>
+        <a:font script="Bugi" typeface="Leelawadee UI"/>
+        <a:font script="Bopo" typeface="Microsoft JhengHei"/>
+        <a:font script="Java" typeface="Javanese Text"/>
+        <a:font script="Lisu" typeface="Segoe UI"/>
+        <a:font script="Mymr" typeface="Myanmar Text"/>
+        <a:font script="Nkoo" typeface="Ebrima"/>
+        <a:font script="Olck" typeface="Nirmala UI"/>
+        <a:font script="Osma" typeface="Ebrima"/>
+        <a:font script="Phag" typeface="Phagspa"/>
+        <a:font script="Syrn" typeface="Estrangelo Edessa"/>
+        <a:font script="Syrj" typeface="Estrangelo Edessa"/>
+        <a:font script="Syre" typeface="Estrangelo Edessa"/>
+        <a:font script="Sora" typeface="Nirmala UI"/>
+        <a:font script="Tale" typeface="Microsoft Tai Le"/>
+        <a:font script="Talu" typeface="Microsoft New Tai Lue"/>
+        <a:font script="Tfng" typeface="Ebrima"/>
+      </a:minorFont>
+    </a:fontScheme>
+    <a:fmtScheme name="Office">
+      <a:fillStyleLst>
+        <a:solidFill>
+          <a:schemeClr val="phClr"/>
+        </a:solidFill>
+        <a:gradFill rotWithShape="1">
+          <a:gsLst>
+            <a:gs pos="0">
+              <a:schemeClr val="phClr">
+                <a:lumMod val="110000"/>
+                <a:satMod val="105000"/>
+                <a:tint val="67000"/>
+              </a:schemeClr>
+            </a:gs>
+            <a:gs pos="50000">
+              <a:schemeClr val="phClr">
+                <a:lumMod val="105000"/>
+                <a:satMod val="103000"/>
+                <a:tint val="73000"/>
+              </a:schemeClr>
+            </a:gs>
+            <a:gs pos="100000">
+              <a:schemeClr val="phClr">
+                <a:lumMod val="105000"/>
+                <a:satMod val="109000"/>
+                <a:tint val="81000"/>
+              </a:schemeClr>
+            </a:gs>
+          </a:gsLst>
+          <a:lin ang="5400000" scaled="0"/>
+        </a:gradFill>
+        <a:gradFill rotWithShape="1">
+          <a:gsLst>
+            <a:gs pos="0">
+              <a:schemeClr val="phClr">
+                <a:satMod val="103000"/>
+                <a:lumMod val="102000"/>
+                <a:tint val="94000"/>
+              </a:schemeClr>
+            </a:gs>
+            <a:gs pos="50000">
+              <a:schemeClr val="phClr">
+                <a:satMod val="110000"/>
+                <a:lumMod val="100000"/>
+                <a:shade val="100000"/>
+              </a:schemeClr>
+            </a:gs>
+            <a:gs pos="100000">
+              <a:schemeClr val="phClr">
+                <a:lumMod val="99000"/>
+                <a:satMod val="120000"/>
+                <a:shade val="78000"/>
+              </a:schemeClr>
+            </a:gs>
+          </a:gsLst>
+          <a:lin ang="5400000" scaled="0"/>
+        </a:gradFill>
+      </a:fillStyleLst>
+      <a:lnStyleLst>
+        <a:ln w="12700" cap="flat" cmpd="sng" algn="ctr">
+          <a:solidFill>
+            <a:schemeClr val="phClr"/>
+          </a:solidFill>
+          <a:prstDash val="solid"/>
+          <a:miter lim="800000"/>
+        </a:ln>
+        <a:ln w="19050" cap="flat" cmpd="sng" algn="ctr">
+          <a:solidFill>
+            <a:schemeClr val="phClr"/>
+          </a:solidFill>
+          <a:prstDash val="solid"/>
+          <a:miter lim="800000"/>
+        </a:ln>
+        <a:ln w="25400" cap="flat" cmpd="sng" algn="ctr">
+          <a:solidFill>
+            <a:schemeClr val="phClr"/>
+          </a:solidFill>
+          <a:prstDash val="solid"/>
+          <a:miter lim="800000"/>
+        </a:ln>
+      </a:lnStyleLst>
+      <a:effectStyleLst>
+        <a:effectStyle>
+          <a:effectLst/>
+        </a:effectStyle>
+        <a:effectStyle>
+          <a:effectLst/>
+        </a:effectStyle>
+        <a:effectStyle>
+          <a:effectLst>
+            <a:outerShdw blurRad="57150" dist="19050" dir="5400000" algn="ctr" rotWithShape="0">
+              <a:srgbClr val="000000">
+                <a:alpha val="63000"/>
+              </a:srgbClr>
+            </a:outerShdw>
+          </a:effectLst>
+        </a:effectStyle>
+      </a:effectStyleLst>
+      <a:bgFillStyleLst>
+        <a:solidFill>
+          <a:schemeClr val="phClr"/>
+        </a:solidFill>
+        <a:solidFill>
+          <a:schemeClr val="phClr">
+            <a:tint val="95000"/>
+            <a:satMod val="170000"/>
+          </a:schemeClr>
+        </a:solidFill>
+        <a:gradFill rotWithShape="1">
+          <a:gsLst>
+            <a:gs pos="0">
+              <a:schemeClr val="phClr">
+                <a:tint val="93000"/>
+                <a:satMod val="150000"/>
+                <a:shade val="98000"/>
+                <a:lumMod val="102000"/>
+              </a:schemeClr>
+            </a:gs>
+            <a:gs pos="50000">
+              <a:schemeClr val="phClr">
+                <a:tint val="98000"/>
+                <a:satMod val="130000"/>
+                <a:shade val="90000"/>
+                <a:lumMod val="103000"/>
+              </a:schemeClr>
+            </a:gs>
+            <a:gs pos="100000">
+              <a:schemeClr val="phClr">
+                <a:shade val="63000"/>
+                <a:satMod val="120000"/>
+              </a:schemeClr>
+            </a:gs>
+          </a:gsLst>
+          <a:lin ang="5400000" scaled="0"/>
+        </a:gradFill>
+      </a:bgFillStyleLst>
+    </a:fmtScheme>
+  </a:themeElements>
+  <a:objectDefaults>
+    <a:lnDef>
+      <a:spPr/>
+      <a:bodyPr/>
+      <a:lstStyle/>
+      <a:style>
+        <a:lnRef idx="2">
+          <a:schemeClr val="accent1"/>
+        </a:lnRef>
+        <a:fillRef idx="0">
+          <a:schemeClr val="accent1"/>
+        </a:fillRef>
+        <a:effectRef idx="1">
+          <a:schemeClr val="accent1"/>
+        </a:effectRef>
+        <a:fontRef idx="minor">
+          <a:schemeClr val="tx1"/>
+        </a:fontRef>
+      </a:style>
+    </a:lnDef>
+  </a:objectDefaults>
+  <a:extraClrSchemeLst/>
+  <a:extLst>
+    <a:ext uri="{05A4C25C-085E-4340-85A3-A5531E510DB2}">
+      <thm15:themeFamily xmlns:thm15="http://schemas.microsoft.com/office/thememl/2012/main" name="Office Theme" id="{2E142A2C-CD16-42D6-873A-C26D2A0506FA}" vid="{1BDDFF52-6CD6-40A5-AB3C-68EB2F1E4D0A}"/>
+    </a:ext>
+  </a:extLst>
+</a:theme>
 </file>